--- a/lecons/LSA/Meteorology/12_LSA_MET_L12_Global_Distribution_of_Precipitation.pptx
+++ b/lecons/LSA/Meteorology/12_LSA_MET_L12_Global_Distribution_of_Precipitation.pptx
@@ -65,9 +65,17 @@
     <p:sldId id="313" r:id="rId59"/>
     <p:sldId id="314" r:id="rId60"/>
     <p:sldId id="315" r:id="rId61"/>
+    <p:sldId id="316" r:id="rId62"/>
+    <p:sldId id="317" r:id="rId63"/>
+    <p:sldId id="318" r:id="rId64"/>
+    <p:sldId id="319" r:id="rId65"/>
+    <p:sldId id="320" r:id="rId66"/>
+    <p:sldId id="321" r:id="rId67"/>
+    <p:sldId id="322" r:id="rId68"/>
+    <p:sldId id="323" r:id="rId69"/>
   </p:sldIdLst>
   <p:notesMasterIdLst>
-    <p:notesMasterId r:id="rId62"/>
+    <p:notesMasterId r:id="rId70"/>
   </p:notesMasterIdLst>
   <p:sldSz cx="12192000" cy="6858000"/>
   <p:notesSz cx="6858000" cy="12192000"/>
@@ -3201,7 +3209,7 @@
           <a:p>
             <a:r>
               <a:rPr lang="en-US" dirty="0"/>
-              <a:t>We continue with the definitions. On this slide we have Intertropical Convergence Zone (ITCZ) and Air mass. Write each point on a new line, with the key term first, and explain it in your own words when we revise.</a:t>
+              <a:t>We continue with the definitions. On this slide we have Intertropical Convergence Zone (ITCZ) and Air mass. Write each point on a new line, with the key term first, and explain it in your own words when we revise. When you finish, we go to the next slide.</a:t>
             </a:r>
             <a:endParaRPr lang="en-US" dirty="0"/>
           </a:p>
@@ -3289,7 +3297,7 @@
           <a:p>
             <a:r>
               <a:rPr lang="en-US" dirty="0"/>
-              <a:t>Let us copy Pressure Belts. The pressure belts control rainfall as follows. Copy the point on General pattern on the left, then draw the diagram on the right: rainfall by latitude. Give it a title and label it clearly.</a:t>
+              <a:t>We continue with the definitions. On this slide we have Continentality and Insularity. Write each point on a new line, with the key term first, and explain it in your own words when we revise.</a:t>
             </a:r>
             <a:endParaRPr lang="en-US" dirty="0"/>
           </a:p>
@@ -3377,7 +3385,7 @@
           <a:p>
             <a:r>
               <a:rPr lang="en-US" dirty="0"/>
-              <a:t>Copy the point on Equatorial low (ITCZ) on the left, then draw the diagram on the right: the pressure belts. Give it a title and label it clearly.</a:t>
+              <a:t>Let us copy Spatial Pattern of Distribution by Latitude. Precipitation is distributed by latitude as follows. Copy the point on Equatorial zone (0° to 10° N and S) on the left, then draw the diagram on the right: rainfall and latitude. Give it a title and label it clearly.</a:t>
             </a:r>
             <a:endParaRPr lang="en-US" dirty="0"/>
           </a:p>
@@ -3553,7 +3561,7 @@
           <a:p>
             <a:r>
               <a:rPr lang="en-US" dirty="0"/>
-              <a:t>Copy the point on Subtropical highs (about 30° N and S) on the left, then draw the diagram on the right: the Sahara. Give it a title and label it clearly.</a:t>
+              <a:t>Copy the point on Tropical and subtropical zones (10° to 30°) on the left, then draw the diagram on the right: the hot deserts. Give it a title and label it clearly.</a:t>
             </a:r>
             <a:endParaRPr lang="en-US" dirty="0"/>
           </a:p>
@@ -3641,7 +3649,7 @@
           <a:p>
             <a:r>
               <a:rPr lang="en-US" dirty="0"/>
-              <a:t>We continue with Pressure Belts. On this slide we have Temperate lows (about 60° N and S) and Polar highs. Write each point on a new line, with the key term first, and explain it in your own words when we revise.</a:t>
+              <a:t>We continue with Spatial Pattern of Distribution by Latitude. Copy the point on Temperate zone (40° to 60°): write the key term first, then its explanation.</a:t>
             </a:r>
             <a:endParaRPr lang="en-US" dirty="0"/>
           </a:p>
@@ -3729,7 +3737,7 @@
           <a:p>
             <a:r>
               <a:rPr lang="en-US" dirty="0"/>
-              <a:t>Let us copy Air Masses. Air masses influence rainfall as follows. On this slide we have Maritime air masses. Write each point on a new line, with the key term first, and explain it in your own words when we revise.</a:t>
+              <a:t>Copy the point on Polar zones (above 60°) on the left, then draw the diagram on the right: an ice cap. Give it a title and label it clearly.</a:t>
             </a:r>
             <a:endParaRPr lang="en-US" dirty="0"/>
           </a:p>
@@ -3817,7 +3825,7 @@
           <a:p>
             <a:r>
               <a:rPr lang="en-US" dirty="0"/>
-              <a:t>Copy the point on Continental air masses on the left, then draw the diagram on the right: the Harmattan. Give it a title and label it clearly.</a:t>
+              <a:t>Let us copy Pressure Belts. The pressure belts explain this pattern in the following ways. Copy the point on Equatorial low pressure (ITCZ) on the left, then draw the diagram on the right: the pressure belts. Give it a title and label it clearly.</a:t>
             </a:r>
             <a:endParaRPr lang="en-US" dirty="0"/>
           </a:p>
@@ -3905,7 +3913,7 @@
           <a:p>
             <a:r>
               <a:rPr lang="en-US" dirty="0"/>
-              <a:t>Let us copy Secondary (Local) Factors. The local factors of rainfall are the following. Copy the point on Relief on the left, then draw the diagram on the right: factors of rainfall. Give it a title and label it clearly.</a:t>
+              <a:t>Copy the point on Subtropical high pressure (about 30° N and S) on the left, then draw the diagram on the right: a sand desert. Give it a title and label it clearly.</a:t>
             </a:r>
             <a:endParaRPr lang="en-US" dirty="0"/>
           </a:p>
@@ -3993,7 +4001,7 @@
           <a:p>
             <a:r>
               <a:rPr lang="en-US" dirty="0"/>
-              <a:t>Copy the point on Distance from the sea on the left, then draw the diagram on the right: douala and Garoua. Give it a title and label it clearly.</a:t>
+              <a:t>We continue with Pressure Belts. Copy the point on Temperate low pressure (about 60° N and S): write the key term first, then its explanation.</a:t>
             </a:r>
             <a:endParaRPr lang="en-US" dirty="0"/>
           </a:p>
@@ -4081,7 +4089,7 @@
           <a:p>
             <a:r>
               <a:rPr lang="en-US" dirty="0"/>
-              <a:t>We continue with Secondary (Local) Factors. On this slide we have Vegetation and Other factors. Write each point on a new line, with the key term first, and explain it in your own words when we revise. When you finish, we go to the next slide.</a:t>
+              <a:t>We continue with Pressure Belts. Copy the point on Polar high pressure: write the key term first, then its explanation.</a:t>
             </a:r>
             <a:endParaRPr lang="en-US" dirty="0"/>
           </a:p>
@@ -4169,7 +4177,7 @@
           <a:p>
             <a:r>
               <a:rPr lang="en-US" dirty="0"/>
-              <a:t>We continue with Secondary (Local) Factors. Copy this carefully.</a:t>
+              <a:t>Let us copy Air Masses. Air masses influence precipitation in the following ways. Copy the point on Maritime air masses: write the key term first, then its explanation.</a:t>
             </a:r>
             <a:endParaRPr lang="en-US" dirty="0"/>
           </a:p>
@@ -4257,7 +4265,7 @@
           <a:p>
             <a:r>
               <a:rPr lang="en-US" dirty="0"/>
-              <a:t>Now let us check what you have understood. Question 1: Why does the Equator receive heavy rain all year while 30° N is very dry? Answer in your exercise book.</a:t>
+              <a:t>Copy the point on Continental air masses on the left, then draw the diagram on the right: the Harmattan. Give it a title and label it clearly.</a:t>
             </a:r>
             <a:endParaRPr lang="en-US" dirty="0"/>
           </a:p>
@@ -4345,7 +4353,7 @@
           <a:p>
             <a:r>
               <a:rPr lang="en-US" dirty="0"/>
-              <a:t>The expected answer is: at the Equator, low pressure makes air rise and form rain clouds; at 30° N, high pressure makes air sink and warm, so no clouds form. If you got it right, well done.</a:t>
+              <a:t>Let us copy Relief, the Sea and Ocean Currents. Local rainfall is influenced by the following physical factors. Copy the point on Relief on the left, then draw the diagram on the right: local factors of rainfall. Give it a title and label it clearly.</a:t>
             </a:r>
             <a:endParaRPr lang="en-US" dirty="0"/>
           </a:p>
@@ -4521,7 +4529,7 @@
           <a:p>
             <a:r>
               <a:rPr lang="en-US" dirty="0"/>
-              <a:t>Now let us check what you have understood. Question 2: Give two reasons why Douala is wetter than Garoua. Answer in your exercise book.</a:t>
+              <a:t>Copy the point on Distance from the sea (insularity and continentality) on the left, then draw the diagram on the right: rainfall of Douala and Garoua. Give it a title and label it clearly.</a:t>
             </a:r>
             <a:endParaRPr lang="en-US" dirty="0"/>
           </a:p>
@@ -4609,7 +4617,7 @@
           <a:p>
             <a:r>
               <a:rPr lang="en-US" dirty="0"/>
-              <a:t>The expected answer is: it is on the coast near moist monsoon air; Mount Cameroon forces the air to rise (relief rain). If you got it right, well done.</a:t>
+              <a:t>We continue with Relief, the Sea and Ocean Currents. Copy the point on Ocean currents: write the key term first, then its explanation.</a:t>
             </a:r>
             <a:endParaRPr lang="en-US" dirty="0"/>
           </a:p>
@@ -4697,7 +4705,7 @@
           <a:p>
             <a:r>
               <a:rPr lang="en-US" dirty="0"/>
-              <a:t>Take your time to copy this part; we will continue together.</a:t>
+              <a:t>Let us copy Vegetation, Water Bodies and Towns. Local rainfall is also influenced by the following factors. Copy the point on Vegetation on the left, then draw the diagram on the right: a rainforest. Give it a title and label it clearly.</a:t>
             </a:r>
             <a:endParaRPr lang="en-US" dirty="0"/>
           </a:p>
@@ -4785,7 +4793,7 @@
           <a:p>
             <a:r>
               <a:rPr lang="en-US" dirty="0"/>
-              <a:t>For those who need more practice, fill in the blanks in your exercise book. The answers are: number 1, ITCZ; number 2, high; number 3, shadow.</a:t>
+              <a:t>Copy the point on Water bodies on the left, then draw the diagram on the right: lake Chad. Give it a title and label it clearly.</a:t>
             </a:r>
             <a:endParaRPr lang="en-US" dirty="0"/>
           </a:p>
@@ -4873,7 +4881,7 @@
           <a:p>
             <a:r>
               <a:rPr lang="en-US" dirty="0"/>
-              <a:t>For your homework: Define atmospheric pressure. We shall correct it at the beginning of our next lesson.</a:t>
+              <a:t>We continue with Vegetation, Water Bodies and Towns. Copy the point on Urban effects: write the key term first, then its explanation.</a:t>
             </a:r>
             <a:endParaRPr lang="en-US" dirty="0"/>
           </a:p>
@@ -4961,7 +4969,7 @@
           <a:p>
             <a:r>
               <a:rPr lang="en-US" dirty="0"/>
-              <a:t>Our next lesson will be on Lesson 13: Pressure Systems. Thank you for your attention, and see you next time.</a:t>
+              <a:t>Now let us check what you have understood. Question 1: Why does the Equator receive heavy rain all year while 30° N is very dry? Answer in your exercise book.</a:t>
             </a:r>
             <a:endParaRPr lang="en-US" dirty="0"/>
           </a:p>
@@ -5049,7 +5057,7 @@
           <a:p>
             <a:r>
               <a:rPr lang="en-US" dirty="0"/>
-              <a:t>Let us play the bilingual game. I say a word in English, and you give me the French word. Then we do the reverse.</a:t>
+              <a:t>The expected answer is: at the Equator, low pressure makes air rise and form rain clouds; at 30° N, high pressure makes air sink and warm, so no clouds form. If you got it right, well done.</a:t>
             </a:r>
             <a:endParaRPr lang="en-US" dirty="0"/>
           </a:p>
@@ -5137,7 +5145,7 @@
           <a:p>
             <a:r>
               <a:rPr lang="en-US" dirty="0"/>
-              <a:t>I record this information in the official logbook of the class after the lesson.</a:t>
+              <a:t>Now let us check what you have understood. Question 2: Give two reasons why Douala is wetter than Garoua. Answer in your exercise book.</a:t>
             </a:r>
             <a:endParaRPr lang="en-US" dirty="0"/>
           </a:p>
@@ -5225,7 +5233,7 @@
           <a:p>
             <a:r>
               <a:rPr lang="en-US" dirty="0"/>
-              <a:t>I complete the second page of the logbook: the matter taught, the evaluation, the homework and the attendance.</a:t>
+              <a:t>The expected answer is: it is on the coast near moist monsoon air; Mount Cameroon forces the air to rise (relief rain). If you got it right, well done.</a:t>
             </a:r>
             <a:endParaRPr lang="en-US" dirty="0"/>
           </a:p>
@@ -5313,7 +5321,7 @@
           <a:p>
             <a:r>
               <a:rPr lang="en-US" dirty="0"/>
-              <a:t>This slide is for me, the teacher: it gives the timing of the lesson and what to do if the projector is not available.</a:t>
+              <a:t>Take your time to copy this part; we will continue together.</a:t>
             </a:r>
             <a:endParaRPr lang="en-US" dirty="0"/>
           </a:p>
@@ -5489,7 +5497,7 @@
           <a:p>
             <a:r>
               <a:rPr lang="en-US" dirty="0"/>
-              <a:t>These are the references and picture credits used to prepare this lesson.</a:t>
+              <a:t>For those who need more practice, fill in the blanks in your exercise book. The answers are: number 1, ITCZ; number 2, high; number 3, shadow.</a:t>
             </a:r>
             <a:endParaRPr lang="en-US" dirty="0"/>
           </a:p>
@@ -5513,6 +5521,710 @@
             <a:fld id="{F7021451-1387-4CA6-816F-3879F97B5CBC}" type="slidenum">
               <a:rPr lang="en-US"/>
               <a:t>60</a:t>
+            </a:fld>
+            <a:endParaRPr lang="en-US"/>
+          </a:p>
+        </p:txBody>
+      </p:sp>
+    </p:spTree>
+    <p:extLst>
+      <p:ext uri="{BB962C8B-B14F-4D97-AF65-F5344CB8AC3E}">
+        <p14:creationId xmlns:p14="http://schemas.microsoft.com/office/powerpoint/2010/main" val="1024086991"/>
+      </p:ext>
+    </p:extLst>
+  </p:cSld>
+  <p:clrMapOvr>
+    <a:masterClrMapping/>
+  </p:clrMapOvr>
+</p:notes>
+</file>
+
+<file path=ppt/notesSlides/notesSlide61.xml><?xml version="1.0" encoding="utf-8"?>
+<p:notes xmlns:a="http://schemas.openxmlformats.org/drawingml/2006/main" xmlns:r="http://schemas.openxmlformats.org/officeDocument/2006/relationships" xmlns:p="http://schemas.openxmlformats.org/presentationml/2006/main">
+  <p:cSld>
+    <p:spTree>
+      <p:nvGrpSpPr>
+        <p:cNvPr id="1" name=""/>
+        <p:cNvGrpSpPr/>
+        <p:nvPr/>
+      </p:nvGrpSpPr>
+      <p:grpSpPr>
+        <a:xfrm>
+          <a:off x="0" y="0"/>
+          <a:ext cx="0" cy="0"/>
+          <a:chOff x="0" y="0"/>
+          <a:chExt cx="0" cy="0"/>
+        </a:xfrm>
+      </p:grpSpPr>
+      <p:sp>
+        <p:nvSpPr>
+          <p:cNvPr id="2" name="Slide Image Placeholder 1"/>
+          <p:cNvSpPr>
+            <a:spLocks noGrp="1" noRot="1" noChangeAspect="1"/>
+          </p:cNvSpPr>
+          <p:nvPr>
+            <p:ph type="sldImg"/>
+          </p:nvPr>
+        </p:nvSpPr>
+        <p:spPr/>
+      </p:sp>
+      <p:sp>
+        <p:nvSpPr>
+          <p:cNvPr id="3" name="Notes Placeholder 2"/>
+          <p:cNvSpPr>
+            <a:spLocks noGrp="1"/>
+          </p:cNvSpPr>
+          <p:nvPr>
+            <p:ph type="body" idx="1"/>
+          </p:nvPr>
+        </p:nvSpPr>
+        <p:spPr/>
+        <p:txBody>
+          <a:bodyPr/>
+          <a:lstStyle/>
+          <a:p>
+            <a:r>
+              <a:rPr lang="en-US" dirty="0"/>
+              <a:t>For your homework: Define atmospheric pressure. We shall correct it at the beginning of our next lesson.</a:t>
+            </a:r>
+            <a:endParaRPr lang="en-US" dirty="0"/>
+          </a:p>
+        </p:txBody>
+      </p:sp>
+      <p:sp>
+        <p:nvSpPr>
+          <p:cNvPr id="4" name="Slide Number Placeholder 3"/>
+          <p:cNvSpPr>
+            <a:spLocks noGrp="1"/>
+          </p:cNvSpPr>
+          <p:nvPr>
+            <p:ph type="sldNum" sz="quarter" idx="10"/>
+          </p:nvPr>
+        </p:nvSpPr>
+        <p:spPr/>
+        <p:txBody>
+          <a:bodyPr/>
+          <a:lstStyle/>
+          <a:p>
+            <a:fld id="{F7021451-1387-4CA6-816F-3879F97B5CBC}" type="slidenum">
+              <a:rPr lang="en-US"/>
+              <a:t>61</a:t>
+            </a:fld>
+            <a:endParaRPr lang="en-US"/>
+          </a:p>
+        </p:txBody>
+      </p:sp>
+    </p:spTree>
+    <p:extLst>
+      <p:ext uri="{BB962C8B-B14F-4D97-AF65-F5344CB8AC3E}">
+        <p14:creationId xmlns:p14="http://schemas.microsoft.com/office/powerpoint/2010/main" val="1024086991"/>
+      </p:ext>
+    </p:extLst>
+  </p:cSld>
+  <p:clrMapOvr>
+    <a:masterClrMapping/>
+  </p:clrMapOvr>
+</p:notes>
+</file>
+
+<file path=ppt/notesSlides/notesSlide62.xml><?xml version="1.0" encoding="utf-8"?>
+<p:notes xmlns:a="http://schemas.openxmlformats.org/drawingml/2006/main" xmlns:r="http://schemas.openxmlformats.org/officeDocument/2006/relationships" xmlns:p="http://schemas.openxmlformats.org/presentationml/2006/main">
+  <p:cSld>
+    <p:spTree>
+      <p:nvGrpSpPr>
+        <p:cNvPr id="1" name=""/>
+        <p:cNvGrpSpPr/>
+        <p:nvPr/>
+      </p:nvGrpSpPr>
+      <p:grpSpPr>
+        <a:xfrm>
+          <a:off x="0" y="0"/>
+          <a:ext cx="0" cy="0"/>
+          <a:chOff x="0" y="0"/>
+          <a:chExt cx="0" cy="0"/>
+        </a:xfrm>
+      </p:grpSpPr>
+      <p:sp>
+        <p:nvSpPr>
+          <p:cNvPr id="2" name="Slide Image Placeholder 1"/>
+          <p:cNvSpPr>
+            <a:spLocks noGrp="1" noRot="1" noChangeAspect="1"/>
+          </p:cNvSpPr>
+          <p:nvPr>
+            <p:ph type="sldImg"/>
+          </p:nvPr>
+        </p:nvSpPr>
+        <p:spPr/>
+      </p:sp>
+      <p:sp>
+        <p:nvSpPr>
+          <p:cNvPr id="3" name="Notes Placeholder 2"/>
+          <p:cNvSpPr>
+            <a:spLocks noGrp="1"/>
+          </p:cNvSpPr>
+          <p:nvPr>
+            <p:ph type="body" idx="1"/>
+          </p:nvPr>
+        </p:nvSpPr>
+        <p:spPr/>
+        <p:txBody>
+          <a:bodyPr/>
+          <a:lstStyle/>
+          <a:p>
+            <a:r>
+              <a:rPr lang="en-US" dirty="0"/>
+              <a:t>Our next lesson will be on Lesson 13: Pressure Systems. Thank you for your attention, and see you next time.</a:t>
+            </a:r>
+            <a:endParaRPr lang="en-US" dirty="0"/>
+          </a:p>
+        </p:txBody>
+      </p:sp>
+      <p:sp>
+        <p:nvSpPr>
+          <p:cNvPr id="4" name="Slide Number Placeholder 3"/>
+          <p:cNvSpPr>
+            <a:spLocks noGrp="1"/>
+          </p:cNvSpPr>
+          <p:nvPr>
+            <p:ph type="sldNum" sz="quarter" idx="10"/>
+          </p:nvPr>
+        </p:nvSpPr>
+        <p:spPr/>
+        <p:txBody>
+          <a:bodyPr/>
+          <a:lstStyle/>
+          <a:p>
+            <a:fld id="{F7021451-1387-4CA6-816F-3879F97B5CBC}" type="slidenum">
+              <a:rPr lang="en-US"/>
+              <a:t>62</a:t>
+            </a:fld>
+            <a:endParaRPr lang="en-US"/>
+          </a:p>
+        </p:txBody>
+      </p:sp>
+    </p:spTree>
+    <p:extLst>
+      <p:ext uri="{BB962C8B-B14F-4D97-AF65-F5344CB8AC3E}">
+        <p14:creationId xmlns:p14="http://schemas.microsoft.com/office/powerpoint/2010/main" val="1024086991"/>
+      </p:ext>
+    </p:extLst>
+  </p:cSld>
+  <p:clrMapOvr>
+    <a:masterClrMapping/>
+  </p:clrMapOvr>
+</p:notes>
+</file>
+
+<file path=ppt/notesSlides/notesSlide63.xml><?xml version="1.0" encoding="utf-8"?>
+<p:notes xmlns:a="http://schemas.openxmlformats.org/drawingml/2006/main" xmlns:r="http://schemas.openxmlformats.org/officeDocument/2006/relationships" xmlns:p="http://schemas.openxmlformats.org/presentationml/2006/main">
+  <p:cSld>
+    <p:spTree>
+      <p:nvGrpSpPr>
+        <p:cNvPr id="1" name=""/>
+        <p:cNvGrpSpPr/>
+        <p:nvPr/>
+      </p:nvGrpSpPr>
+      <p:grpSpPr>
+        <a:xfrm>
+          <a:off x="0" y="0"/>
+          <a:ext cx="0" cy="0"/>
+          <a:chOff x="0" y="0"/>
+          <a:chExt cx="0" cy="0"/>
+        </a:xfrm>
+      </p:grpSpPr>
+      <p:sp>
+        <p:nvSpPr>
+          <p:cNvPr id="2" name="Slide Image Placeholder 1"/>
+          <p:cNvSpPr>
+            <a:spLocks noGrp="1" noRot="1" noChangeAspect="1"/>
+          </p:cNvSpPr>
+          <p:nvPr>
+            <p:ph type="sldImg"/>
+          </p:nvPr>
+        </p:nvSpPr>
+        <p:spPr/>
+      </p:sp>
+      <p:sp>
+        <p:nvSpPr>
+          <p:cNvPr id="3" name="Notes Placeholder 2"/>
+          <p:cNvSpPr>
+            <a:spLocks noGrp="1"/>
+          </p:cNvSpPr>
+          <p:nvPr>
+            <p:ph type="body" idx="1"/>
+          </p:nvPr>
+        </p:nvSpPr>
+        <p:spPr/>
+        <p:txBody>
+          <a:bodyPr/>
+          <a:lstStyle/>
+          <a:p>
+            <a:r>
+              <a:rPr lang="en-US" dirty="0"/>
+              <a:t>Let us play the bilingual game. I say a word in English, and you give me the French word. Then we do the reverse.</a:t>
+            </a:r>
+            <a:endParaRPr lang="en-US" dirty="0"/>
+          </a:p>
+        </p:txBody>
+      </p:sp>
+      <p:sp>
+        <p:nvSpPr>
+          <p:cNvPr id="4" name="Slide Number Placeholder 3"/>
+          <p:cNvSpPr>
+            <a:spLocks noGrp="1"/>
+          </p:cNvSpPr>
+          <p:nvPr>
+            <p:ph type="sldNum" sz="quarter" idx="10"/>
+          </p:nvPr>
+        </p:nvSpPr>
+        <p:spPr/>
+        <p:txBody>
+          <a:bodyPr/>
+          <a:lstStyle/>
+          <a:p>
+            <a:fld id="{F7021451-1387-4CA6-816F-3879F97B5CBC}" type="slidenum">
+              <a:rPr lang="en-US"/>
+              <a:t>63</a:t>
+            </a:fld>
+            <a:endParaRPr lang="en-US"/>
+          </a:p>
+        </p:txBody>
+      </p:sp>
+    </p:spTree>
+    <p:extLst>
+      <p:ext uri="{BB962C8B-B14F-4D97-AF65-F5344CB8AC3E}">
+        <p14:creationId xmlns:p14="http://schemas.microsoft.com/office/powerpoint/2010/main" val="1024086991"/>
+      </p:ext>
+    </p:extLst>
+  </p:cSld>
+  <p:clrMapOvr>
+    <a:masterClrMapping/>
+  </p:clrMapOvr>
+</p:notes>
+</file>
+
+<file path=ppt/notesSlides/notesSlide64.xml><?xml version="1.0" encoding="utf-8"?>
+<p:notes xmlns:a="http://schemas.openxmlformats.org/drawingml/2006/main" xmlns:r="http://schemas.openxmlformats.org/officeDocument/2006/relationships" xmlns:p="http://schemas.openxmlformats.org/presentationml/2006/main">
+  <p:cSld>
+    <p:spTree>
+      <p:nvGrpSpPr>
+        <p:cNvPr id="1" name=""/>
+        <p:cNvGrpSpPr/>
+        <p:nvPr/>
+      </p:nvGrpSpPr>
+      <p:grpSpPr>
+        <a:xfrm>
+          <a:off x="0" y="0"/>
+          <a:ext cx="0" cy="0"/>
+          <a:chOff x="0" y="0"/>
+          <a:chExt cx="0" cy="0"/>
+        </a:xfrm>
+      </p:grpSpPr>
+      <p:sp>
+        <p:nvSpPr>
+          <p:cNvPr id="2" name="Slide Image Placeholder 1"/>
+          <p:cNvSpPr>
+            <a:spLocks noGrp="1" noRot="1" noChangeAspect="1"/>
+          </p:cNvSpPr>
+          <p:nvPr>
+            <p:ph type="sldImg"/>
+          </p:nvPr>
+        </p:nvSpPr>
+        <p:spPr/>
+      </p:sp>
+      <p:sp>
+        <p:nvSpPr>
+          <p:cNvPr id="3" name="Notes Placeholder 2"/>
+          <p:cNvSpPr>
+            <a:spLocks noGrp="1"/>
+          </p:cNvSpPr>
+          <p:nvPr>
+            <p:ph type="body" idx="1"/>
+          </p:nvPr>
+        </p:nvSpPr>
+        <p:spPr/>
+        <p:txBody>
+          <a:bodyPr/>
+          <a:lstStyle/>
+          <a:p>
+            <a:r>
+              <a:rPr lang="en-US" dirty="0"/>
+              <a:t>I record this information in the official logbook of the class after the lesson.</a:t>
+            </a:r>
+            <a:endParaRPr lang="en-US" dirty="0"/>
+          </a:p>
+        </p:txBody>
+      </p:sp>
+      <p:sp>
+        <p:nvSpPr>
+          <p:cNvPr id="4" name="Slide Number Placeholder 3"/>
+          <p:cNvSpPr>
+            <a:spLocks noGrp="1"/>
+          </p:cNvSpPr>
+          <p:nvPr>
+            <p:ph type="sldNum" sz="quarter" idx="10"/>
+          </p:nvPr>
+        </p:nvSpPr>
+        <p:spPr/>
+        <p:txBody>
+          <a:bodyPr/>
+          <a:lstStyle/>
+          <a:p>
+            <a:fld id="{F7021451-1387-4CA6-816F-3879F97B5CBC}" type="slidenum">
+              <a:rPr lang="en-US"/>
+              <a:t>64</a:t>
+            </a:fld>
+            <a:endParaRPr lang="en-US"/>
+          </a:p>
+        </p:txBody>
+      </p:sp>
+    </p:spTree>
+    <p:extLst>
+      <p:ext uri="{BB962C8B-B14F-4D97-AF65-F5344CB8AC3E}">
+        <p14:creationId xmlns:p14="http://schemas.microsoft.com/office/powerpoint/2010/main" val="1024086991"/>
+      </p:ext>
+    </p:extLst>
+  </p:cSld>
+  <p:clrMapOvr>
+    <a:masterClrMapping/>
+  </p:clrMapOvr>
+</p:notes>
+</file>
+
+<file path=ppt/notesSlides/notesSlide65.xml><?xml version="1.0" encoding="utf-8"?>
+<p:notes xmlns:a="http://schemas.openxmlformats.org/drawingml/2006/main" xmlns:r="http://schemas.openxmlformats.org/officeDocument/2006/relationships" xmlns:p="http://schemas.openxmlformats.org/presentationml/2006/main">
+  <p:cSld>
+    <p:spTree>
+      <p:nvGrpSpPr>
+        <p:cNvPr id="1" name=""/>
+        <p:cNvGrpSpPr/>
+        <p:nvPr/>
+      </p:nvGrpSpPr>
+      <p:grpSpPr>
+        <a:xfrm>
+          <a:off x="0" y="0"/>
+          <a:ext cx="0" cy="0"/>
+          <a:chOff x="0" y="0"/>
+          <a:chExt cx="0" cy="0"/>
+        </a:xfrm>
+      </p:grpSpPr>
+      <p:sp>
+        <p:nvSpPr>
+          <p:cNvPr id="2" name="Slide Image Placeholder 1"/>
+          <p:cNvSpPr>
+            <a:spLocks noGrp="1" noRot="1" noChangeAspect="1"/>
+          </p:cNvSpPr>
+          <p:nvPr>
+            <p:ph type="sldImg"/>
+          </p:nvPr>
+        </p:nvSpPr>
+        <p:spPr/>
+      </p:sp>
+      <p:sp>
+        <p:nvSpPr>
+          <p:cNvPr id="3" name="Notes Placeholder 2"/>
+          <p:cNvSpPr>
+            <a:spLocks noGrp="1"/>
+          </p:cNvSpPr>
+          <p:nvPr>
+            <p:ph type="body" idx="1"/>
+          </p:nvPr>
+        </p:nvSpPr>
+        <p:spPr/>
+        <p:txBody>
+          <a:bodyPr/>
+          <a:lstStyle/>
+          <a:p>
+            <a:r>
+              <a:rPr lang="en-US" dirty="0"/>
+              <a:t>I complete the second page of the logbook: the matter taught, the evaluation, the homework and the attendance.</a:t>
+            </a:r>
+            <a:endParaRPr lang="en-US" dirty="0"/>
+          </a:p>
+        </p:txBody>
+      </p:sp>
+      <p:sp>
+        <p:nvSpPr>
+          <p:cNvPr id="4" name="Slide Number Placeholder 3"/>
+          <p:cNvSpPr>
+            <a:spLocks noGrp="1"/>
+          </p:cNvSpPr>
+          <p:nvPr>
+            <p:ph type="sldNum" sz="quarter" idx="10"/>
+          </p:nvPr>
+        </p:nvSpPr>
+        <p:spPr/>
+        <p:txBody>
+          <a:bodyPr/>
+          <a:lstStyle/>
+          <a:p>
+            <a:fld id="{F7021451-1387-4CA6-816F-3879F97B5CBC}" type="slidenum">
+              <a:rPr lang="en-US"/>
+              <a:t>65</a:t>
+            </a:fld>
+            <a:endParaRPr lang="en-US"/>
+          </a:p>
+        </p:txBody>
+      </p:sp>
+    </p:spTree>
+    <p:extLst>
+      <p:ext uri="{BB962C8B-B14F-4D97-AF65-F5344CB8AC3E}">
+        <p14:creationId xmlns:p14="http://schemas.microsoft.com/office/powerpoint/2010/main" val="1024086991"/>
+      </p:ext>
+    </p:extLst>
+  </p:cSld>
+  <p:clrMapOvr>
+    <a:masterClrMapping/>
+  </p:clrMapOvr>
+</p:notes>
+</file>
+
+<file path=ppt/notesSlides/notesSlide66.xml><?xml version="1.0" encoding="utf-8"?>
+<p:notes xmlns:a="http://schemas.openxmlformats.org/drawingml/2006/main" xmlns:r="http://schemas.openxmlformats.org/officeDocument/2006/relationships" xmlns:p="http://schemas.openxmlformats.org/presentationml/2006/main">
+  <p:cSld>
+    <p:spTree>
+      <p:nvGrpSpPr>
+        <p:cNvPr id="1" name=""/>
+        <p:cNvGrpSpPr/>
+        <p:nvPr/>
+      </p:nvGrpSpPr>
+      <p:grpSpPr>
+        <a:xfrm>
+          <a:off x="0" y="0"/>
+          <a:ext cx="0" cy="0"/>
+          <a:chOff x="0" y="0"/>
+          <a:chExt cx="0" cy="0"/>
+        </a:xfrm>
+      </p:grpSpPr>
+      <p:sp>
+        <p:nvSpPr>
+          <p:cNvPr id="2" name="Slide Image Placeholder 1"/>
+          <p:cNvSpPr>
+            <a:spLocks noGrp="1" noRot="1" noChangeAspect="1"/>
+          </p:cNvSpPr>
+          <p:nvPr>
+            <p:ph type="sldImg"/>
+          </p:nvPr>
+        </p:nvSpPr>
+        <p:spPr/>
+      </p:sp>
+      <p:sp>
+        <p:nvSpPr>
+          <p:cNvPr id="3" name="Notes Placeholder 2"/>
+          <p:cNvSpPr>
+            <a:spLocks noGrp="1"/>
+          </p:cNvSpPr>
+          <p:nvPr>
+            <p:ph type="body" idx="1"/>
+          </p:nvPr>
+        </p:nvSpPr>
+        <p:spPr/>
+        <p:txBody>
+          <a:bodyPr/>
+          <a:lstStyle/>
+          <a:p>
+            <a:r>
+              <a:rPr lang="en-US" dirty="0"/>
+              <a:t>This slide is for me, the teacher: it gives the timing of the lesson and what to do if the projector is not available.</a:t>
+            </a:r>
+            <a:endParaRPr lang="en-US" dirty="0"/>
+          </a:p>
+        </p:txBody>
+      </p:sp>
+      <p:sp>
+        <p:nvSpPr>
+          <p:cNvPr id="4" name="Slide Number Placeholder 3"/>
+          <p:cNvSpPr>
+            <a:spLocks noGrp="1"/>
+          </p:cNvSpPr>
+          <p:nvPr>
+            <p:ph type="sldNum" sz="quarter" idx="10"/>
+          </p:nvPr>
+        </p:nvSpPr>
+        <p:spPr/>
+        <p:txBody>
+          <a:bodyPr/>
+          <a:lstStyle/>
+          <a:p>
+            <a:fld id="{F7021451-1387-4CA6-816F-3879F97B5CBC}" type="slidenum">
+              <a:rPr lang="en-US"/>
+              <a:t>66</a:t>
+            </a:fld>
+            <a:endParaRPr lang="en-US"/>
+          </a:p>
+        </p:txBody>
+      </p:sp>
+    </p:spTree>
+    <p:extLst>
+      <p:ext uri="{BB962C8B-B14F-4D97-AF65-F5344CB8AC3E}">
+        <p14:creationId xmlns:p14="http://schemas.microsoft.com/office/powerpoint/2010/main" val="1024086991"/>
+      </p:ext>
+    </p:extLst>
+  </p:cSld>
+  <p:clrMapOvr>
+    <a:masterClrMapping/>
+  </p:clrMapOvr>
+</p:notes>
+</file>
+
+<file path=ppt/notesSlides/notesSlide67.xml><?xml version="1.0" encoding="utf-8"?>
+<p:notes xmlns:a="http://schemas.openxmlformats.org/drawingml/2006/main" xmlns:r="http://schemas.openxmlformats.org/officeDocument/2006/relationships" xmlns:p="http://schemas.openxmlformats.org/presentationml/2006/main">
+  <p:cSld>
+    <p:spTree>
+      <p:nvGrpSpPr>
+        <p:cNvPr id="1" name=""/>
+        <p:cNvGrpSpPr/>
+        <p:nvPr/>
+      </p:nvGrpSpPr>
+      <p:grpSpPr>
+        <a:xfrm>
+          <a:off x="0" y="0"/>
+          <a:ext cx="0" cy="0"/>
+          <a:chOff x="0" y="0"/>
+          <a:chExt cx="0" cy="0"/>
+        </a:xfrm>
+      </p:grpSpPr>
+      <p:sp>
+        <p:nvSpPr>
+          <p:cNvPr id="2" name="Slide Image Placeholder 1"/>
+          <p:cNvSpPr>
+            <a:spLocks noGrp="1" noRot="1" noChangeAspect="1"/>
+          </p:cNvSpPr>
+          <p:nvPr>
+            <p:ph type="sldImg"/>
+          </p:nvPr>
+        </p:nvSpPr>
+        <p:spPr/>
+      </p:sp>
+      <p:sp>
+        <p:nvSpPr>
+          <p:cNvPr id="3" name="Notes Placeholder 2"/>
+          <p:cNvSpPr>
+            <a:spLocks noGrp="1"/>
+          </p:cNvSpPr>
+          <p:nvPr>
+            <p:ph type="body" idx="1"/>
+          </p:nvPr>
+        </p:nvSpPr>
+        <p:spPr/>
+        <p:txBody>
+          <a:bodyPr/>
+          <a:lstStyle/>
+          <a:p>
+            <a:r>
+              <a:rPr lang="en-US" dirty="0"/>
+              <a:t>Take your time to copy this part; we will continue together.</a:t>
+            </a:r>
+            <a:endParaRPr lang="en-US" dirty="0"/>
+          </a:p>
+        </p:txBody>
+      </p:sp>
+      <p:sp>
+        <p:nvSpPr>
+          <p:cNvPr id="4" name="Slide Number Placeholder 3"/>
+          <p:cNvSpPr>
+            <a:spLocks noGrp="1"/>
+          </p:cNvSpPr>
+          <p:nvPr>
+            <p:ph type="sldNum" sz="quarter" idx="10"/>
+          </p:nvPr>
+        </p:nvSpPr>
+        <p:spPr/>
+        <p:txBody>
+          <a:bodyPr/>
+          <a:lstStyle/>
+          <a:p>
+            <a:fld id="{F7021451-1387-4CA6-816F-3879F97B5CBC}" type="slidenum">
+              <a:rPr lang="en-US"/>
+              <a:t>67</a:t>
+            </a:fld>
+            <a:endParaRPr lang="en-US"/>
+          </a:p>
+        </p:txBody>
+      </p:sp>
+    </p:spTree>
+    <p:extLst>
+      <p:ext uri="{BB962C8B-B14F-4D97-AF65-F5344CB8AC3E}">
+        <p14:creationId xmlns:p14="http://schemas.microsoft.com/office/powerpoint/2010/main" val="1024086991"/>
+      </p:ext>
+    </p:extLst>
+  </p:cSld>
+  <p:clrMapOvr>
+    <a:masterClrMapping/>
+  </p:clrMapOvr>
+</p:notes>
+</file>
+
+<file path=ppt/notesSlides/notesSlide68.xml><?xml version="1.0" encoding="utf-8"?>
+<p:notes xmlns:a="http://schemas.openxmlformats.org/drawingml/2006/main" xmlns:r="http://schemas.openxmlformats.org/officeDocument/2006/relationships" xmlns:p="http://schemas.openxmlformats.org/presentationml/2006/main">
+  <p:cSld>
+    <p:spTree>
+      <p:nvGrpSpPr>
+        <p:cNvPr id="1" name=""/>
+        <p:cNvGrpSpPr/>
+        <p:nvPr/>
+      </p:nvGrpSpPr>
+      <p:grpSpPr>
+        <a:xfrm>
+          <a:off x="0" y="0"/>
+          <a:ext cx="0" cy="0"/>
+          <a:chOff x="0" y="0"/>
+          <a:chExt cx="0" cy="0"/>
+        </a:xfrm>
+      </p:grpSpPr>
+      <p:sp>
+        <p:nvSpPr>
+          <p:cNvPr id="2" name="Slide Image Placeholder 1"/>
+          <p:cNvSpPr>
+            <a:spLocks noGrp="1" noRot="1" noChangeAspect="1"/>
+          </p:cNvSpPr>
+          <p:nvPr>
+            <p:ph type="sldImg"/>
+          </p:nvPr>
+        </p:nvSpPr>
+        <p:spPr/>
+      </p:sp>
+      <p:sp>
+        <p:nvSpPr>
+          <p:cNvPr id="3" name="Notes Placeholder 2"/>
+          <p:cNvSpPr>
+            <a:spLocks noGrp="1"/>
+          </p:cNvSpPr>
+          <p:nvPr>
+            <p:ph type="body" idx="1"/>
+          </p:nvPr>
+        </p:nvSpPr>
+        <p:spPr/>
+        <p:txBody>
+          <a:bodyPr/>
+          <a:lstStyle/>
+          <a:p>
+            <a:r>
+              <a:rPr lang="en-US" dirty="0"/>
+              <a:t>These are the references and picture credits used to prepare this lesson.</a:t>
+            </a:r>
+            <a:endParaRPr lang="en-US" dirty="0"/>
+          </a:p>
+        </p:txBody>
+      </p:sp>
+      <p:sp>
+        <p:nvSpPr>
+          <p:cNvPr id="4" name="Slide Number Placeholder 3"/>
+          <p:cNvSpPr>
+            <a:spLocks noGrp="1"/>
+          </p:cNvSpPr>
+          <p:nvPr>
+            <p:ph type="sldNum" sz="quarter" idx="10"/>
+          </p:nvPr>
+        </p:nvSpPr>
+        <p:spPr/>
+        <p:txBody>
+          <a:bodyPr/>
+          <a:lstStyle/>
+          <a:p>
+            <a:fld id="{F7021451-1387-4CA6-816F-3879F97B5CBC}" type="slidenum">
+              <a:rPr lang="en-US"/>
+              <a:t>68</a:t>
             </a:fld>
             <a:endParaRPr lang="en-US"/>
           </a:p>
@@ -14998,170 +15710,9 @@
           </a:p>
         </p:txBody>
       </p:sp>
-      <p:sp>
-        <p:nvSpPr>
-          <p:cNvPr id="3" name="Text 1"/>
-          <p:cNvSpPr/>
-          <p:nvPr/>
-        </p:nvSpPr>
-        <p:spPr>
-          <a:xfrm>
-            <a:off x="365760" y="1005840"/>
-            <a:ext cx="11460175" cy="731520"/>
-          </a:xfrm>
-          <a:prstGeom prst="rect">
-            <a:avLst/>
-          </a:prstGeom>
-          <a:noFill/>
-          <a:ln/>
-        </p:spPr>
-        <p:txBody>
-          <a:bodyPr wrap="square" lIns="0" tIns="0" rIns="0" bIns="0" rtlCol="0" anchor="ctr">
-            <a:normAutofit/>
-          </a:bodyPr>
-          <a:lstStyle/>
-          <a:p>
-            <a:pPr algn="ctr" indent="0" marL="0">
-              <a:buNone/>
-            </a:pPr>
-            <a:r>
-              <a:rPr lang="en-US" sz="3600" b="1" dirty="0">
-                <a:solidFill>
-                  <a:srgbClr val="990011"/>
-                </a:solidFill>
-                <a:latin typeface="Times New Roman" pitchFamily="34" charset="0"/>
-                <a:ea typeface="Times New Roman" pitchFamily="34" charset="-122"/>
-                <a:cs typeface="Times New Roman" pitchFamily="34" charset="-120"/>
-              </a:rPr>
-              <a:t>1. The Global Pattern and Primary Factors</a:t>
-            </a:r>
-            <a:endParaRPr lang="en-US" sz="3600" dirty="0"/>
-          </a:p>
-        </p:txBody>
-      </p:sp>
-      <p:sp>
-        <p:nvSpPr>
-          <p:cNvPr id="4" name="Text 2"/>
-          <p:cNvSpPr/>
-          <p:nvPr/>
-        </p:nvSpPr>
-        <p:spPr>
-          <a:xfrm>
-            <a:off x="365760" y="1737360"/>
-            <a:ext cx="5120640" cy="457200"/>
-          </a:xfrm>
-          <a:prstGeom prst="rect">
-            <a:avLst/>
-          </a:prstGeom>
-          <a:noFill/>
-          <a:ln/>
-        </p:spPr>
-        <p:txBody>
-          <a:bodyPr wrap="square" lIns="0" tIns="0" rIns="0" bIns="0" rtlCol="0" anchor="ctr">
-            <a:normAutofit/>
-          </a:bodyPr>
-          <a:lstStyle/>
-          <a:p>
-            <a:pPr algn="l" indent="0" marL="0">
-              <a:buNone/>
-            </a:pPr>
-            <a:r>
-              <a:rPr lang="en-US" sz="3000" b="1" dirty="0">
-                <a:solidFill>
-                  <a:srgbClr val="990011"/>
-                </a:solidFill>
-                <a:latin typeface="Times New Roman" pitchFamily="34" charset="0"/>
-                <a:ea typeface="Times New Roman" pitchFamily="34" charset="-122"/>
-                <a:cs typeface="Times New Roman" pitchFamily="34" charset="-120"/>
-              </a:rPr>
-              <a:t>A) Pressure Belts</a:t>
-            </a:r>
-            <a:endParaRPr lang="en-US" sz="3000" dirty="0"/>
-          </a:p>
-        </p:txBody>
-      </p:sp>
-      <p:sp>
-        <p:nvSpPr>
-          <p:cNvPr id="5" name="Text 3"/>
-          <p:cNvSpPr/>
-          <p:nvPr/>
-        </p:nvSpPr>
-        <p:spPr>
-          <a:xfrm>
-            <a:off x="365760" y="2240280"/>
-            <a:ext cx="4846320" cy="4160520"/>
-          </a:xfrm>
-          <a:prstGeom prst="rect">
-            <a:avLst/>
-          </a:prstGeom>
-          <a:noFill/>
-          <a:ln/>
-        </p:spPr>
-        <p:txBody>
-          <a:bodyPr wrap="square" lIns="0" tIns="0" rIns="0" bIns="0" rtlCol="0" anchor="t"/>
-          <a:lstStyle/>
-          <a:p>
-            <a:pPr algn="l" indent="0" marL="0">
-              <a:spcAft>
-                <a:spcPts val="800"/>
-              </a:spcAft>
-              <a:buNone/>
-            </a:pPr>
-            <a:r>
-              <a:rPr lang="en-US" sz="3200" i="1" dirty="0">
-                <a:solidFill>
-                  <a:srgbClr val="111111"/>
-                </a:solidFill>
-                <a:latin typeface="Times New Roman" pitchFamily="34" charset="0"/>
-                <a:ea typeface="Times New Roman" pitchFamily="34" charset="-122"/>
-                <a:cs typeface="Times New Roman" pitchFamily="34" charset="-120"/>
-              </a:rPr>
-              <a:t>The pressure belts control rainfall as follows:</a:t>
-            </a:r>
-            <a:endParaRPr lang="en-US" sz="3200" dirty="0"/>
-          </a:p>
-          <a:p>
-            <a:pPr algn="l" indent="0" marL="0">
-              <a:spcAft>
-                <a:spcPts val="800"/>
-              </a:spcAft>
-              <a:buNone/>
-            </a:pPr>
-            <a:r>
-              <a:rPr lang="en-US" sz="3200" b="1" dirty="0">
-                <a:solidFill>
-                  <a:srgbClr val="111111"/>
-                </a:solidFill>
-                <a:latin typeface="Times New Roman" pitchFamily="34" charset="0"/>
-                <a:ea typeface="Times New Roman" pitchFamily="34" charset="-122"/>
-                <a:cs typeface="Times New Roman" pitchFamily="34" charset="-120"/>
-              </a:rPr>
-              <a:t>General pattern: </a:t>
-            </a:r>
-            <a:pPr algn="l" indent="0" marL="0">
-              <a:spcAft>
-                <a:spcPts val="800"/>
-              </a:spcAft>
-              <a:buNone/>
-            </a:pPr>
-            <a:r>
-              <a:rPr lang="en-US" sz="3200" dirty="0">
-                <a:solidFill>
-                  <a:srgbClr val="111111"/>
-                </a:solidFill>
-                <a:latin typeface="Times New Roman" pitchFamily="34" charset="0"/>
-                <a:ea typeface="Times New Roman" pitchFamily="34" charset="-122"/>
-                <a:cs typeface="Times New Roman" pitchFamily="34" charset="-120"/>
-              </a:rPr>
-              <a:t>Rainfall is heaviest near the Equator and decreases, unevenly, towards the poles.</a:t>
-            </a:r>
-            <a:endParaRPr lang="en-US" sz="3200" dirty="0"/>
-          </a:p>
-        </p:txBody>
-      </p:sp>
       <p:pic>
         <p:nvPicPr>
-          <p:cNvPr id="6" name="Image 0" descr="/home/claude/f4/img/v2/rain_latitude_big.png">    </p:cNvPr>
+          <p:cNvPr id="3" name="Image 0" descr="/home/claude/f4/img/minesec_sheet.png">    </p:cNvPr>
           <p:cNvPicPr>
             <a:picLocks noChangeAspect="1"/>
           </p:cNvPicPr>
@@ -15175,8 +15726,8 @@
         </p:blipFill>
         <p:spPr>
           <a:xfrm>
-            <a:off x="5349240" y="2461422"/>
-            <a:ext cx="6659575" cy="2913564"/>
+            <a:off x="0" y="658368"/>
+            <a:ext cx="2468880" cy="5833872"/>
           </a:xfrm>
           <a:prstGeom prst="rect">
             <a:avLst/>
@@ -15185,14 +15736,14 @@
       </p:pic>
       <p:sp>
         <p:nvSpPr>
-          <p:cNvPr id="7" name="Text 4"/>
+          <p:cNvPr id="4" name="Text 1"/>
           <p:cNvSpPr/>
           <p:nvPr/>
         </p:nvSpPr>
         <p:spPr>
           <a:xfrm>
-            <a:off x="5349240" y="6089904"/>
-            <a:ext cx="6659575" cy="347472"/>
+            <a:off x="2697480" y="1005840"/>
+            <a:ext cx="9174175" cy="731520"/>
           </a:xfrm>
           <a:prstGeom prst="rect">
             <a:avLst/>
@@ -15201,24 +15752,122 @@
           <a:ln/>
         </p:spPr>
         <p:txBody>
-          <a:bodyPr wrap="square" lIns="0" tIns="0" rIns="0" bIns="0" rtlCol="0" anchor="ctr"/>
+          <a:bodyPr wrap="square" lIns="0" tIns="0" rIns="0" bIns="0" rtlCol="0" anchor="ctr">
+            <a:normAutofit/>
+          </a:bodyPr>
           <a:lstStyle/>
           <a:p>
             <a:pPr algn="ctr" indent="0" marL="0">
               <a:buNone/>
             </a:pPr>
             <a:r>
-              <a:rPr lang="en-US" sz="1600" i="1" dirty="0">
-                <a:solidFill>
-                  <a:srgbClr val="555555"/>
+              <a:rPr lang="en-US" sz="3600" b="1" dirty="0">
+                <a:solidFill>
+                  <a:srgbClr val="990011"/>
                 </a:solidFill>
                 <a:latin typeface="Times New Roman" pitchFamily="34" charset="0"/>
                 <a:ea typeface="Times New Roman" pitchFamily="34" charset="-122"/>
                 <a:cs typeface="Times New Roman" pitchFamily="34" charset="-120"/>
               </a:rPr>
-              <a:t>Illustration: rainfall by latitude</a:t>
-            </a:r>
-            <a:endParaRPr lang="en-US" sz="1600" dirty="0"/>
+              <a:t>DEFINITIONS (continued)</a:t>
+            </a:r>
+            <a:endParaRPr lang="en-US" sz="3600" dirty="0"/>
+          </a:p>
+        </p:txBody>
+      </p:sp>
+      <p:sp>
+        <p:nvSpPr>
+          <p:cNvPr id="5" name="Text 2"/>
+          <p:cNvSpPr/>
+          <p:nvPr/>
+        </p:nvSpPr>
+        <p:spPr>
+          <a:xfrm>
+            <a:off x="2697480" y="1783080"/>
+            <a:ext cx="9174175" cy="4663440"/>
+          </a:xfrm>
+          <a:prstGeom prst="rect">
+            <a:avLst/>
+          </a:prstGeom>
+          <a:noFill/>
+          <a:ln/>
+        </p:spPr>
+        <p:txBody>
+          <a:bodyPr wrap="square" lIns="0" tIns="0" rIns="0" bIns="0" rtlCol="0" anchor="t"/>
+          <a:lstStyle/>
+          <a:p>
+            <a:pPr algn="l" indent="0" marL="0">
+              <a:spcAft>
+                <a:spcPts val="800"/>
+              </a:spcAft>
+              <a:buNone/>
+            </a:pPr>
+            <a:r>
+              <a:rPr lang="en-US" sz="4000" b="1" dirty="0">
+                <a:solidFill>
+                  <a:srgbClr val="111111"/>
+                </a:solidFill>
+                <a:latin typeface="Times New Roman" pitchFamily="34" charset="0"/>
+                <a:ea typeface="Times New Roman" pitchFamily="34" charset="-122"/>
+                <a:cs typeface="Times New Roman" pitchFamily="34" charset="-120"/>
+              </a:rPr>
+              <a:t>Continentality: </a:t>
+            </a:r>
+            <a:pPr algn="l" indent="0" marL="0">
+              <a:spcAft>
+                <a:spcPts val="800"/>
+              </a:spcAft>
+              <a:buNone/>
+            </a:pPr>
+            <a:r>
+              <a:rPr lang="en-US" sz="4000" dirty="0">
+                <a:solidFill>
+                  <a:srgbClr val="111111"/>
+                </a:solidFill>
+                <a:latin typeface="Times New Roman" pitchFamily="34" charset="0"/>
+                <a:ea typeface="Times New Roman" pitchFamily="34" charset="-122"/>
+                <a:cs typeface="Times New Roman" pitchFamily="34" charset="-120"/>
+              </a:rPr>
+              <a:t>It is the effect of distance from the sea, which makes inland areas drier and their temperatures more extreme.</a:t>
+            </a:r>
+            <a:endParaRPr lang="en-US" sz="4000" dirty="0"/>
+          </a:p>
+          <a:p>
+            <a:pPr algn="l" indent="0" marL="0">
+              <a:spcAft>
+                <a:spcPts val="800"/>
+              </a:spcAft>
+              <a:buNone/>
+            </a:pPr>
+            <a:r>
+              <a:rPr lang="en-US" sz="4000" b="1" dirty="0">
+                <a:solidFill>
+                  <a:srgbClr val="111111"/>
+                </a:solidFill>
+                <a:latin typeface="Times New Roman" pitchFamily="34" charset="0"/>
+                <a:ea typeface="Times New Roman" pitchFamily="34" charset="-122"/>
+                <a:cs typeface="Times New Roman" pitchFamily="34" charset="-120"/>
+              </a:rPr>
+              <a:t>Insularity: </a:t>
+            </a:r>
+            <a:pPr algn="l" indent="0" marL="0">
+              <a:spcAft>
+                <a:spcPts val="800"/>
+              </a:spcAft>
+              <a:buNone/>
+            </a:pPr>
+            <a:r>
+              <a:rPr lang="en-US" sz="4000" dirty="0">
+                <a:solidFill>
+                  <a:srgbClr val="111111"/>
+                </a:solidFill>
+                <a:latin typeface="Times New Roman" pitchFamily="34" charset="0"/>
+                <a:ea typeface="Times New Roman" pitchFamily="34" charset="-122"/>
+                <a:cs typeface="Times New Roman" pitchFamily="34" charset="-120"/>
+              </a:rPr>
+              <a:t>It is the effect of being surrounded by the sea, which makes islands and coasts wetter and milder.</a:t>
+            </a:r>
+            <a:endParaRPr lang="en-US" sz="4000" dirty="0"/>
           </a:p>
         </p:txBody>
       </p:sp>
@@ -15369,7 +16018,7 @@
                 <a:ea typeface="Times New Roman" pitchFamily="34" charset="-122"/>
                 <a:cs typeface="Times New Roman" pitchFamily="34" charset="-120"/>
               </a:rPr>
-              <a:t>1. The Global Pattern and Primary Factors</a:t>
+              <a:t>1. Spatial Pattern of Distribution by Latitude</a:t>
             </a:r>
             <a:endParaRPr lang="en-US" sz="3600" dirty="0"/>
           </a:p>
@@ -15383,49 +16032,8 @@
         </p:nvSpPr>
         <p:spPr>
           <a:xfrm>
-            <a:off x="365760" y="1737360"/>
-            <a:ext cx="5120640" cy="457200"/>
-          </a:xfrm>
-          <a:prstGeom prst="rect">
-            <a:avLst/>
-          </a:prstGeom>
-          <a:noFill/>
-          <a:ln/>
-        </p:spPr>
-        <p:txBody>
-          <a:bodyPr wrap="square" lIns="0" tIns="0" rIns="0" bIns="0" rtlCol="0" anchor="ctr">
-            <a:normAutofit/>
-          </a:bodyPr>
-          <a:lstStyle/>
-          <a:p>
-            <a:pPr algn="l" indent="0" marL="0">
-              <a:buNone/>
-            </a:pPr>
-            <a:r>
-              <a:rPr lang="en-US" sz="3000" b="1" dirty="0">
-                <a:solidFill>
-                  <a:srgbClr val="990011"/>
-                </a:solidFill>
-                <a:latin typeface="Times New Roman" pitchFamily="34" charset="0"/>
-                <a:ea typeface="Times New Roman" pitchFamily="34" charset="-122"/>
-                <a:cs typeface="Times New Roman" pitchFamily="34" charset="-120"/>
-              </a:rPr>
-              <a:t>A) Pressure Belts</a:t>
-            </a:r>
-            <a:endParaRPr lang="en-US" sz="3000" dirty="0"/>
-          </a:p>
-        </p:txBody>
-      </p:sp>
-      <p:sp>
-        <p:nvSpPr>
-          <p:cNvPr id="5" name="Text 3"/>
-          <p:cNvSpPr/>
-          <p:nvPr/>
-        </p:nvSpPr>
-        <p:spPr>
-          <a:xfrm>
-            <a:off x="365760" y="2240280"/>
-            <a:ext cx="4846320" cy="4160520"/>
+            <a:off x="365760" y="1783080"/>
+            <a:ext cx="6035040" cy="4617720"/>
           </a:xfrm>
           <a:prstGeom prst="rect">
             <a:avLst/>
@@ -15444,7 +16052,7 @@
               <a:buNone/>
             </a:pPr>
             <a:r>
-              <a:rPr lang="en-US" sz="3600" b="1" dirty="0">
+              <a:rPr lang="en-US" sz="3000" i="1" dirty="0">
                 <a:solidFill>
                   <a:srgbClr val="111111"/>
                 </a:solidFill>
@@ -15452,8 +16060,11 @@
                 <a:ea typeface="Times New Roman" pitchFamily="34" charset="-122"/>
                 <a:cs typeface="Times New Roman" pitchFamily="34" charset="-120"/>
               </a:rPr>
-              <a:t>Equatorial low (ITCZ): </a:t>
-            </a:r>
+              <a:t>Precipitation is distributed by latitude as follows:</a:t>
+            </a:r>
+            <a:endParaRPr lang="en-US" sz="3000" dirty="0"/>
+          </a:p>
+          <a:p>
             <a:pPr algn="l" indent="0" marL="0">
               <a:spcAft>
                 <a:spcPts val="800"/>
@@ -15461,7 +16072,7 @@
               <a:buNone/>
             </a:pPr>
             <a:r>
-              <a:rPr lang="en-US" sz="3600" dirty="0">
+              <a:rPr lang="en-US" sz="3000" b="1" dirty="0">
                 <a:solidFill>
                   <a:srgbClr val="111111"/>
                 </a:solidFill>
@@ -15469,15 +16080,32 @@
                 <a:ea typeface="Times New Roman" pitchFamily="34" charset="-122"/>
                 <a:cs typeface="Times New Roman" pitchFamily="34" charset="-120"/>
               </a:rPr>
-              <a:t>Intense heating makes air rise, giving heavy convectional rain all year and rainforests.</a:t>
-            </a:r>
-            <a:endParaRPr lang="en-US" sz="3600" dirty="0"/>
+              <a:t>Equatorial zone (0° to 10° N and S): </a:t>
+            </a:r>
+            <a:pPr algn="l" indent="0" marL="0">
+              <a:spcAft>
+                <a:spcPts val="800"/>
+              </a:spcAft>
+              <a:buNone/>
+            </a:pPr>
+            <a:r>
+              <a:rPr lang="en-US" sz="3000" dirty="0">
+                <a:solidFill>
+                  <a:srgbClr val="111111"/>
+                </a:solidFill>
+                <a:latin typeface="Times New Roman" pitchFamily="34" charset="0"/>
+                <a:ea typeface="Times New Roman" pitchFamily="34" charset="-122"/>
+                <a:cs typeface="Times New Roman" pitchFamily="34" charset="-120"/>
+              </a:rPr>
+              <a:t>This zone receives the heaviest rainfall on Earth, usually more than 2,000 mm a year, with rain in every month. It is the zone of rainforests, such as the Congo Basin and the Amazon.</a:t>
+            </a:r>
+            <a:endParaRPr lang="en-US" sz="3000" dirty="0"/>
           </a:p>
         </p:txBody>
       </p:sp>
       <p:pic>
         <p:nvPicPr>
-          <p:cNvPr id="6" name="Image 0" descr="/home/claude/f4/img/v2/pressure_belts_big.png">    </p:cNvPr>
+          <p:cNvPr id="5" name="Image 0" descr="/home/claude/f4/img/v2/rain_latitude_big.png">    </p:cNvPr>
           <p:cNvPicPr>
             <a:picLocks noChangeAspect="1"/>
           </p:cNvPicPr>
@@ -15491,8 +16119,8 @@
         </p:blipFill>
         <p:spPr>
           <a:xfrm>
-            <a:off x="5349240" y="2617506"/>
-            <a:ext cx="6659575" cy="2601397"/>
+            <a:off x="6537960" y="2721454"/>
+            <a:ext cx="5470855" cy="2393499"/>
           </a:xfrm>
           <a:prstGeom prst="rect">
             <a:avLst/>
@@ -15501,14 +16129,14 @@
       </p:pic>
       <p:sp>
         <p:nvSpPr>
-          <p:cNvPr id="7" name="Text 4"/>
+          <p:cNvPr id="6" name="Text 3"/>
           <p:cNvSpPr/>
           <p:nvPr/>
         </p:nvSpPr>
         <p:spPr>
           <a:xfrm>
-            <a:off x="5349240" y="6089904"/>
-            <a:ext cx="6659575" cy="347472"/>
+            <a:off x="6537960" y="6089904"/>
+            <a:ext cx="5470855" cy="347472"/>
           </a:xfrm>
           <a:prstGeom prst="rect">
             <a:avLst/>
@@ -15532,7 +16160,7 @@
                 <a:ea typeface="Times New Roman" pitchFamily="34" charset="-122"/>
                 <a:cs typeface="Times New Roman" pitchFamily="34" charset="-120"/>
               </a:rPr>
-              <a:t>Illustration: the pressure belts</a:t>
+              <a:t>Illustration: rainfall and latitude</a:t>
             </a:r>
             <a:endParaRPr lang="en-US" sz="1600" dirty="0"/>
           </a:p>
@@ -15924,7 +16552,7 @@
                 <a:ea typeface="Times New Roman" pitchFamily="34" charset="-122"/>
                 <a:cs typeface="Times New Roman" pitchFamily="34" charset="-120"/>
               </a:rPr>
-              <a:t>1. The Global Pattern and Primary Factors</a:t>
+              <a:t>1. Spatial Pattern of Distribution by Latitude</a:t>
             </a:r>
             <a:endParaRPr lang="en-US" sz="3600" dirty="0"/>
           </a:p>
@@ -15938,49 +16566,8 @@
         </p:nvSpPr>
         <p:spPr>
           <a:xfrm>
-            <a:off x="365760" y="1737360"/>
-            <a:ext cx="5120640" cy="457200"/>
-          </a:xfrm>
-          <a:prstGeom prst="rect">
-            <a:avLst/>
-          </a:prstGeom>
-          <a:noFill/>
-          <a:ln/>
-        </p:spPr>
-        <p:txBody>
-          <a:bodyPr wrap="square" lIns="0" tIns="0" rIns="0" bIns="0" rtlCol="0" anchor="ctr">
-            <a:normAutofit/>
-          </a:bodyPr>
-          <a:lstStyle/>
-          <a:p>
-            <a:pPr algn="l" indent="0" marL="0">
-              <a:buNone/>
-            </a:pPr>
-            <a:r>
-              <a:rPr lang="en-US" sz="3000" b="1" dirty="0">
-                <a:solidFill>
-                  <a:srgbClr val="990011"/>
-                </a:solidFill>
-                <a:latin typeface="Times New Roman" pitchFamily="34" charset="0"/>
-                <a:ea typeface="Times New Roman" pitchFamily="34" charset="-122"/>
-                <a:cs typeface="Times New Roman" pitchFamily="34" charset="-120"/>
-              </a:rPr>
-              <a:t>A) Pressure Belts</a:t>
-            </a:r>
-            <a:endParaRPr lang="en-US" sz="3000" dirty="0"/>
-          </a:p>
-        </p:txBody>
-      </p:sp>
-      <p:sp>
-        <p:nvSpPr>
-          <p:cNvPr id="5" name="Text 3"/>
-          <p:cNvSpPr/>
-          <p:nvPr/>
-        </p:nvSpPr>
-        <p:spPr>
-          <a:xfrm>
-            <a:off x="365760" y="2240280"/>
-            <a:ext cx="4846320" cy="4160520"/>
+            <a:off x="365760" y="1783080"/>
+            <a:ext cx="6035040" cy="4617720"/>
           </a:xfrm>
           <a:prstGeom prst="rect">
             <a:avLst/>
@@ -16007,7 +16594,7 @@
                 <a:ea typeface="Times New Roman" pitchFamily="34" charset="-122"/>
                 <a:cs typeface="Times New Roman" pitchFamily="34" charset="-120"/>
               </a:rPr>
-              <a:t>Subtropical highs (about 30° N and S): </a:t>
+              <a:t>Tropical and subtropical zones (10° to 30°): </a:t>
             </a:r>
             <a:pPr algn="l" indent="0" marL="0">
               <a:spcAft>
@@ -16024,7 +16611,7 @@
                 <a:ea typeface="Times New Roman" pitchFamily="34" charset="-122"/>
                 <a:cs typeface="Times New Roman" pitchFamily="34" charset="-120"/>
               </a:rPr>
-              <a:t>Sinking air warms and forms no clouds, so the great deserts like the Sahara are found there.</a:t>
+              <a:t>Rainfall decreases away from the Equator, and the dry season becomes longer. Around 20° to 30°, it falls below 250 mm a year in the great hot deserts such as the Sahara.</a:t>
             </a:r>
             <a:endParaRPr lang="en-US" sz="3600" dirty="0"/>
           </a:p>
@@ -16032,7 +16619,7 @@
       </p:sp>
       <p:pic>
         <p:nvPicPr>
-          <p:cNvPr id="6" name="Image 0" descr="/home/claude/f4/img/v2/f2t_erg.jpg">    </p:cNvPr>
+          <p:cNvPr id="5" name="Image 0" descr="/home/claude/f4/img/v2/deserts_world_big.png">    </p:cNvPr>
           <p:cNvPicPr>
             <a:picLocks noChangeAspect="1"/>
           </p:cNvPicPr>
@@ -16046,8 +16633,8 @@
         </p:blipFill>
         <p:spPr>
           <a:xfrm>
-            <a:off x="5349240" y="2071212"/>
-            <a:ext cx="6659575" cy="3693983"/>
+            <a:off x="6537960" y="2721454"/>
+            <a:ext cx="5470855" cy="2393499"/>
           </a:xfrm>
           <a:prstGeom prst="rect">
             <a:avLst/>
@@ -16056,14 +16643,14 @@
       </p:pic>
       <p:sp>
         <p:nvSpPr>
-          <p:cNvPr id="7" name="Text 4"/>
+          <p:cNvPr id="6" name="Text 3"/>
           <p:cNvSpPr/>
           <p:nvPr/>
         </p:nvSpPr>
         <p:spPr>
           <a:xfrm>
-            <a:off x="5349240" y="6089904"/>
-            <a:ext cx="6659575" cy="347472"/>
+            <a:off x="6537960" y="6089904"/>
+            <a:ext cx="5470855" cy="347472"/>
           </a:xfrm>
           <a:prstGeom prst="rect">
             <a:avLst/>
@@ -16087,7 +16674,7 @@
                 <a:ea typeface="Times New Roman" pitchFamily="34" charset="-122"/>
                 <a:cs typeface="Times New Roman" pitchFamily="34" charset="-120"/>
               </a:rPr>
-              <a:t>Illustration: the Sahara</a:t>
+              <a:t>Illustration: the hot deserts</a:t>
             </a:r>
             <a:endParaRPr lang="en-US" sz="1600" dirty="0"/>
           </a:p>
@@ -16264,7 +16851,7 @@
                 <a:ea typeface="Times New Roman" pitchFamily="34" charset="-122"/>
                 <a:cs typeface="Times New Roman" pitchFamily="34" charset="-120"/>
               </a:rPr>
-              <a:t>1. The Global Pattern and Primary Factors</a:t>
+              <a:t>1. Spatial Pattern of Distribution by Latitude</a:t>
             </a:r>
             <a:endParaRPr lang="en-US" sz="3600" dirty="0"/>
           </a:p>
@@ -16278,47 +16865,8 @@
         </p:nvSpPr>
         <p:spPr>
           <a:xfrm>
-            <a:off x="4069080" y="1737360"/>
-            <a:ext cx="7802575" cy="457200"/>
-          </a:xfrm>
-          <a:prstGeom prst="rect">
-            <a:avLst/>
-          </a:prstGeom>
-          <a:noFill/>
-          <a:ln/>
-        </p:spPr>
-        <p:txBody>
-          <a:bodyPr wrap="square" lIns="0" tIns="0" rIns="0" bIns="0" rtlCol="0" anchor="ctr"/>
-          <a:lstStyle/>
-          <a:p>
-            <a:pPr algn="l" indent="0" marL="0">
-              <a:buNone/>
-            </a:pPr>
-            <a:r>
-              <a:rPr lang="en-US" sz="3200" b="1" dirty="0">
-                <a:solidFill>
-                  <a:srgbClr val="990011"/>
-                </a:solidFill>
-                <a:latin typeface="Times New Roman" pitchFamily="34" charset="0"/>
-                <a:ea typeface="Times New Roman" pitchFamily="34" charset="-122"/>
-                <a:cs typeface="Times New Roman" pitchFamily="34" charset="-120"/>
-              </a:rPr>
-              <a:t>A) Pressure Belts</a:t>
-            </a:r>
-            <a:endParaRPr lang="en-US" sz="3200" dirty="0"/>
-          </a:p>
-        </p:txBody>
-      </p:sp>
-      <p:sp>
-        <p:nvSpPr>
-          <p:cNvPr id="6" name="Text 3"/>
-          <p:cNvSpPr/>
-          <p:nvPr/>
-        </p:nvSpPr>
-        <p:spPr>
-          <a:xfrm>
-            <a:off x="4069080" y="2240280"/>
-            <a:ext cx="7802575" cy="4206240"/>
+            <a:off x="4069080" y="1783080"/>
+            <a:ext cx="7802575" cy="4663440"/>
           </a:xfrm>
           <a:prstGeom prst="rect">
             <a:avLst/>
@@ -16345,7 +16893,7 @@
                 <a:ea typeface="Times New Roman" pitchFamily="34" charset="-122"/>
                 <a:cs typeface="Times New Roman" pitchFamily="34" charset="-120"/>
               </a:rPr>
-              <a:t>Temperate lows (about 60° N and S): </a:t>
+              <a:t>Temperate zone (40° to 60°): </a:t>
             </a:r>
             <a:pPr algn="l" indent="0" marL="0">
               <a:spcAft>
@@ -16362,44 +16910,7 @@
                 <a:ea typeface="Times New Roman" pitchFamily="34" charset="-122"/>
                 <a:cs typeface="Times New Roman" pitchFamily="34" charset="-120"/>
               </a:rPr>
-              <a:t>Warm and cold air masses meet and give moderate frontal rain.</a:t>
-            </a:r>
-            <a:endParaRPr lang="en-US" sz="4000" dirty="0"/>
-          </a:p>
-          <a:p>
-            <a:pPr algn="l" indent="0" marL="0">
-              <a:spcAft>
-                <a:spcPts val="800"/>
-              </a:spcAft>
-              <a:buNone/>
-            </a:pPr>
-            <a:r>
-              <a:rPr lang="en-US" sz="4000" b="1" dirty="0">
-                <a:solidFill>
-                  <a:srgbClr val="111111"/>
-                </a:solidFill>
-                <a:latin typeface="Times New Roman" pitchFamily="34" charset="0"/>
-                <a:ea typeface="Times New Roman" pitchFamily="34" charset="-122"/>
-                <a:cs typeface="Times New Roman" pitchFamily="34" charset="-120"/>
-              </a:rPr>
-              <a:t>Polar highs: </a:t>
-            </a:r>
-            <a:pPr algn="l" indent="0" marL="0">
-              <a:spcAft>
-                <a:spcPts val="800"/>
-              </a:spcAft>
-              <a:buNone/>
-            </a:pPr>
-            <a:r>
-              <a:rPr lang="en-US" sz="4000" dirty="0">
-                <a:solidFill>
-                  <a:srgbClr val="111111"/>
-                </a:solidFill>
-                <a:latin typeface="Times New Roman" pitchFamily="34" charset="0"/>
-                <a:ea typeface="Times New Roman" pitchFamily="34" charset="-122"/>
-                <a:cs typeface="Times New Roman" pitchFamily="34" charset="-120"/>
-              </a:rPr>
-              <a:t>Cold sinking air gives very little precipitation, making "ice deserts".</a:t>
+              <a:t>Rainfall rises again to a moderate amount, between about 500 and 1,500 mm a year. It falls in all seasons, especially on the western coasts of the continents.</a:t>
             </a:r>
             <a:endParaRPr lang="en-US" sz="4000" dirty="0"/>
           </a:p>
@@ -16517,9 +17028,109 @@
           </a:p>
         </p:txBody>
       </p:sp>
+      <p:sp>
+        <p:nvSpPr>
+          <p:cNvPr id="3" name="Text 1"/>
+          <p:cNvSpPr/>
+          <p:nvPr/>
+        </p:nvSpPr>
+        <p:spPr>
+          <a:xfrm>
+            <a:off x="365760" y="1005840"/>
+            <a:ext cx="11460175" cy="731520"/>
+          </a:xfrm>
+          <a:prstGeom prst="rect">
+            <a:avLst/>
+          </a:prstGeom>
+          <a:noFill/>
+          <a:ln/>
+        </p:spPr>
+        <p:txBody>
+          <a:bodyPr wrap="square" lIns="0" tIns="0" rIns="0" bIns="0" rtlCol="0" anchor="ctr">
+            <a:normAutofit/>
+          </a:bodyPr>
+          <a:lstStyle/>
+          <a:p>
+            <a:pPr algn="ctr" indent="0" marL="0">
+              <a:buNone/>
+            </a:pPr>
+            <a:r>
+              <a:rPr lang="en-US" sz="3600" b="1" dirty="0">
+                <a:solidFill>
+                  <a:srgbClr val="990011"/>
+                </a:solidFill>
+                <a:latin typeface="Times New Roman" pitchFamily="34" charset="0"/>
+                <a:ea typeface="Times New Roman" pitchFamily="34" charset="-122"/>
+                <a:cs typeface="Times New Roman" pitchFamily="34" charset="-120"/>
+              </a:rPr>
+              <a:t>1. Spatial Pattern of Distribution by Latitude</a:t>
+            </a:r>
+            <a:endParaRPr lang="en-US" sz="3600" dirty="0"/>
+          </a:p>
+        </p:txBody>
+      </p:sp>
+      <p:sp>
+        <p:nvSpPr>
+          <p:cNvPr id="4" name="Text 2"/>
+          <p:cNvSpPr/>
+          <p:nvPr/>
+        </p:nvSpPr>
+        <p:spPr>
+          <a:xfrm>
+            <a:off x="365760" y="1783080"/>
+            <a:ext cx="6035040" cy="4617720"/>
+          </a:xfrm>
+          <a:prstGeom prst="rect">
+            <a:avLst/>
+          </a:prstGeom>
+          <a:noFill/>
+          <a:ln/>
+        </p:spPr>
+        <p:txBody>
+          <a:bodyPr wrap="square" lIns="0" tIns="0" rIns="0" bIns="0" rtlCol="0" anchor="t"/>
+          <a:lstStyle/>
+          <a:p>
+            <a:pPr algn="l" indent="0" marL="0">
+              <a:spcAft>
+                <a:spcPts val="800"/>
+              </a:spcAft>
+              <a:buNone/>
+            </a:pPr>
+            <a:r>
+              <a:rPr lang="en-US" sz="3600" b="1" dirty="0">
+                <a:solidFill>
+                  <a:srgbClr val="111111"/>
+                </a:solidFill>
+                <a:latin typeface="Times New Roman" pitchFamily="34" charset="0"/>
+                <a:ea typeface="Times New Roman" pitchFamily="34" charset="-122"/>
+                <a:cs typeface="Times New Roman" pitchFamily="34" charset="-120"/>
+              </a:rPr>
+              <a:t>Polar zones (above 60°): </a:t>
+            </a:r>
+            <a:pPr algn="l" indent="0" marL="0">
+              <a:spcAft>
+                <a:spcPts val="800"/>
+              </a:spcAft>
+              <a:buNone/>
+            </a:pPr>
+            <a:r>
+              <a:rPr lang="en-US" sz="3600" dirty="0">
+                <a:solidFill>
+                  <a:srgbClr val="111111"/>
+                </a:solidFill>
+                <a:latin typeface="Times New Roman" pitchFamily="34" charset="0"/>
+                <a:ea typeface="Times New Roman" pitchFamily="34" charset="-122"/>
+                <a:cs typeface="Times New Roman" pitchFamily="34" charset="-120"/>
+              </a:rPr>
+              <a:t>Precipitation is very low, often less than 250 mm a year, and falls mainly as snow. These regions are therefore called cold or ice deserts.</a:t>
+            </a:r>
+            <a:endParaRPr lang="en-US" sz="3600" dirty="0"/>
+          </a:p>
+        </p:txBody>
+      </p:sp>
       <p:pic>
         <p:nvPicPr>
-          <p:cNvPr id="3" name="Image 0" descr="/home/claude/f4/img/minesec_sheet.png">    </p:cNvPr>
+          <p:cNvPr id="5" name="Image 0" descr="/home/claude/f4/img/v2/lsa_icecap.jpg">    </p:cNvPr>
           <p:cNvPicPr>
             <a:picLocks noChangeAspect="1"/>
           </p:cNvPicPr>
@@ -16533,8 +17144,8 @@
         </p:blipFill>
         <p:spPr>
           <a:xfrm>
-            <a:off x="0" y="658368"/>
-            <a:ext cx="3840480" cy="5833872"/>
+            <a:off x="6537960" y="2400897"/>
+            <a:ext cx="5470855" cy="3034615"/>
           </a:xfrm>
           <a:prstGeom prst="rect">
             <a:avLst/>
@@ -16543,14 +17154,14 @@
       </p:pic>
       <p:sp>
         <p:nvSpPr>
-          <p:cNvPr id="4" name="Text 1"/>
+          <p:cNvPr id="6" name="Text 3"/>
           <p:cNvSpPr/>
           <p:nvPr/>
         </p:nvSpPr>
         <p:spPr>
           <a:xfrm>
-            <a:off x="4069080" y="1005840"/>
-            <a:ext cx="7802575" cy="731520"/>
+            <a:off x="6537960" y="6089904"/>
+            <a:ext cx="5470855" cy="347472"/>
           </a:xfrm>
           <a:prstGeom prst="rect">
             <a:avLst/>
@@ -16559,144 +17170,24 @@
           <a:ln/>
         </p:spPr>
         <p:txBody>
-          <a:bodyPr wrap="square" lIns="0" tIns="0" rIns="0" bIns="0" rtlCol="0" anchor="ctr">
-            <a:normAutofit/>
-          </a:bodyPr>
+          <a:bodyPr wrap="square" lIns="0" tIns="0" rIns="0" bIns="0" rtlCol="0" anchor="ctr"/>
           <a:lstStyle/>
           <a:p>
             <a:pPr algn="ctr" indent="0" marL="0">
               <a:buNone/>
             </a:pPr>
             <a:r>
-              <a:rPr lang="en-US" sz="3600" b="1" dirty="0">
-                <a:solidFill>
-                  <a:srgbClr val="990011"/>
+              <a:rPr lang="en-US" sz="1600" i="1" dirty="0">
+                <a:solidFill>
+                  <a:srgbClr val="555555"/>
                 </a:solidFill>
                 <a:latin typeface="Times New Roman" pitchFamily="34" charset="0"/>
                 <a:ea typeface="Times New Roman" pitchFamily="34" charset="-122"/>
                 <a:cs typeface="Times New Roman" pitchFamily="34" charset="-120"/>
               </a:rPr>
-              <a:t>1. The Global Pattern and Primary Factors</a:t>
-            </a:r>
-            <a:endParaRPr lang="en-US" sz="3600" dirty="0"/>
-          </a:p>
-        </p:txBody>
-      </p:sp>
-      <p:sp>
-        <p:nvSpPr>
-          <p:cNvPr id="5" name="Text 2"/>
-          <p:cNvSpPr/>
-          <p:nvPr/>
-        </p:nvSpPr>
-        <p:spPr>
-          <a:xfrm>
-            <a:off x="4069080" y="1737360"/>
-            <a:ext cx="7802575" cy="457200"/>
-          </a:xfrm>
-          <a:prstGeom prst="rect">
-            <a:avLst/>
-          </a:prstGeom>
-          <a:noFill/>
-          <a:ln/>
-        </p:spPr>
-        <p:txBody>
-          <a:bodyPr wrap="square" lIns="0" tIns="0" rIns="0" bIns="0" rtlCol="0" anchor="ctr"/>
-          <a:lstStyle/>
-          <a:p>
-            <a:pPr algn="l" indent="0" marL="0">
-              <a:buNone/>
-            </a:pPr>
-            <a:r>
-              <a:rPr lang="en-US" sz="3200" b="1" dirty="0">
-                <a:solidFill>
-                  <a:srgbClr val="990011"/>
-                </a:solidFill>
-                <a:latin typeface="Times New Roman" pitchFamily="34" charset="0"/>
-                <a:ea typeface="Times New Roman" pitchFamily="34" charset="-122"/>
-                <a:cs typeface="Times New Roman" pitchFamily="34" charset="-120"/>
-              </a:rPr>
-              <a:t>B) Air Masses</a:t>
-            </a:r>
-            <a:endParaRPr lang="en-US" sz="3200" dirty="0"/>
-          </a:p>
-        </p:txBody>
-      </p:sp>
-      <p:sp>
-        <p:nvSpPr>
-          <p:cNvPr id="6" name="Text 3"/>
-          <p:cNvSpPr/>
-          <p:nvPr/>
-        </p:nvSpPr>
-        <p:spPr>
-          <a:xfrm>
-            <a:off x="4069080" y="2240280"/>
-            <a:ext cx="7802575" cy="4206240"/>
-          </a:xfrm>
-          <a:prstGeom prst="rect">
-            <a:avLst/>
-          </a:prstGeom>
-          <a:noFill/>
-          <a:ln/>
-        </p:spPr>
-        <p:txBody>
-          <a:bodyPr wrap="square" lIns="0" tIns="0" rIns="0" bIns="0" rtlCol="0" anchor="t"/>
-          <a:lstStyle/>
-          <a:p>
-            <a:pPr algn="l" indent="0" marL="0">
-              <a:spcAft>
-                <a:spcPts val="800"/>
-              </a:spcAft>
-              <a:buNone/>
-            </a:pPr>
-            <a:r>
-              <a:rPr lang="en-US" sz="4000" i="1" dirty="0">
-                <a:solidFill>
-                  <a:srgbClr val="111111"/>
-                </a:solidFill>
-                <a:latin typeface="Times New Roman" pitchFamily="34" charset="0"/>
-                <a:ea typeface="Times New Roman" pitchFamily="34" charset="-122"/>
-                <a:cs typeface="Times New Roman" pitchFamily="34" charset="-120"/>
-              </a:rPr>
-              <a:t>Air masses influence rainfall as follows:</a:t>
-            </a:r>
-            <a:endParaRPr lang="en-US" sz="4000" dirty="0"/>
-          </a:p>
-          <a:p>
-            <a:pPr algn="l" indent="0" marL="0">
-              <a:spcAft>
-                <a:spcPts val="800"/>
-              </a:spcAft>
-              <a:buNone/>
-            </a:pPr>
-            <a:r>
-              <a:rPr lang="en-US" sz="4000" b="1" dirty="0">
-                <a:solidFill>
-                  <a:srgbClr val="111111"/>
-                </a:solidFill>
-                <a:latin typeface="Times New Roman" pitchFamily="34" charset="0"/>
-                <a:ea typeface="Times New Roman" pitchFamily="34" charset="-122"/>
-                <a:cs typeface="Times New Roman" pitchFamily="34" charset="-120"/>
-              </a:rPr>
-              <a:t>Maritime air masses: </a:t>
-            </a:r>
-            <a:pPr algn="l" indent="0" marL="0">
-              <a:spcAft>
-                <a:spcPts val="800"/>
-              </a:spcAft>
-              <a:buNone/>
-            </a:pPr>
-            <a:r>
-              <a:rPr lang="en-US" sz="4000" dirty="0">
-                <a:solidFill>
-                  <a:srgbClr val="111111"/>
-                </a:solidFill>
-                <a:latin typeface="Times New Roman" pitchFamily="34" charset="0"/>
-                <a:ea typeface="Times New Roman" pitchFamily="34" charset="-122"/>
-                <a:cs typeface="Times New Roman" pitchFamily="34" charset="-120"/>
-              </a:rPr>
-              <a:t>They form over oceans, are moist and bring rain, like the south-west monsoon over Cameroon.</a:t>
-            </a:r>
-            <a:endParaRPr lang="en-US" sz="4000" dirty="0"/>
+              <a:t>Illustration: an ice cap</a:t>
+            </a:r>
+            <a:endParaRPr lang="en-US" sz="1600" dirty="0"/>
           </a:p>
         </p:txBody>
       </p:sp>
@@ -16847,7 +17338,7 @@
                 <a:ea typeface="Times New Roman" pitchFamily="34" charset="-122"/>
                 <a:cs typeface="Times New Roman" pitchFamily="34" charset="-120"/>
               </a:rPr>
-              <a:t>1. The Global Pattern and Primary Factors</a:t>
+              <a:t>2. Primary Factors of Variation</a:t>
             </a:r>
             <a:endParaRPr lang="en-US" sz="3600" dirty="0"/>
           </a:p>
@@ -16862,7 +17353,7 @@
         <p:spPr>
           <a:xfrm>
             <a:off x="365760" y="1737360"/>
-            <a:ext cx="5120640" cy="457200"/>
+            <a:ext cx="6035040" cy="457200"/>
           </a:xfrm>
           <a:prstGeom prst="rect">
             <a:avLst/>
@@ -16888,7 +17379,7 @@
                 <a:ea typeface="Times New Roman" pitchFamily="34" charset="-122"/>
                 <a:cs typeface="Times New Roman" pitchFamily="34" charset="-120"/>
               </a:rPr>
-              <a:t>B) Air Masses</a:t>
+              <a:t>A) Pressure Belts</a:t>
             </a:r>
             <a:endParaRPr lang="en-US" sz="3000" dirty="0"/>
           </a:p>
@@ -16903,7 +17394,7 @@
         <p:spPr>
           <a:xfrm>
             <a:off x="365760" y="2240280"/>
-            <a:ext cx="4846320" cy="4160520"/>
+            <a:ext cx="6035040" cy="4160520"/>
           </a:xfrm>
           <a:prstGeom prst="rect">
             <a:avLst/>
@@ -16922,7 +17413,7 @@
               <a:buNone/>
             </a:pPr>
             <a:r>
-              <a:rPr lang="en-US" sz="3600" b="1" dirty="0">
+              <a:rPr lang="en-US" sz="3000" i="1" dirty="0">
                 <a:solidFill>
                   <a:srgbClr val="111111"/>
                 </a:solidFill>
@@ -16930,8 +17421,11 @@
                 <a:ea typeface="Times New Roman" pitchFamily="34" charset="-122"/>
                 <a:cs typeface="Times New Roman" pitchFamily="34" charset="-120"/>
               </a:rPr>
-              <a:t>Continental air masses: </a:t>
-            </a:r>
+              <a:t>The pressure belts explain this pattern in the following ways:</a:t>
+            </a:r>
+            <a:endParaRPr lang="en-US" sz="3000" dirty="0"/>
+          </a:p>
+          <a:p>
             <a:pPr algn="l" indent="0" marL="0">
               <a:spcAft>
                 <a:spcPts val="800"/>
@@ -16939,7 +17433,7 @@
               <a:buNone/>
             </a:pPr>
             <a:r>
-              <a:rPr lang="en-US" sz="3600" dirty="0">
+              <a:rPr lang="en-US" sz="3000" b="1" dirty="0">
                 <a:solidFill>
                   <a:srgbClr val="111111"/>
                 </a:solidFill>
@@ -16947,15 +17441,32 @@
                 <a:ea typeface="Times New Roman" pitchFamily="34" charset="-122"/>
                 <a:cs typeface="Times New Roman" pitchFamily="34" charset="-120"/>
               </a:rPr>
-              <a:t>They form over land, are dry and bring dry weather, like the Harmattan from the Sahara.</a:t>
-            </a:r>
-            <a:endParaRPr lang="en-US" sz="3600" dirty="0"/>
+              <a:t>Equatorial low pressure (ITCZ): </a:t>
+            </a:r>
+            <a:pPr algn="l" indent="0" marL="0">
+              <a:spcAft>
+                <a:spcPts val="800"/>
+              </a:spcAft>
+              <a:buNone/>
+            </a:pPr>
+            <a:r>
+              <a:rPr lang="en-US" sz="3000" dirty="0">
+                <a:solidFill>
+                  <a:srgbClr val="111111"/>
+                </a:solidFill>
+                <a:latin typeface="Times New Roman" pitchFamily="34" charset="0"/>
+                <a:ea typeface="Times New Roman" pitchFamily="34" charset="-122"/>
+                <a:cs typeface="Times New Roman" pitchFamily="34" charset="-120"/>
+              </a:rPr>
+              <a:t>Intense heating makes the air rise, expand and cool, so its vapour condenses into cumulonimbus clouds. This gives heavy convectional rain all year near the Equator.</a:t>
+            </a:r>
+            <a:endParaRPr lang="en-US" sz="3000" dirty="0"/>
           </a:p>
         </p:txBody>
       </p:sp>
       <p:pic>
         <p:nvPicPr>
-          <p:cNvPr id="6" name="Image 0" descr="/home/claude/f4/img/v2/f2t_harmattan.jpg">    </p:cNvPr>
+          <p:cNvPr id="6" name="Image 0" descr="/home/claude/f4/img/v2/pressure_belts_big.png">    </p:cNvPr>
           <p:cNvPicPr>
             <a:picLocks noChangeAspect="1"/>
           </p:cNvPicPr>
@@ -16969,8 +17480,8 @@
         </p:blipFill>
         <p:spPr>
           <a:xfrm>
-            <a:off x="5349240" y="2071212"/>
-            <a:ext cx="6659575" cy="3693983"/>
+            <a:off x="6537960" y="2849678"/>
+            <a:ext cx="5470855" cy="2137053"/>
           </a:xfrm>
           <a:prstGeom prst="rect">
             <a:avLst/>
@@ -16985,8 +17496,8 @@
         </p:nvSpPr>
         <p:spPr>
           <a:xfrm>
-            <a:off x="5349240" y="6089904"/>
-            <a:ext cx="6659575" cy="347472"/>
+            <a:off x="6537960" y="6089904"/>
+            <a:ext cx="5470855" cy="347472"/>
           </a:xfrm>
           <a:prstGeom prst="rect">
             <a:avLst/>
@@ -17010,7 +17521,7 @@
                 <a:ea typeface="Times New Roman" pitchFamily="34" charset="-122"/>
                 <a:cs typeface="Times New Roman" pitchFamily="34" charset="-120"/>
               </a:rPr>
-              <a:t>Illustration: the Harmattan</a:t>
+              <a:t>Illustration: the pressure belts</a:t>
             </a:r>
             <a:endParaRPr lang="en-US" sz="1600" dirty="0"/>
           </a:p>
@@ -17163,7 +17674,7 @@
                 <a:ea typeface="Times New Roman" pitchFamily="34" charset="-122"/>
                 <a:cs typeface="Times New Roman" pitchFamily="34" charset="-120"/>
               </a:rPr>
-              <a:t>2. Secondary (Local) Factors</a:t>
+              <a:t>2. Primary Factors of Variation</a:t>
             </a:r>
             <a:endParaRPr lang="en-US" sz="3600" dirty="0"/>
           </a:p>
@@ -17177,8 +17688,49 @@
         </p:nvSpPr>
         <p:spPr>
           <a:xfrm>
-            <a:off x="365760" y="1783080"/>
-            <a:ext cx="4846320" cy="4617720"/>
+            <a:off x="365760" y="1737360"/>
+            <a:ext cx="6035040" cy="457200"/>
+          </a:xfrm>
+          <a:prstGeom prst="rect">
+            <a:avLst/>
+          </a:prstGeom>
+          <a:noFill/>
+          <a:ln/>
+        </p:spPr>
+        <p:txBody>
+          <a:bodyPr wrap="square" lIns="0" tIns="0" rIns="0" bIns="0" rtlCol="0" anchor="ctr">
+            <a:normAutofit/>
+          </a:bodyPr>
+          <a:lstStyle/>
+          <a:p>
+            <a:pPr algn="l" indent="0" marL="0">
+              <a:buNone/>
+            </a:pPr>
+            <a:r>
+              <a:rPr lang="en-US" sz="3000" b="1" dirty="0">
+                <a:solidFill>
+                  <a:srgbClr val="990011"/>
+                </a:solidFill>
+                <a:latin typeface="Times New Roman" pitchFamily="34" charset="0"/>
+                <a:ea typeface="Times New Roman" pitchFamily="34" charset="-122"/>
+                <a:cs typeface="Times New Roman" pitchFamily="34" charset="-120"/>
+              </a:rPr>
+              <a:t>A) Pressure Belts</a:t>
+            </a:r>
+            <a:endParaRPr lang="en-US" sz="3000" dirty="0"/>
+          </a:p>
+        </p:txBody>
+      </p:sp>
+      <p:sp>
+        <p:nvSpPr>
+          <p:cNvPr id="5" name="Text 3"/>
+          <p:cNvSpPr/>
+          <p:nvPr/>
+        </p:nvSpPr>
+        <p:spPr>
+          <a:xfrm>
+            <a:off x="365760" y="2240280"/>
+            <a:ext cx="6035040" cy="4160520"/>
           </a:xfrm>
           <a:prstGeom prst="rect">
             <a:avLst/>
@@ -17197,7 +17749,7 @@
               <a:buNone/>
             </a:pPr>
             <a:r>
-              <a:rPr lang="en-US" sz="2800" i="1" dirty="0">
+              <a:rPr lang="en-US" sz="3000" b="1" dirty="0">
                 <a:solidFill>
                   <a:srgbClr val="111111"/>
                 </a:solidFill>
@@ -17205,11 +17757,8 @@
                 <a:ea typeface="Times New Roman" pitchFamily="34" charset="-122"/>
                 <a:cs typeface="Times New Roman" pitchFamily="34" charset="-120"/>
               </a:rPr>
-              <a:t>The local factors of rainfall are the following:</a:t>
-            </a:r>
-            <a:endParaRPr lang="en-US" sz="2800" dirty="0"/>
-          </a:p>
-          <a:p>
+              <a:t>Subtropical high pressure (about 30° N and S): </a:t>
+            </a:r>
             <a:pPr algn="l" indent="0" marL="0">
               <a:spcAft>
                 <a:spcPts val="800"/>
@@ -17217,7 +17766,7 @@
               <a:buNone/>
             </a:pPr>
             <a:r>
-              <a:rPr lang="en-US" sz="2800" b="1" dirty="0">
+              <a:rPr lang="en-US" sz="3000" dirty="0">
                 <a:solidFill>
                   <a:srgbClr val="111111"/>
                 </a:solidFill>
@@ -17225,32 +17774,15 @@
                 <a:ea typeface="Times New Roman" pitchFamily="34" charset="-122"/>
                 <a:cs typeface="Times New Roman" pitchFamily="34" charset="-120"/>
               </a:rPr>
-              <a:t>Relief: </a:t>
-            </a:r>
-            <a:pPr algn="l" indent="0" marL="0">
-              <a:spcAft>
-                <a:spcPts val="800"/>
-              </a:spcAft>
-              <a:buNone/>
-            </a:pPr>
-            <a:r>
-              <a:rPr lang="en-US" sz="2800" dirty="0">
-                <a:solidFill>
-                  <a:srgbClr val="111111"/>
-                </a:solidFill>
-                <a:latin typeface="Times New Roman" pitchFamily="34" charset="0"/>
-                <a:ea typeface="Times New Roman" pitchFamily="34" charset="-122"/>
-                <a:cs typeface="Times New Roman" pitchFamily="34" charset="-120"/>
-              </a:rPr>
-              <a:t>Moist air rising over mountains gives heavy rain on the windward side and a rain shadow on the leeward side: Debundscha, at the foot of Mount Cameroon, receives about 10,000 mm a year.</a:t>
-            </a:r>
-            <a:endParaRPr lang="en-US" sz="2800" dirty="0"/>
+              <a:t>Here, air sinks from high altitudes, is compressed and warms, so it can hold its vapour and no clouds form. This is why the great deserts, such as the Sahara and the Kalahari, lie along these latitudes.</a:t>
+            </a:r>
+            <a:endParaRPr lang="en-US" sz="3000" dirty="0"/>
           </a:p>
         </p:txBody>
       </p:sp>
       <p:pic>
         <p:nvPicPr>
-          <p:cNvPr id="5" name="Image 0" descr="/home/claude/f4/img/v2/met2_rain_factors.png">    </p:cNvPr>
+          <p:cNvPr id="6" name="Image 0" descr="/home/claude/f4/img/v2/f2t_erg.jpg">    </p:cNvPr>
           <p:cNvPicPr>
             <a:picLocks noChangeAspect="1"/>
           </p:cNvPicPr>
@@ -17264,8 +17796,8 @@
         </p:blipFill>
         <p:spPr>
           <a:xfrm>
-            <a:off x="5349240" y="2617506"/>
-            <a:ext cx="6659575" cy="2601397"/>
+            <a:off x="6537960" y="2400897"/>
+            <a:ext cx="5470855" cy="3034615"/>
           </a:xfrm>
           <a:prstGeom prst="rect">
             <a:avLst/>
@@ -17274,14 +17806,14 @@
       </p:pic>
       <p:sp>
         <p:nvSpPr>
-          <p:cNvPr id="6" name="Text 3"/>
+          <p:cNvPr id="7" name="Text 4"/>
           <p:cNvSpPr/>
           <p:nvPr/>
         </p:nvSpPr>
         <p:spPr>
           <a:xfrm>
-            <a:off x="5349240" y="6089904"/>
-            <a:ext cx="6659575" cy="347472"/>
+            <a:off x="6537960" y="6089904"/>
+            <a:ext cx="5470855" cy="347472"/>
           </a:xfrm>
           <a:prstGeom prst="rect">
             <a:avLst/>
@@ -17305,7 +17837,7 @@
                 <a:ea typeface="Times New Roman" pitchFamily="34" charset="-122"/>
                 <a:cs typeface="Times New Roman" pitchFamily="34" charset="-120"/>
               </a:rPr>
-              <a:t>Illustration: factors of rainfall</a:t>
+              <a:t>Illustration: a sand desert</a:t>
             </a:r>
             <a:endParaRPr lang="en-US" sz="1600" dirty="0"/>
           </a:p>
@@ -17423,109 +17955,9 @@
           </a:p>
         </p:txBody>
       </p:sp>
-      <p:sp>
-        <p:nvSpPr>
-          <p:cNvPr id="3" name="Text 1"/>
-          <p:cNvSpPr/>
-          <p:nvPr/>
-        </p:nvSpPr>
-        <p:spPr>
-          <a:xfrm>
-            <a:off x="365760" y="1005840"/>
-            <a:ext cx="11460175" cy="731520"/>
-          </a:xfrm>
-          <a:prstGeom prst="rect">
-            <a:avLst/>
-          </a:prstGeom>
-          <a:noFill/>
-          <a:ln/>
-        </p:spPr>
-        <p:txBody>
-          <a:bodyPr wrap="square" lIns="0" tIns="0" rIns="0" bIns="0" rtlCol="0" anchor="ctr">
-            <a:normAutofit/>
-          </a:bodyPr>
-          <a:lstStyle/>
-          <a:p>
-            <a:pPr algn="ctr" indent="0" marL="0">
-              <a:buNone/>
-            </a:pPr>
-            <a:r>
-              <a:rPr lang="en-US" sz="3600" b="1" dirty="0">
-                <a:solidFill>
-                  <a:srgbClr val="990011"/>
-                </a:solidFill>
-                <a:latin typeface="Times New Roman" pitchFamily="34" charset="0"/>
-                <a:ea typeface="Times New Roman" pitchFamily="34" charset="-122"/>
-                <a:cs typeface="Times New Roman" pitchFamily="34" charset="-120"/>
-              </a:rPr>
-              <a:t>2. Secondary (Local) Factors</a:t>
-            </a:r>
-            <a:endParaRPr lang="en-US" sz="3600" dirty="0"/>
-          </a:p>
-        </p:txBody>
-      </p:sp>
-      <p:sp>
-        <p:nvSpPr>
-          <p:cNvPr id="4" name="Text 2"/>
-          <p:cNvSpPr/>
-          <p:nvPr/>
-        </p:nvSpPr>
-        <p:spPr>
-          <a:xfrm>
-            <a:off x="365760" y="1783080"/>
-            <a:ext cx="4846320" cy="4617720"/>
-          </a:xfrm>
-          <a:prstGeom prst="rect">
-            <a:avLst/>
-          </a:prstGeom>
-          <a:noFill/>
-          <a:ln/>
-        </p:spPr>
-        <p:txBody>
-          <a:bodyPr wrap="square" lIns="0" tIns="0" rIns="0" bIns="0" rtlCol="0" anchor="t"/>
-          <a:lstStyle/>
-          <a:p>
-            <a:pPr algn="l" indent="0" marL="0">
-              <a:spcAft>
-                <a:spcPts val="800"/>
-              </a:spcAft>
-              <a:buNone/>
-            </a:pPr>
-            <a:r>
-              <a:rPr lang="en-US" sz="3600" b="1" dirty="0">
-                <a:solidFill>
-                  <a:srgbClr val="111111"/>
-                </a:solidFill>
-                <a:latin typeface="Times New Roman" pitchFamily="34" charset="0"/>
-                <a:ea typeface="Times New Roman" pitchFamily="34" charset="-122"/>
-                <a:cs typeface="Times New Roman" pitchFamily="34" charset="-120"/>
-              </a:rPr>
-              <a:t>Distance from the sea: </a:t>
-            </a:r>
-            <a:pPr algn="l" indent="0" marL="0">
-              <a:spcAft>
-                <a:spcPts val="800"/>
-              </a:spcAft>
-              <a:buNone/>
-            </a:pPr>
-            <a:r>
-              <a:rPr lang="en-US" sz="3600" dirty="0">
-                <a:solidFill>
-                  <a:srgbClr val="111111"/>
-                </a:solidFill>
-                <a:latin typeface="Times New Roman" pitchFamily="34" charset="0"/>
-                <a:ea typeface="Times New Roman" pitchFamily="34" charset="-122"/>
-                <a:cs typeface="Times New Roman" pitchFamily="34" charset="-120"/>
-              </a:rPr>
-              <a:t>Coastal Douala (about 4,000 mm) and Kribi are wet, while inland Garoua (about 1,000 mm) is drier: continentality.</a:t>
-            </a:r>
-            <a:endParaRPr lang="en-US" sz="3600" dirty="0"/>
-          </a:p>
-        </p:txBody>
-      </p:sp>
       <p:pic>
         <p:nvPicPr>
-          <p:cNvPr id="5" name="Image 0" descr="/home/claude/f4/img/v2/rain_compare_big.png">    </p:cNvPr>
+          <p:cNvPr id="3" name="Image 0" descr="/home/claude/f4/img/minesec_sheet.png">    </p:cNvPr>
           <p:cNvPicPr>
             <a:picLocks noChangeAspect="1"/>
           </p:cNvPicPr>
@@ -17539,8 +17971,8 @@
         </p:blipFill>
         <p:spPr>
           <a:xfrm>
-            <a:off x="5349240" y="2513450"/>
-            <a:ext cx="6659575" cy="2809508"/>
+            <a:off x="0" y="658368"/>
+            <a:ext cx="3840480" cy="5833872"/>
           </a:xfrm>
           <a:prstGeom prst="rect">
             <a:avLst/>
@@ -17549,14 +17981,14 @@
       </p:pic>
       <p:sp>
         <p:nvSpPr>
-          <p:cNvPr id="6" name="Text 3"/>
+          <p:cNvPr id="4" name="Text 1"/>
           <p:cNvSpPr/>
           <p:nvPr/>
         </p:nvSpPr>
         <p:spPr>
           <a:xfrm>
-            <a:off x="5349240" y="6089904"/>
-            <a:ext cx="6659575" cy="347472"/>
+            <a:off x="4069080" y="1005840"/>
+            <a:ext cx="7802575" cy="731520"/>
           </a:xfrm>
           <a:prstGeom prst="rect">
             <a:avLst/>
@@ -17565,24 +17997,124 @@
           <a:ln/>
         </p:spPr>
         <p:txBody>
-          <a:bodyPr wrap="square" lIns="0" tIns="0" rIns="0" bIns="0" rtlCol="0" anchor="ctr"/>
+          <a:bodyPr wrap="square" lIns="0" tIns="0" rIns="0" bIns="0" rtlCol="0" anchor="ctr">
+            <a:normAutofit/>
+          </a:bodyPr>
           <a:lstStyle/>
           <a:p>
             <a:pPr algn="ctr" indent="0" marL="0">
               <a:buNone/>
             </a:pPr>
             <a:r>
-              <a:rPr lang="en-US" sz="1600" i="1" dirty="0">
-                <a:solidFill>
-                  <a:srgbClr val="555555"/>
+              <a:rPr lang="en-US" sz="3600" b="1" dirty="0">
+                <a:solidFill>
+                  <a:srgbClr val="990011"/>
                 </a:solidFill>
                 <a:latin typeface="Times New Roman" pitchFamily="34" charset="0"/>
                 <a:ea typeface="Times New Roman" pitchFamily="34" charset="-122"/>
                 <a:cs typeface="Times New Roman" pitchFamily="34" charset="-120"/>
               </a:rPr>
-              <a:t>Illustration: Douala and Garoua</a:t>
-            </a:r>
-            <a:endParaRPr lang="en-US" sz="1600" dirty="0"/>
+              <a:t>2. Primary Factors of Variation</a:t>
+            </a:r>
+            <a:endParaRPr lang="en-US" sz="3600" dirty="0"/>
+          </a:p>
+        </p:txBody>
+      </p:sp>
+      <p:sp>
+        <p:nvSpPr>
+          <p:cNvPr id="5" name="Text 2"/>
+          <p:cNvSpPr/>
+          <p:nvPr/>
+        </p:nvSpPr>
+        <p:spPr>
+          <a:xfrm>
+            <a:off x="4069080" y="1737360"/>
+            <a:ext cx="7802575" cy="457200"/>
+          </a:xfrm>
+          <a:prstGeom prst="rect">
+            <a:avLst/>
+          </a:prstGeom>
+          <a:noFill/>
+          <a:ln/>
+        </p:spPr>
+        <p:txBody>
+          <a:bodyPr wrap="square" lIns="0" tIns="0" rIns="0" bIns="0" rtlCol="0" anchor="ctr"/>
+          <a:lstStyle/>
+          <a:p>
+            <a:pPr algn="l" indent="0" marL="0">
+              <a:buNone/>
+            </a:pPr>
+            <a:r>
+              <a:rPr lang="en-US" sz="3200" b="1" dirty="0">
+                <a:solidFill>
+                  <a:srgbClr val="990011"/>
+                </a:solidFill>
+                <a:latin typeface="Times New Roman" pitchFamily="34" charset="0"/>
+                <a:ea typeface="Times New Roman" pitchFamily="34" charset="-122"/>
+                <a:cs typeface="Times New Roman" pitchFamily="34" charset="-120"/>
+              </a:rPr>
+              <a:t>A) Pressure Belts</a:t>
+            </a:r>
+            <a:endParaRPr lang="en-US" sz="3200" dirty="0"/>
+          </a:p>
+        </p:txBody>
+      </p:sp>
+      <p:sp>
+        <p:nvSpPr>
+          <p:cNvPr id="6" name="Text 3"/>
+          <p:cNvSpPr/>
+          <p:nvPr/>
+        </p:nvSpPr>
+        <p:spPr>
+          <a:xfrm>
+            <a:off x="4069080" y="2240280"/>
+            <a:ext cx="7802575" cy="4206240"/>
+          </a:xfrm>
+          <a:prstGeom prst="rect">
+            <a:avLst/>
+          </a:prstGeom>
+          <a:noFill/>
+          <a:ln/>
+        </p:spPr>
+        <p:txBody>
+          <a:bodyPr wrap="square" lIns="0" tIns="0" rIns="0" bIns="0" rtlCol="0" anchor="t"/>
+          <a:lstStyle/>
+          <a:p>
+            <a:pPr algn="l" indent="0" marL="0">
+              <a:spcAft>
+                <a:spcPts val="800"/>
+              </a:spcAft>
+              <a:buNone/>
+            </a:pPr>
+            <a:r>
+              <a:rPr lang="en-US" sz="4000" b="1" dirty="0">
+                <a:solidFill>
+                  <a:srgbClr val="111111"/>
+                </a:solidFill>
+                <a:latin typeface="Times New Roman" pitchFamily="34" charset="0"/>
+                <a:ea typeface="Times New Roman" pitchFamily="34" charset="-122"/>
+                <a:cs typeface="Times New Roman" pitchFamily="34" charset="-120"/>
+              </a:rPr>
+              <a:t>Temperate low pressure (about 60° N and S): </a:t>
+            </a:r>
+            <a:pPr algn="l" indent="0" marL="0">
+              <a:spcAft>
+                <a:spcPts val="800"/>
+              </a:spcAft>
+              <a:buNone/>
+            </a:pPr>
+            <a:r>
+              <a:rPr lang="en-US" sz="4000" dirty="0">
+                <a:solidFill>
+                  <a:srgbClr val="111111"/>
+                </a:solidFill>
+                <a:latin typeface="Times New Roman" pitchFamily="34" charset="0"/>
+                <a:ea typeface="Times New Roman" pitchFamily="34" charset="-122"/>
+                <a:cs typeface="Times New Roman" pitchFamily="34" charset="-120"/>
+              </a:rPr>
+              <a:t>Warm tropical air and cold polar air meet along the polar front. The warm air is forced to rise, which gives frontal rain throughout the year.</a:t>
+            </a:r>
+            <a:endParaRPr lang="en-US" sz="4000" dirty="0"/>
           </a:p>
         </p:txBody>
       </p:sp>
@@ -17757,7 +18289,7 @@
                 <a:ea typeface="Times New Roman" pitchFamily="34" charset="-122"/>
                 <a:cs typeface="Times New Roman" pitchFamily="34" charset="-120"/>
               </a:rPr>
-              <a:t>2. Secondary (Local) Factors</a:t>
+              <a:t>2. Primary Factors of Variation</a:t>
             </a:r>
             <a:endParaRPr lang="en-US" sz="3600" dirty="0"/>
           </a:p>
@@ -17771,8 +18303,47 @@
         </p:nvSpPr>
         <p:spPr>
           <a:xfrm>
-            <a:off x="5349240" y="1783080"/>
-            <a:ext cx="6522415" cy="4663440"/>
+            <a:off x="5349240" y="1737360"/>
+            <a:ext cx="6522415" cy="457200"/>
+          </a:xfrm>
+          <a:prstGeom prst="rect">
+            <a:avLst/>
+          </a:prstGeom>
+          <a:noFill/>
+          <a:ln/>
+        </p:spPr>
+        <p:txBody>
+          <a:bodyPr wrap="square" lIns="0" tIns="0" rIns="0" bIns="0" rtlCol="0" anchor="ctr"/>
+          <a:lstStyle/>
+          <a:p>
+            <a:pPr algn="l" indent="0" marL="0">
+              <a:buNone/>
+            </a:pPr>
+            <a:r>
+              <a:rPr lang="en-US" sz="3200" b="1" dirty="0">
+                <a:solidFill>
+                  <a:srgbClr val="990011"/>
+                </a:solidFill>
+                <a:latin typeface="Times New Roman" pitchFamily="34" charset="0"/>
+                <a:ea typeface="Times New Roman" pitchFamily="34" charset="-122"/>
+                <a:cs typeface="Times New Roman" pitchFamily="34" charset="-120"/>
+              </a:rPr>
+              <a:t>A) Pressure Belts</a:t>
+            </a:r>
+            <a:endParaRPr lang="en-US" sz="3200" dirty="0"/>
+          </a:p>
+        </p:txBody>
+      </p:sp>
+      <p:sp>
+        <p:nvSpPr>
+          <p:cNvPr id="6" name="Text 3"/>
+          <p:cNvSpPr/>
+          <p:nvPr/>
+        </p:nvSpPr>
+        <p:spPr>
+          <a:xfrm>
+            <a:off x="5349240" y="2240280"/>
+            <a:ext cx="6522415" cy="4206240"/>
           </a:xfrm>
           <a:prstGeom prst="rect">
             <a:avLst/>
@@ -17799,7 +18370,7 @@
                 <a:ea typeface="Times New Roman" pitchFamily="34" charset="-122"/>
                 <a:cs typeface="Times New Roman" pitchFamily="34" charset="-120"/>
               </a:rPr>
-              <a:t>Vegetation: </a:t>
+              <a:t>Polar high pressure: </a:t>
             </a:r>
             <a:pPr algn="l" indent="0" marL="0">
               <a:spcAft>
@@ -17816,48 +18387,7 @@
                 <a:ea typeface="Times New Roman" pitchFamily="34" charset="-122"/>
                 <a:cs typeface="Times New Roman" pitchFamily="34" charset="-120"/>
               </a:rPr>
-              <a:t>Forests release vapour by transpiration and encourage convectional rain.</a:t>
-            </a:r>
-            <a:endParaRPr lang="en-US" sz="4000" dirty="0"/>
-          </a:p>
-          <a:p>
-            <a:pPr algn="l" indent="0" marL="0">
-              <a:spcAft>
-                <a:spcPts val="800"/>
-              </a:spcAft>
-              <a:buNone/>
-            </a:pPr>
-            <a:r>
-              <a:rPr lang="en-US" sz="4000" b="1" dirty="0">
-                <a:solidFill>
-                  <a:srgbClr val="111111"/>
-                </a:solidFill>
-                <a:latin typeface="Times New Roman" pitchFamily="34" charset="0"/>
-                <a:ea typeface="Times New Roman" pitchFamily="34" charset="-122"/>
-                <a:cs typeface="Times New Roman" pitchFamily="34" charset="-120"/>
-              </a:rPr>
-              <a:t>Other factors:</a:t>
-            </a:r>
-            <a:endParaRPr lang="en-US" sz="4000" dirty="0"/>
-          </a:p>
-          <a:p>
-            <a:pPr algn="l" marL="342900" indent="-342900">
-              <a:spcAft>
-                <a:spcPts val="800"/>
-              </a:spcAft>
-              <a:buSzPct val="100000"/>
-              <a:buChar char="•"/>
-            </a:pPr>
-            <a:r>
-              <a:rPr lang="en-US" sz="4000" dirty="0">
-                <a:solidFill>
-                  <a:srgbClr val="111111"/>
-                </a:solidFill>
-                <a:latin typeface="Times New Roman" pitchFamily="34" charset="0"/>
-                <a:ea typeface="Times New Roman" pitchFamily="34" charset="-122"/>
-                <a:cs typeface="Times New Roman" pitchFamily="34" charset="-120"/>
-              </a:rPr>
-              <a:t>Warm currents increase rain, cold currents reduce it.</a:t>
+              <a:t>Very cold, dense air sinks over the poles and holds very little moisture. Precipitation is therefore very low.</a:t>
             </a:r>
             <a:endParaRPr lang="en-US" sz="4000" dirty="0"/>
           </a:p>
@@ -17992,7 +18522,7 @@
         <p:spPr>
           <a:xfrm>
             <a:off x="0" y="658368"/>
-            <a:ext cx="5120640" cy="5833872"/>
+            <a:ext cx="1463040" cy="5833872"/>
           </a:xfrm>
           <a:prstGeom prst="rect">
             <a:avLst/>
@@ -18007,8 +18537,8 @@
         </p:nvSpPr>
         <p:spPr>
           <a:xfrm>
-            <a:off x="5349240" y="1005840"/>
-            <a:ext cx="6522415" cy="731520"/>
+            <a:off x="1691640" y="1005840"/>
+            <a:ext cx="10180015" cy="731520"/>
           </a:xfrm>
           <a:prstGeom prst="rect">
             <a:avLst/>
@@ -18034,7 +18564,7 @@
                 <a:ea typeface="Times New Roman" pitchFamily="34" charset="-122"/>
                 <a:cs typeface="Times New Roman" pitchFamily="34" charset="-120"/>
               </a:rPr>
-              <a:t>2. Secondary (Local) Factors (continued)</a:t>
+              <a:t>2. Primary Factors of Variation</a:t>
             </a:r>
             <a:endParaRPr lang="en-US" sz="3600" dirty="0"/>
           </a:p>
@@ -18048,8 +18578,8 @@
         </p:nvSpPr>
         <p:spPr>
           <a:xfrm>
-            <a:off x="5349240" y="1783080"/>
-            <a:ext cx="6522415" cy="4663440"/>
+            <a:off x="1691640" y="1737360"/>
+            <a:ext cx="10180015" cy="457200"/>
           </a:xfrm>
           <a:prstGeom prst="rect">
             <a:avLst/>
@@ -18058,18 +18588,56 @@
           <a:ln/>
         </p:spPr>
         <p:txBody>
+          <a:bodyPr wrap="square" lIns="0" tIns="0" rIns="0" bIns="0" rtlCol="0" anchor="ctr"/>
+          <a:lstStyle/>
+          <a:p>
+            <a:pPr algn="l" indent="0" marL="0">
+              <a:buNone/>
+            </a:pPr>
+            <a:r>
+              <a:rPr lang="en-US" sz="3200" b="1" dirty="0">
+                <a:solidFill>
+                  <a:srgbClr val="990011"/>
+                </a:solidFill>
+                <a:latin typeface="Times New Roman" pitchFamily="34" charset="0"/>
+                <a:ea typeface="Times New Roman" pitchFamily="34" charset="-122"/>
+                <a:cs typeface="Times New Roman" pitchFamily="34" charset="-120"/>
+              </a:rPr>
+              <a:t>B) Air Masses</a:t>
+            </a:r>
+            <a:endParaRPr lang="en-US" sz="3200" dirty="0"/>
+          </a:p>
+        </p:txBody>
+      </p:sp>
+      <p:sp>
+        <p:nvSpPr>
+          <p:cNvPr id="6" name="Text 3"/>
+          <p:cNvSpPr/>
+          <p:nvPr/>
+        </p:nvSpPr>
+        <p:spPr>
+          <a:xfrm>
+            <a:off x="1691640" y="2240280"/>
+            <a:ext cx="10180015" cy="4206240"/>
+          </a:xfrm>
+          <a:prstGeom prst="rect">
+            <a:avLst/>
+          </a:prstGeom>
+          <a:noFill/>
+          <a:ln/>
+        </p:spPr>
+        <p:txBody>
           <a:bodyPr wrap="square" lIns="0" tIns="0" rIns="0" bIns="0" rtlCol="0" anchor="t"/>
           <a:lstStyle/>
           <a:p>
-            <a:pPr algn="l" marL="342900" indent="-342900">
+            <a:pPr algn="l" indent="0" marL="0">
               <a:spcAft>
                 <a:spcPts val="800"/>
               </a:spcAft>
-              <a:buSzPct val="100000"/>
-              <a:buChar char="•"/>
-            </a:pPr>
-            <a:r>
-              <a:rPr lang="en-US" sz="4000" dirty="0">
+              <a:buNone/>
+            </a:pPr>
+            <a:r>
+              <a:rPr lang="en-US" sz="3400" i="1" dirty="0">
                 <a:solidFill>
                   <a:srgbClr val="111111"/>
                 </a:solidFill>
@@ -18077,20 +18645,19 @@
                 <a:ea typeface="Times New Roman" pitchFamily="34" charset="-122"/>
                 <a:cs typeface="Times New Roman" pitchFamily="34" charset="-120"/>
               </a:rPr>
-              <a:t>Large lakes such as Lake Chad add moisture.</a:t>
-            </a:r>
-            <a:endParaRPr lang="en-US" sz="4000" dirty="0"/>
-          </a:p>
-          <a:p>
-            <a:pPr algn="l" marL="342900" indent="-342900">
+              <a:t>Air masses influence precipitation in the following ways:</a:t>
+            </a:r>
+            <a:endParaRPr lang="en-US" sz="3400" dirty="0"/>
+          </a:p>
+          <a:p>
+            <a:pPr algn="l" indent="0" marL="0">
               <a:spcAft>
                 <a:spcPts val="800"/>
               </a:spcAft>
-              <a:buSzPct val="100000"/>
-              <a:buChar char="•"/>
-            </a:pPr>
-            <a:r>
-              <a:rPr lang="en-US" sz="4000" dirty="0">
+              <a:buNone/>
+            </a:pPr>
+            <a:r>
+              <a:rPr lang="en-US" sz="3400" b="1" dirty="0">
                 <a:solidFill>
                   <a:srgbClr val="111111"/>
                 </a:solidFill>
@@ -18098,9 +18665,26 @@
                 <a:ea typeface="Times New Roman" pitchFamily="34" charset="-122"/>
                 <a:cs typeface="Times New Roman" pitchFamily="34" charset="-120"/>
               </a:rPr>
-              <a:t>Big cities can increase local storms.</a:t>
-            </a:r>
-            <a:endParaRPr lang="en-US" sz="4000" dirty="0"/>
+              <a:t>Maritime air masses: </a:t>
+            </a:r>
+            <a:pPr algn="l" indent="0" marL="0">
+              <a:spcAft>
+                <a:spcPts val="800"/>
+              </a:spcAft>
+              <a:buNone/>
+            </a:pPr>
+            <a:r>
+              <a:rPr lang="en-US" sz="3400" dirty="0">
+                <a:solidFill>
+                  <a:srgbClr val="111111"/>
+                </a:solidFill>
+                <a:latin typeface="Times New Roman" pitchFamily="34" charset="0"/>
+                <a:ea typeface="Times New Roman" pitchFamily="34" charset="-122"/>
+                <a:cs typeface="Times New Roman" pitchFamily="34" charset="-120"/>
+              </a:rPr>
+              <a:t>They form over the oceans and are moist, so they bring rain to the lands they cross. For example, the maritime tropical air of the south-west monsoon brings the rainy season to Cameroon from April to October in the North.</a:t>
+            </a:r>
+            <a:endParaRPr lang="en-US" sz="3400" dirty="0"/>
           </a:p>
         </p:txBody>
       </p:sp>
@@ -18210,15 +18794,156 @@
                 <a:ea typeface="Calibri" pitchFamily="34" charset="-122"/>
                 <a:cs typeface="Calibri" pitchFamily="34" charset="-120"/>
               </a:rPr>
-              <a:t>FORMATIVE EVALUATION</a:t>
+              <a:t>BOARD SUMMARY</a:t>
             </a:r>
             <a:endParaRPr lang="en-US" sz="1400" dirty="0"/>
+          </a:p>
+        </p:txBody>
+      </p:sp>
+      <p:sp>
+        <p:nvSpPr>
+          <p:cNvPr id="3" name="Text 1"/>
+          <p:cNvSpPr/>
+          <p:nvPr/>
+        </p:nvSpPr>
+        <p:spPr>
+          <a:xfrm>
+            <a:off x="365760" y="1005840"/>
+            <a:ext cx="11460175" cy="731520"/>
+          </a:xfrm>
+          <a:prstGeom prst="rect">
+            <a:avLst/>
+          </a:prstGeom>
+          <a:noFill/>
+          <a:ln/>
+        </p:spPr>
+        <p:txBody>
+          <a:bodyPr wrap="square" lIns="0" tIns="0" rIns="0" bIns="0" rtlCol="0" anchor="ctr">
+            <a:normAutofit/>
+          </a:bodyPr>
+          <a:lstStyle/>
+          <a:p>
+            <a:pPr algn="ctr" indent="0" marL="0">
+              <a:buNone/>
+            </a:pPr>
+            <a:r>
+              <a:rPr lang="en-US" sz="3600" b="1" dirty="0">
+                <a:solidFill>
+                  <a:srgbClr val="990011"/>
+                </a:solidFill>
+                <a:latin typeface="Times New Roman" pitchFamily="34" charset="0"/>
+                <a:ea typeface="Times New Roman" pitchFamily="34" charset="-122"/>
+                <a:cs typeface="Times New Roman" pitchFamily="34" charset="-120"/>
+              </a:rPr>
+              <a:t>2. Primary Factors of Variation</a:t>
+            </a:r>
+            <a:endParaRPr lang="en-US" sz="3600" dirty="0"/>
+          </a:p>
+        </p:txBody>
+      </p:sp>
+      <p:sp>
+        <p:nvSpPr>
+          <p:cNvPr id="4" name="Text 2"/>
+          <p:cNvSpPr/>
+          <p:nvPr/>
+        </p:nvSpPr>
+        <p:spPr>
+          <a:xfrm>
+            <a:off x="365760" y="1737360"/>
+            <a:ext cx="6035040" cy="457200"/>
+          </a:xfrm>
+          <a:prstGeom prst="rect">
+            <a:avLst/>
+          </a:prstGeom>
+          <a:noFill/>
+          <a:ln/>
+        </p:spPr>
+        <p:txBody>
+          <a:bodyPr wrap="square" lIns="0" tIns="0" rIns="0" bIns="0" rtlCol="0" anchor="ctr">
+            <a:normAutofit/>
+          </a:bodyPr>
+          <a:lstStyle/>
+          <a:p>
+            <a:pPr algn="l" indent="0" marL="0">
+              <a:buNone/>
+            </a:pPr>
+            <a:r>
+              <a:rPr lang="en-US" sz="3000" b="1" dirty="0">
+                <a:solidFill>
+                  <a:srgbClr val="990011"/>
+                </a:solidFill>
+                <a:latin typeface="Times New Roman" pitchFamily="34" charset="0"/>
+                <a:ea typeface="Times New Roman" pitchFamily="34" charset="-122"/>
+                <a:cs typeface="Times New Roman" pitchFamily="34" charset="-120"/>
+              </a:rPr>
+              <a:t>B) Air Masses</a:t>
+            </a:r>
+            <a:endParaRPr lang="en-US" sz="3000" dirty="0"/>
+          </a:p>
+        </p:txBody>
+      </p:sp>
+      <p:sp>
+        <p:nvSpPr>
+          <p:cNvPr id="5" name="Text 3"/>
+          <p:cNvSpPr/>
+          <p:nvPr/>
+        </p:nvSpPr>
+        <p:spPr>
+          <a:xfrm>
+            <a:off x="365760" y="2240280"/>
+            <a:ext cx="6035040" cy="4160520"/>
+          </a:xfrm>
+          <a:prstGeom prst="rect">
+            <a:avLst/>
+          </a:prstGeom>
+          <a:noFill/>
+          <a:ln/>
+        </p:spPr>
+        <p:txBody>
+          <a:bodyPr wrap="square" lIns="0" tIns="0" rIns="0" bIns="0" rtlCol="0" anchor="t"/>
+          <a:lstStyle/>
+          <a:p>
+            <a:pPr algn="l" indent="0" marL="0">
+              <a:spcAft>
+                <a:spcPts val="800"/>
+              </a:spcAft>
+              <a:buNone/>
+            </a:pPr>
+            <a:r>
+              <a:rPr lang="en-US" sz="3400" b="1" dirty="0">
+                <a:solidFill>
+                  <a:srgbClr val="111111"/>
+                </a:solidFill>
+                <a:latin typeface="Times New Roman" pitchFamily="34" charset="0"/>
+                <a:ea typeface="Times New Roman" pitchFamily="34" charset="-122"/>
+                <a:cs typeface="Times New Roman" pitchFamily="34" charset="-120"/>
+              </a:rPr>
+              <a:t>Continental air masses: </a:t>
+            </a:r>
+            <a:pPr algn="l" indent="0" marL="0">
+              <a:spcAft>
+                <a:spcPts val="800"/>
+              </a:spcAft>
+              <a:buNone/>
+            </a:pPr>
+            <a:r>
+              <a:rPr lang="en-US" sz="3400" dirty="0">
+                <a:solidFill>
+                  <a:srgbClr val="111111"/>
+                </a:solidFill>
+                <a:latin typeface="Times New Roman" pitchFamily="34" charset="0"/>
+                <a:ea typeface="Times New Roman" pitchFamily="34" charset="-122"/>
+                <a:cs typeface="Times New Roman" pitchFamily="34" charset="-120"/>
+              </a:rPr>
+              <a:t>They form over land and are dry, so they bring dry weather. For example, the continental tropical air of the Harmattan, from the Sahara, brings the dry season to northern Cameroon.</a:t>
+            </a:r>
+            <a:endParaRPr lang="en-US" sz="3400" dirty="0"/>
           </a:p>
         </p:txBody>
       </p:sp>
       <p:pic>
         <p:nvPicPr>
-          <p:cNvPr id="3" name="Image 0" descr="/home/claude/f4/img/minesec_sheet.png">    </p:cNvPr>
+          <p:cNvPr id="6" name="Image 0" descr="/home/claude/f4/img/v2/f2t_harmattan.jpg">    </p:cNvPr>
           <p:cNvPicPr>
             <a:picLocks noChangeAspect="1"/>
           </p:cNvPicPr>
@@ -18232,8 +18957,8 @@
         </p:blipFill>
         <p:spPr>
           <a:xfrm>
-            <a:off x="0" y="658368"/>
-            <a:ext cx="5120640" cy="5833872"/>
+            <a:off x="6537960" y="2400897"/>
+            <a:ext cx="5470855" cy="3034615"/>
           </a:xfrm>
           <a:prstGeom prst="rect">
             <a:avLst/>
@@ -18242,14 +18967,14 @@
       </p:pic>
       <p:sp>
         <p:nvSpPr>
-          <p:cNvPr id="4" name="Text 1"/>
+          <p:cNvPr id="7" name="Text 4"/>
           <p:cNvSpPr/>
           <p:nvPr/>
         </p:nvSpPr>
         <p:spPr>
           <a:xfrm>
-            <a:off x="5349240" y="1005840"/>
-            <a:ext cx="6522415" cy="731520"/>
+            <a:off x="6537960" y="6089904"/>
+            <a:ext cx="5470855" cy="347472"/>
           </a:xfrm>
           <a:prstGeom prst="rect">
             <a:avLst/>
@@ -18258,68 +18983,24 @@
           <a:ln/>
         </p:spPr>
         <p:txBody>
-          <a:bodyPr wrap="square" lIns="0" tIns="0" rIns="0" bIns="0" rtlCol="0" anchor="ctr">
-            <a:normAutofit/>
-          </a:bodyPr>
+          <a:bodyPr wrap="square" lIns="0" tIns="0" rIns="0" bIns="0" rtlCol="0" anchor="ctr"/>
           <a:lstStyle/>
           <a:p>
             <a:pPr algn="ctr" indent="0" marL="0">
               <a:buNone/>
             </a:pPr>
             <a:r>
-              <a:rPr lang="en-US" sz="3600" b="1" dirty="0">
-                <a:solidFill>
-                  <a:srgbClr val="990011"/>
+              <a:rPr lang="en-US" sz="1600" i="1" dirty="0">
+                <a:solidFill>
+                  <a:srgbClr val="555555"/>
                 </a:solidFill>
                 <a:latin typeface="Times New Roman" pitchFamily="34" charset="0"/>
                 <a:ea typeface="Times New Roman" pitchFamily="34" charset="-122"/>
                 <a:cs typeface="Times New Roman" pitchFamily="34" charset="-120"/>
               </a:rPr>
-              <a:t>Evaluation 1</a:t>
-            </a:r>
-            <a:endParaRPr lang="en-US" sz="3600" dirty="0"/>
-          </a:p>
-        </p:txBody>
-      </p:sp>
-      <p:sp>
-        <p:nvSpPr>
-          <p:cNvPr id="5" name="Text 2"/>
-          <p:cNvSpPr/>
-          <p:nvPr/>
-        </p:nvSpPr>
-        <p:spPr>
-          <a:xfrm>
-            <a:off x="5349240" y="1783080"/>
-            <a:ext cx="6522415" cy="4663440"/>
-          </a:xfrm>
-          <a:prstGeom prst="rect">
-            <a:avLst/>
-          </a:prstGeom>
-          <a:noFill/>
-          <a:ln/>
-        </p:spPr>
-        <p:txBody>
-          <a:bodyPr wrap="square" lIns="0" tIns="0" rIns="0" bIns="0" rtlCol="0" anchor="t"/>
-          <a:lstStyle/>
-          <a:p>
-            <a:pPr algn="l" indent="0" marL="0">
-              <a:spcAft>
-                <a:spcPts val="800"/>
-              </a:spcAft>
-              <a:buNone/>
-            </a:pPr>
-            <a:r>
-              <a:rPr lang="en-US" sz="4000" dirty="0">
-                <a:solidFill>
-                  <a:srgbClr val="111111"/>
-                </a:solidFill>
-                <a:latin typeface="Times New Roman" pitchFamily="34" charset="0"/>
-                <a:ea typeface="Times New Roman" pitchFamily="34" charset="-122"/>
-                <a:cs typeface="Times New Roman" pitchFamily="34" charset="-120"/>
-              </a:rPr>
-              <a:t>Why does the Equator receive heavy rain all year while 30° N is very dry?</a:t>
-            </a:r>
-            <a:endParaRPr lang="en-US" sz="4000" dirty="0"/>
+              <a:t>Illustration: the Harmattan</a:t>
+            </a:r>
+            <a:endParaRPr lang="en-US" sz="1600" dirty="0"/>
           </a:p>
         </p:txBody>
       </p:sp>
@@ -18429,15 +19110,176 @@
                 <a:ea typeface="Calibri" pitchFamily="34" charset="-122"/>
                 <a:cs typeface="Calibri" pitchFamily="34" charset="-120"/>
               </a:rPr>
-              <a:t>FORMATIVE EVALUATION</a:t>
+              <a:t>BOARD SUMMARY</a:t>
             </a:r>
             <a:endParaRPr lang="en-US" sz="1400" dirty="0"/>
+          </a:p>
+        </p:txBody>
+      </p:sp>
+      <p:sp>
+        <p:nvSpPr>
+          <p:cNvPr id="3" name="Text 1"/>
+          <p:cNvSpPr/>
+          <p:nvPr/>
+        </p:nvSpPr>
+        <p:spPr>
+          <a:xfrm>
+            <a:off x="365760" y="1005840"/>
+            <a:ext cx="11460175" cy="731520"/>
+          </a:xfrm>
+          <a:prstGeom prst="rect">
+            <a:avLst/>
+          </a:prstGeom>
+          <a:noFill/>
+          <a:ln/>
+        </p:spPr>
+        <p:txBody>
+          <a:bodyPr wrap="square" lIns="0" tIns="0" rIns="0" bIns="0" rtlCol="0" anchor="ctr">
+            <a:normAutofit/>
+          </a:bodyPr>
+          <a:lstStyle/>
+          <a:p>
+            <a:pPr algn="ctr" indent="0" marL="0">
+              <a:buNone/>
+            </a:pPr>
+            <a:r>
+              <a:rPr lang="en-US" sz="3600" b="1" dirty="0">
+                <a:solidFill>
+                  <a:srgbClr val="990011"/>
+                </a:solidFill>
+                <a:latin typeface="Times New Roman" pitchFamily="34" charset="0"/>
+                <a:ea typeface="Times New Roman" pitchFamily="34" charset="-122"/>
+                <a:cs typeface="Times New Roman" pitchFamily="34" charset="-120"/>
+              </a:rPr>
+              <a:t>3. Secondary (Local) Factors</a:t>
+            </a:r>
+            <a:endParaRPr lang="en-US" sz="3600" dirty="0"/>
+          </a:p>
+        </p:txBody>
+      </p:sp>
+      <p:sp>
+        <p:nvSpPr>
+          <p:cNvPr id="4" name="Text 2"/>
+          <p:cNvSpPr/>
+          <p:nvPr/>
+        </p:nvSpPr>
+        <p:spPr>
+          <a:xfrm>
+            <a:off x="365760" y="1737360"/>
+            <a:ext cx="6035040" cy="457200"/>
+          </a:xfrm>
+          <a:prstGeom prst="rect">
+            <a:avLst/>
+          </a:prstGeom>
+          <a:noFill/>
+          <a:ln/>
+        </p:spPr>
+        <p:txBody>
+          <a:bodyPr wrap="square" lIns="0" tIns="0" rIns="0" bIns="0" rtlCol="0" anchor="ctr">
+            <a:normAutofit/>
+          </a:bodyPr>
+          <a:lstStyle/>
+          <a:p>
+            <a:pPr algn="l" indent="0" marL="0">
+              <a:buNone/>
+            </a:pPr>
+            <a:r>
+              <a:rPr lang="en-US" sz="3000" b="1" dirty="0">
+                <a:solidFill>
+                  <a:srgbClr val="990011"/>
+                </a:solidFill>
+                <a:latin typeface="Times New Roman" pitchFamily="34" charset="0"/>
+                <a:ea typeface="Times New Roman" pitchFamily="34" charset="-122"/>
+                <a:cs typeface="Times New Roman" pitchFamily="34" charset="-120"/>
+              </a:rPr>
+              <a:t>A) Relief, the Sea and Ocean Currents</a:t>
+            </a:r>
+            <a:endParaRPr lang="en-US" sz="3000" dirty="0"/>
+          </a:p>
+        </p:txBody>
+      </p:sp>
+      <p:sp>
+        <p:nvSpPr>
+          <p:cNvPr id="5" name="Text 3"/>
+          <p:cNvSpPr/>
+          <p:nvPr/>
+        </p:nvSpPr>
+        <p:spPr>
+          <a:xfrm>
+            <a:off x="365760" y="2240280"/>
+            <a:ext cx="6035040" cy="4160520"/>
+          </a:xfrm>
+          <a:prstGeom prst="rect">
+            <a:avLst/>
+          </a:prstGeom>
+          <a:noFill/>
+          <a:ln/>
+        </p:spPr>
+        <p:txBody>
+          <a:bodyPr wrap="square" lIns="0" tIns="0" rIns="0" bIns="0" rtlCol="0" anchor="t"/>
+          <a:lstStyle/>
+          <a:p>
+            <a:pPr algn="l" indent="0" marL="0">
+              <a:spcAft>
+                <a:spcPts val="800"/>
+              </a:spcAft>
+              <a:buNone/>
+            </a:pPr>
+            <a:r>
+              <a:rPr lang="en-US" sz="2800" i="1" dirty="0">
+                <a:solidFill>
+                  <a:srgbClr val="111111"/>
+                </a:solidFill>
+                <a:latin typeface="Times New Roman" pitchFamily="34" charset="0"/>
+                <a:ea typeface="Times New Roman" pitchFamily="34" charset="-122"/>
+                <a:cs typeface="Times New Roman" pitchFamily="34" charset="-120"/>
+              </a:rPr>
+              <a:t>Local rainfall is influenced by the following physical factors:</a:t>
+            </a:r>
+            <a:endParaRPr lang="en-US" sz="2800" dirty="0"/>
+          </a:p>
+          <a:p>
+            <a:pPr algn="l" indent="0" marL="0">
+              <a:spcAft>
+                <a:spcPts val="800"/>
+              </a:spcAft>
+              <a:buNone/>
+            </a:pPr>
+            <a:r>
+              <a:rPr lang="en-US" sz="2800" b="1" dirty="0">
+                <a:solidFill>
+                  <a:srgbClr val="111111"/>
+                </a:solidFill>
+                <a:latin typeface="Times New Roman" pitchFamily="34" charset="0"/>
+                <a:ea typeface="Times New Roman" pitchFamily="34" charset="-122"/>
+                <a:cs typeface="Times New Roman" pitchFamily="34" charset="-120"/>
+              </a:rPr>
+              <a:t>Relief: </a:t>
+            </a:r>
+            <a:pPr algn="l" indent="0" marL="0">
+              <a:spcAft>
+                <a:spcPts val="800"/>
+              </a:spcAft>
+              <a:buNone/>
+            </a:pPr>
+            <a:r>
+              <a:rPr lang="en-US" sz="2800" dirty="0">
+                <a:solidFill>
+                  <a:srgbClr val="111111"/>
+                </a:solidFill>
+                <a:latin typeface="Times New Roman" pitchFamily="34" charset="0"/>
+                <a:ea typeface="Times New Roman" pitchFamily="34" charset="-122"/>
+                <a:cs typeface="Times New Roman" pitchFamily="34" charset="-120"/>
+              </a:rPr>
+              <a:t>Moist air forced to rise over mountains gives heavy rain on the windward side and a rain shadow on the leeward side. Debundscha, at the foot of Mount Cameroon, receives about 10,000 mm a year, one of the highest totals in the world.</a:t>
+            </a:r>
+            <a:endParaRPr lang="en-US" sz="2800" dirty="0"/>
           </a:p>
         </p:txBody>
       </p:sp>
       <p:pic>
         <p:nvPicPr>
-          <p:cNvPr id="3" name="Image 0" descr="/home/claude/f4/img/minesec_sheet.png">    </p:cNvPr>
+          <p:cNvPr id="6" name="Image 0" descr="/home/claude/f4/img/v2/met2_rain_factors.png">    </p:cNvPr>
           <p:cNvPicPr>
             <a:picLocks noChangeAspect="1"/>
           </p:cNvPicPr>
@@ -18451,8 +19293,8 @@
         </p:blipFill>
         <p:spPr>
           <a:xfrm>
-            <a:off x="0" y="658368"/>
-            <a:ext cx="5120640" cy="5833872"/>
+            <a:off x="6537960" y="2849678"/>
+            <a:ext cx="5470855" cy="2137053"/>
           </a:xfrm>
           <a:prstGeom prst="rect">
             <a:avLst/>
@@ -18461,14 +19303,14 @@
       </p:pic>
       <p:sp>
         <p:nvSpPr>
-          <p:cNvPr id="4" name="Text 1"/>
+          <p:cNvPr id="7" name="Text 4"/>
           <p:cNvSpPr/>
           <p:nvPr/>
         </p:nvSpPr>
         <p:spPr>
           <a:xfrm>
-            <a:off x="5349240" y="1005840"/>
-            <a:ext cx="6522415" cy="731520"/>
+            <a:off x="6537960" y="6089904"/>
+            <a:ext cx="5470855" cy="347472"/>
           </a:xfrm>
           <a:prstGeom prst="rect">
             <a:avLst/>
@@ -18477,68 +19319,24 @@
           <a:ln/>
         </p:spPr>
         <p:txBody>
-          <a:bodyPr wrap="square" lIns="0" tIns="0" rIns="0" bIns="0" rtlCol="0" anchor="ctr">
-            <a:normAutofit/>
-          </a:bodyPr>
+          <a:bodyPr wrap="square" lIns="0" tIns="0" rIns="0" bIns="0" rtlCol="0" anchor="ctr"/>
           <a:lstStyle/>
           <a:p>
             <a:pPr algn="ctr" indent="0" marL="0">
               <a:buNone/>
             </a:pPr>
             <a:r>
-              <a:rPr lang="en-US" sz="3600" b="1" dirty="0">
-                <a:solidFill>
-                  <a:srgbClr val="990011"/>
+              <a:rPr lang="en-US" sz="1600" i="1" dirty="0">
+                <a:solidFill>
+                  <a:srgbClr val="555555"/>
                 </a:solidFill>
                 <a:latin typeface="Times New Roman" pitchFamily="34" charset="0"/>
                 <a:ea typeface="Times New Roman" pitchFamily="34" charset="-122"/>
                 <a:cs typeface="Times New Roman" pitchFamily="34" charset="-120"/>
               </a:rPr>
-              <a:t>Expected Answer</a:t>
-            </a:r>
-            <a:endParaRPr lang="en-US" sz="3600" dirty="0"/>
-          </a:p>
-        </p:txBody>
-      </p:sp>
-      <p:sp>
-        <p:nvSpPr>
-          <p:cNvPr id="5" name="Text 2"/>
-          <p:cNvSpPr/>
-          <p:nvPr/>
-        </p:nvSpPr>
-        <p:spPr>
-          <a:xfrm>
-            <a:off x="5349240" y="1783080"/>
-            <a:ext cx="6522415" cy="4663440"/>
-          </a:xfrm>
-          <a:prstGeom prst="rect">
-            <a:avLst/>
-          </a:prstGeom>
-          <a:noFill/>
-          <a:ln/>
-        </p:spPr>
-        <p:txBody>
-          <a:bodyPr wrap="square" lIns="0" tIns="0" rIns="0" bIns="0" rtlCol="0" anchor="t"/>
-          <a:lstStyle/>
-          <a:p>
-            <a:pPr algn="l" indent="0" marL="0">
-              <a:spcAft>
-                <a:spcPts val="800"/>
-              </a:spcAft>
-              <a:buNone/>
-            </a:pPr>
-            <a:r>
-              <a:rPr lang="en-US" sz="4000" dirty="0">
-                <a:solidFill>
-                  <a:srgbClr val="111111"/>
-                </a:solidFill>
-                <a:latin typeface="Times New Roman" pitchFamily="34" charset="0"/>
-                <a:ea typeface="Times New Roman" pitchFamily="34" charset="-122"/>
-                <a:cs typeface="Times New Roman" pitchFamily="34" charset="-120"/>
-              </a:rPr>
-              <a:t>At the Equator, low pressure makes air rise and form rain clouds; at 30° N, high pressure makes air sink and warm, so no clouds form.</a:t>
-            </a:r>
-            <a:endParaRPr lang="en-US" sz="4000" dirty="0"/>
+              <a:t>Illustration: local factors of rainfall</a:t>
+            </a:r>
+            <a:endParaRPr lang="en-US" sz="1600" dirty="0"/>
           </a:p>
         </p:txBody>
       </p:sp>
@@ -18867,15 +19665,156 @@
                 <a:ea typeface="Calibri" pitchFamily="34" charset="-122"/>
                 <a:cs typeface="Calibri" pitchFamily="34" charset="-120"/>
               </a:rPr>
-              <a:t>FORMATIVE EVALUATION</a:t>
+              <a:t>BOARD SUMMARY</a:t>
             </a:r>
             <a:endParaRPr lang="en-US" sz="1400" dirty="0"/>
+          </a:p>
+        </p:txBody>
+      </p:sp>
+      <p:sp>
+        <p:nvSpPr>
+          <p:cNvPr id="3" name="Text 1"/>
+          <p:cNvSpPr/>
+          <p:nvPr/>
+        </p:nvSpPr>
+        <p:spPr>
+          <a:xfrm>
+            <a:off x="365760" y="1005840"/>
+            <a:ext cx="11460175" cy="731520"/>
+          </a:xfrm>
+          <a:prstGeom prst="rect">
+            <a:avLst/>
+          </a:prstGeom>
+          <a:noFill/>
+          <a:ln/>
+        </p:spPr>
+        <p:txBody>
+          <a:bodyPr wrap="square" lIns="0" tIns="0" rIns="0" bIns="0" rtlCol="0" anchor="ctr">
+            <a:normAutofit/>
+          </a:bodyPr>
+          <a:lstStyle/>
+          <a:p>
+            <a:pPr algn="ctr" indent="0" marL="0">
+              <a:buNone/>
+            </a:pPr>
+            <a:r>
+              <a:rPr lang="en-US" sz="3600" b="1" dirty="0">
+                <a:solidFill>
+                  <a:srgbClr val="990011"/>
+                </a:solidFill>
+                <a:latin typeface="Times New Roman" pitchFamily="34" charset="0"/>
+                <a:ea typeface="Times New Roman" pitchFamily="34" charset="-122"/>
+                <a:cs typeface="Times New Roman" pitchFamily="34" charset="-120"/>
+              </a:rPr>
+              <a:t>3. Secondary (Local) Factors</a:t>
+            </a:r>
+            <a:endParaRPr lang="en-US" sz="3600" dirty="0"/>
+          </a:p>
+        </p:txBody>
+      </p:sp>
+      <p:sp>
+        <p:nvSpPr>
+          <p:cNvPr id="4" name="Text 2"/>
+          <p:cNvSpPr/>
+          <p:nvPr/>
+        </p:nvSpPr>
+        <p:spPr>
+          <a:xfrm>
+            <a:off x="365760" y="1737360"/>
+            <a:ext cx="6035040" cy="457200"/>
+          </a:xfrm>
+          <a:prstGeom prst="rect">
+            <a:avLst/>
+          </a:prstGeom>
+          <a:noFill/>
+          <a:ln/>
+        </p:spPr>
+        <p:txBody>
+          <a:bodyPr wrap="square" lIns="0" tIns="0" rIns="0" bIns="0" rtlCol="0" anchor="ctr">
+            <a:normAutofit/>
+          </a:bodyPr>
+          <a:lstStyle/>
+          <a:p>
+            <a:pPr algn="l" indent="0" marL="0">
+              <a:buNone/>
+            </a:pPr>
+            <a:r>
+              <a:rPr lang="en-US" sz="3000" b="1" dirty="0">
+                <a:solidFill>
+                  <a:srgbClr val="990011"/>
+                </a:solidFill>
+                <a:latin typeface="Times New Roman" pitchFamily="34" charset="0"/>
+                <a:ea typeface="Times New Roman" pitchFamily="34" charset="-122"/>
+                <a:cs typeface="Times New Roman" pitchFamily="34" charset="-120"/>
+              </a:rPr>
+              <a:t>A) Relief, the Sea and Ocean Currents</a:t>
+            </a:r>
+            <a:endParaRPr lang="en-US" sz="3000" dirty="0"/>
+          </a:p>
+        </p:txBody>
+      </p:sp>
+      <p:sp>
+        <p:nvSpPr>
+          <p:cNvPr id="5" name="Text 3"/>
+          <p:cNvSpPr/>
+          <p:nvPr/>
+        </p:nvSpPr>
+        <p:spPr>
+          <a:xfrm>
+            <a:off x="365760" y="2240280"/>
+            <a:ext cx="6035040" cy="4160520"/>
+          </a:xfrm>
+          <a:prstGeom prst="rect">
+            <a:avLst/>
+          </a:prstGeom>
+          <a:noFill/>
+          <a:ln/>
+        </p:spPr>
+        <p:txBody>
+          <a:bodyPr wrap="square" lIns="0" tIns="0" rIns="0" bIns="0" rtlCol="0" anchor="t"/>
+          <a:lstStyle/>
+          <a:p>
+            <a:pPr algn="l" indent="0" marL="0">
+              <a:spcAft>
+                <a:spcPts val="800"/>
+              </a:spcAft>
+              <a:buNone/>
+            </a:pPr>
+            <a:r>
+              <a:rPr lang="en-US" sz="3200" b="1" dirty="0">
+                <a:solidFill>
+                  <a:srgbClr val="111111"/>
+                </a:solidFill>
+                <a:latin typeface="Times New Roman" pitchFamily="34" charset="0"/>
+                <a:ea typeface="Times New Roman" pitchFamily="34" charset="-122"/>
+                <a:cs typeface="Times New Roman" pitchFamily="34" charset="-120"/>
+              </a:rPr>
+              <a:t>Distance from the sea (insularity and continentality): </a:t>
+            </a:r>
+            <a:pPr algn="l" indent="0" marL="0">
+              <a:spcAft>
+                <a:spcPts val="800"/>
+              </a:spcAft>
+              <a:buNone/>
+            </a:pPr>
+            <a:r>
+              <a:rPr lang="en-US" sz="3200" dirty="0">
+                <a:solidFill>
+                  <a:srgbClr val="111111"/>
+                </a:solidFill>
+                <a:latin typeface="Times New Roman" pitchFamily="34" charset="0"/>
+                <a:ea typeface="Times New Roman" pitchFamily="34" charset="-122"/>
+                <a:cs typeface="Times New Roman" pitchFamily="34" charset="-120"/>
+              </a:rPr>
+              <a:t>Coasts and islands receive much moisture from the sea, while inland areas are far from it and drier. Douala receives about 4,000 mm a year, but Garoua only about 1,000 mm.</a:t>
+            </a:r>
+            <a:endParaRPr lang="en-US" sz="3200" dirty="0"/>
           </a:p>
         </p:txBody>
       </p:sp>
       <p:pic>
         <p:nvPicPr>
-          <p:cNvPr id="3" name="Image 0" descr="/home/claude/f4/img/minesec_sheet.png">    </p:cNvPr>
+          <p:cNvPr id="6" name="Image 0" descr="/home/claude/f4/img/v2/rain_compare_big.png">    </p:cNvPr>
           <p:cNvPicPr>
             <a:picLocks noChangeAspect="1"/>
           </p:cNvPicPr>
@@ -18889,8 +19828,8 @@
         </p:blipFill>
         <p:spPr>
           <a:xfrm>
-            <a:off x="0" y="658368"/>
-            <a:ext cx="5120640" cy="5833872"/>
+            <a:off x="6537960" y="2764195"/>
+            <a:ext cx="5470855" cy="2308017"/>
           </a:xfrm>
           <a:prstGeom prst="rect">
             <a:avLst/>
@@ -18899,14 +19838,14 @@
       </p:pic>
       <p:sp>
         <p:nvSpPr>
-          <p:cNvPr id="4" name="Text 1"/>
+          <p:cNvPr id="7" name="Text 4"/>
           <p:cNvSpPr/>
           <p:nvPr/>
         </p:nvSpPr>
         <p:spPr>
           <a:xfrm>
-            <a:off x="5349240" y="1005840"/>
-            <a:ext cx="6522415" cy="731520"/>
+            <a:off x="6537960" y="6089904"/>
+            <a:ext cx="5470855" cy="347472"/>
           </a:xfrm>
           <a:prstGeom prst="rect">
             <a:avLst/>
@@ -18915,68 +19854,24 @@
           <a:ln/>
         </p:spPr>
         <p:txBody>
-          <a:bodyPr wrap="square" lIns="0" tIns="0" rIns="0" bIns="0" rtlCol="0" anchor="ctr">
-            <a:normAutofit/>
-          </a:bodyPr>
+          <a:bodyPr wrap="square" lIns="0" tIns="0" rIns="0" bIns="0" rtlCol="0" anchor="ctr"/>
           <a:lstStyle/>
           <a:p>
             <a:pPr algn="ctr" indent="0" marL="0">
               <a:buNone/>
             </a:pPr>
             <a:r>
-              <a:rPr lang="en-US" sz="3600" b="1" dirty="0">
-                <a:solidFill>
-                  <a:srgbClr val="990011"/>
+              <a:rPr lang="en-US" sz="1600" i="1" dirty="0">
+                <a:solidFill>
+                  <a:srgbClr val="555555"/>
                 </a:solidFill>
                 <a:latin typeface="Times New Roman" pitchFamily="34" charset="0"/>
                 <a:ea typeface="Times New Roman" pitchFamily="34" charset="-122"/>
                 <a:cs typeface="Times New Roman" pitchFamily="34" charset="-120"/>
               </a:rPr>
-              <a:t>Evaluation 2</a:t>
-            </a:r>
-            <a:endParaRPr lang="en-US" sz="3600" dirty="0"/>
-          </a:p>
-        </p:txBody>
-      </p:sp>
-      <p:sp>
-        <p:nvSpPr>
-          <p:cNvPr id="5" name="Text 2"/>
-          <p:cNvSpPr/>
-          <p:nvPr/>
-        </p:nvSpPr>
-        <p:spPr>
-          <a:xfrm>
-            <a:off x="5349240" y="1783080"/>
-            <a:ext cx="6522415" cy="4663440"/>
-          </a:xfrm>
-          <a:prstGeom prst="rect">
-            <a:avLst/>
-          </a:prstGeom>
-          <a:noFill/>
-          <a:ln/>
-        </p:spPr>
-        <p:txBody>
-          <a:bodyPr wrap="square" lIns="0" tIns="0" rIns="0" bIns="0" rtlCol="0" anchor="t"/>
-          <a:lstStyle/>
-          <a:p>
-            <a:pPr algn="l" indent="0" marL="0">
-              <a:spcAft>
-                <a:spcPts val="800"/>
-              </a:spcAft>
-              <a:buNone/>
-            </a:pPr>
-            <a:r>
-              <a:rPr lang="en-US" sz="4000" dirty="0">
-                <a:solidFill>
-                  <a:srgbClr val="111111"/>
-                </a:solidFill>
-                <a:latin typeface="Times New Roman" pitchFamily="34" charset="0"/>
-                <a:ea typeface="Times New Roman" pitchFamily="34" charset="-122"/>
-                <a:cs typeface="Times New Roman" pitchFamily="34" charset="-120"/>
-              </a:rPr>
-              <a:t>Give two reasons why Douala is wetter than Garoua.</a:t>
-            </a:r>
-            <a:endParaRPr lang="en-US" sz="4000" dirty="0"/>
+              <a:t>Illustration: rainfall of Douala and Garoua</a:t>
+            </a:r>
+            <a:endParaRPr lang="en-US" sz="1600" dirty="0"/>
           </a:p>
         </p:txBody>
       </p:sp>
@@ -19086,7 +19981,7 @@
                 <a:ea typeface="Calibri" pitchFamily="34" charset="-122"/>
                 <a:cs typeface="Calibri" pitchFamily="34" charset="-120"/>
               </a:rPr>
-              <a:t>FORMATIVE EVALUATION</a:t>
+              <a:t>BOARD SUMMARY</a:t>
             </a:r>
             <a:endParaRPr lang="en-US" sz="1400" dirty="0"/>
           </a:p>
@@ -19109,7 +20004,7 @@
         <p:spPr>
           <a:xfrm>
             <a:off x="0" y="658368"/>
-            <a:ext cx="5120640" cy="5833872"/>
+            <a:ext cx="2468880" cy="5833872"/>
           </a:xfrm>
           <a:prstGeom prst="rect">
             <a:avLst/>
@@ -19124,8 +20019,8 @@
         </p:nvSpPr>
         <p:spPr>
           <a:xfrm>
-            <a:off x="5349240" y="1005840"/>
-            <a:ext cx="6522415" cy="731520"/>
+            <a:off x="2697480" y="1005840"/>
+            <a:ext cx="9174175" cy="731520"/>
           </a:xfrm>
           <a:prstGeom prst="rect">
             <a:avLst/>
@@ -19151,7 +20046,7 @@
                 <a:ea typeface="Times New Roman" pitchFamily="34" charset="-122"/>
                 <a:cs typeface="Times New Roman" pitchFamily="34" charset="-120"/>
               </a:rPr>
-              <a:t>Expected Answer</a:t>
+              <a:t>3. Secondary (Local) Factors</a:t>
             </a:r>
             <a:endParaRPr lang="en-US" sz="3600" dirty="0"/>
           </a:p>
@@ -19165,8 +20060,47 @@
         </p:nvSpPr>
         <p:spPr>
           <a:xfrm>
-            <a:off x="5349240" y="1783080"/>
-            <a:ext cx="6522415" cy="4663440"/>
+            <a:off x="2697480" y="1737360"/>
+            <a:ext cx="9174175" cy="457200"/>
+          </a:xfrm>
+          <a:prstGeom prst="rect">
+            <a:avLst/>
+          </a:prstGeom>
+          <a:noFill/>
+          <a:ln/>
+        </p:spPr>
+        <p:txBody>
+          <a:bodyPr wrap="square" lIns="0" tIns="0" rIns="0" bIns="0" rtlCol="0" anchor="ctr"/>
+          <a:lstStyle/>
+          <a:p>
+            <a:pPr algn="l" indent="0" marL="0">
+              <a:buNone/>
+            </a:pPr>
+            <a:r>
+              <a:rPr lang="en-US" sz="3200" b="1" dirty="0">
+                <a:solidFill>
+                  <a:srgbClr val="990011"/>
+                </a:solidFill>
+                <a:latin typeface="Times New Roman" pitchFamily="34" charset="0"/>
+                <a:ea typeface="Times New Roman" pitchFamily="34" charset="-122"/>
+                <a:cs typeface="Times New Roman" pitchFamily="34" charset="-120"/>
+              </a:rPr>
+              <a:t>A) Relief, the Sea and Ocean Currents</a:t>
+            </a:r>
+            <a:endParaRPr lang="en-US" sz="3200" dirty="0"/>
+          </a:p>
+        </p:txBody>
+      </p:sp>
+      <p:sp>
+        <p:nvSpPr>
+          <p:cNvPr id="6" name="Text 3"/>
+          <p:cNvSpPr/>
+          <p:nvPr/>
+        </p:nvSpPr>
+        <p:spPr>
+          <a:xfrm>
+            <a:off x="2697480" y="2240280"/>
+            <a:ext cx="9174175" cy="4206240"/>
           </a:xfrm>
           <a:prstGeom prst="rect">
             <a:avLst/>
@@ -19185,7 +20119,7 @@
               <a:buNone/>
             </a:pPr>
             <a:r>
-              <a:rPr lang="en-US" sz="4000" dirty="0">
+              <a:rPr lang="en-US" sz="4000" b="1" dirty="0">
                 <a:solidFill>
                   <a:srgbClr val="111111"/>
                 </a:solidFill>
@@ -19193,7 +20127,24 @@
                 <a:ea typeface="Times New Roman" pitchFamily="34" charset="-122"/>
                 <a:cs typeface="Times New Roman" pitchFamily="34" charset="-120"/>
               </a:rPr>
-              <a:t>It is on the coast near moist monsoon air; Mount Cameroon forces the air to rise (relief rain).</a:t>
+              <a:t>Ocean currents: </a:t>
+            </a:r>
+            <a:pPr algn="l" indent="0" marL="0">
+              <a:spcAft>
+                <a:spcPts val="800"/>
+              </a:spcAft>
+              <a:buNone/>
+            </a:pPr>
+            <a:r>
+              <a:rPr lang="en-US" sz="4000" dirty="0">
+                <a:solidFill>
+                  <a:srgbClr val="111111"/>
+                </a:solidFill>
+                <a:latin typeface="Times New Roman" pitchFamily="34" charset="0"/>
+                <a:ea typeface="Times New Roman" pitchFamily="34" charset="-122"/>
+                <a:cs typeface="Times New Roman" pitchFamily="34" charset="-120"/>
+              </a:rPr>
+              <a:t>Warm currents warm the air above them, which picks up moisture and brings rain to the coast. Cold currents cool the air, which becomes stable, so coasts along them are dry, like the Namib and Atacama deserts.</a:t>
             </a:r>
             <a:endParaRPr lang="en-US" sz="4000" dirty="0"/>
           </a:p>
@@ -19305,15 +20256,176 @@
                 <a:ea typeface="Calibri" pitchFamily="34" charset="-122"/>
                 <a:cs typeface="Calibri" pitchFamily="34" charset="-120"/>
               </a:rPr>
-              <a:t>REMEDIATION</a:t>
+              <a:t>BOARD SUMMARY</a:t>
             </a:r>
             <a:endParaRPr lang="en-US" sz="1400" dirty="0"/>
+          </a:p>
+        </p:txBody>
+      </p:sp>
+      <p:sp>
+        <p:nvSpPr>
+          <p:cNvPr id="3" name="Text 1"/>
+          <p:cNvSpPr/>
+          <p:nvPr/>
+        </p:nvSpPr>
+        <p:spPr>
+          <a:xfrm>
+            <a:off x="365760" y="1005840"/>
+            <a:ext cx="11460175" cy="731520"/>
+          </a:xfrm>
+          <a:prstGeom prst="rect">
+            <a:avLst/>
+          </a:prstGeom>
+          <a:noFill/>
+          <a:ln/>
+        </p:spPr>
+        <p:txBody>
+          <a:bodyPr wrap="square" lIns="0" tIns="0" rIns="0" bIns="0" rtlCol="0" anchor="ctr">
+            <a:normAutofit/>
+          </a:bodyPr>
+          <a:lstStyle/>
+          <a:p>
+            <a:pPr algn="ctr" indent="0" marL="0">
+              <a:buNone/>
+            </a:pPr>
+            <a:r>
+              <a:rPr lang="en-US" sz="3600" b="1" dirty="0">
+                <a:solidFill>
+                  <a:srgbClr val="990011"/>
+                </a:solidFill>
+                <a:latin typeface="Times New Roman" pitchFamily="34" charset="0"/>
+                <a:ea typeface="Times New Roman" pitchFamily="34" charset="-122"/>
+                <a:cs typeface="Times New Roman" pitchFamily="34" charset="-120"/>
+              </a:rPr>
+              <a:t>3. Secondary (Local) Factors</a:t>
+            </a:r>
+            <a:endParaRPr lang="en-US" sz="3600" dirty="0"/>
+          </a:p>
+        </p:txBody>
+      </p:sp>
+      <p:sp>
+        <p:nvSpPr>
+          <p:cNvPr id="4" name="Text 2"/>
+          <p:cNvSpPr/>
+          <p:nvPr/>
+        </p:nvSpPr>
+        <p:spPr>
+          <a:xfrm>
+            <a:off x="365760" y="1737360"/>
+            <a:ext cx="6035040" cy="457200"/>
+          </a:xfrm>
+          <a:prstGeom prst="rect">
+            <a:avLst/>
+          </a:prstGeom>
+          <a:noFill/>
+          <a:ln/>
+        </p:spPr>
+        <p:txBody>
+          <a:bodyPr wrap="square" lIns="0" tIns="0" rIns="0" bIns="0" rtlCol="0" anchor="ctr">
+            <a:normAutofit/>
+          </a:bodyPr>
+          <a:lstStyle/>
+          <a:p>
+            <a:pPr algn="l" indent="0" marL="0">
+              <a:buNone/>
+            </a:pPr>
+            <a:r>
+              <a:rPr lang="en-US" sz="3000" b="1" dirty="0">
+                <a:solidFill>
+                  <a:srgbClr val="990011"/>
+                </a:solidFill>
+                <a:latin typeface="Times New Roman" pitchFamily="34" charset="0"/>
+                <a:ea typeface="Times New Roman" pitchFamily="34" charset="-122"/>
+                <a:cs typeface="Times New Roman" pitchFamily="34" charset="-120"/>
+              </a:rPr>
+              <a:t>B) Vegetation, Water Bodies and Towns</a:t>
+            </a:r>
+            <a:endParaRPr lang="en-US" sz="3000" dirty="0"/>
+          </a:p>
+        </p:txBody>
+      </p:sp>
+      <p:sp>
+        <p:nvSpPr>
+          <p:cNvPr id="5" name="Text 3"/>
+          <p:cNvSpPr/>
+          <p:nvPr/>
+        </p:nvSpPr>
+        <p:spPr>
+          <a:xfrm>
+            <a:off x="365760" y="2240280"/>
+            <a:ext cx="6035040" cy="4160520"/>
+          </a:xfrm>
+          <a:prstGeom prst="rect">
+            <a:avLst/>
+          </a:prstGeom>
+          <a:noFill/>
+          <a:ln/>
+        </p:spPr>
+        <p:txBody>
+          <a:bodyPr wrap="square" lIns="0" tIns="0" rIns="0" bIns="0" rtlCol="0" anchor="t"/>
+          <a:lstStyle/>
+          <a:p>
+            <a:pPr algn="l" indent="0" marL="0">
+              <a:spcAft>
+                <a:spcPts val="800"/>
+              </a:spcAft>
+              <a:buNone/>
+            </a:pPr>
+            <a:r>
+              <a:rPr lang="en-US" sz="3200" i="1" dirty="0">
+                <a:solidFill>
+                  <a:srgbClr val="111111"/>
+                </a:solidFill>
+                <a:latin typeface="Times New Roman" pitchFamily="34" charset="0"/>
+                <a:ea typeface="Times New Roman" pitchFamily="34" charset="-122"/>
+                <a:cs typeface="Times New Roman" pitchFamily="34" charset="-120"/>
+              </a:rPr>
+              <a:t>Local rainfall is also influenced by the following factors:</a:t>
+            </a:r>
+            <a:endParaRPr lang="en-US" sz="3200" dirty="0"/>
+          </a:p>
+          <a:p>
+            <a:pPr algn="l" indent="0" marL="0">
+              <a:spcAft>
+                <a:spcPts val="800"/>
+              </a:spcAft>
+              <a:buNone/>
+            </a:pPr>
+            <a:r>
+              <a:rPr lang="en-US" sz="3200" b="1" dirty="0">
+                <a:solidFill>
+                  <a:srgbClr val="111111"/>
+                </a:solidFill>
+                <a:latin typeface="Times New Roman" pitchFamily="34" charset="0"/>
+                <a:ea typeface="Times New Roman" pitchFamily="34" charset="-122"/>
+                <a:cs typeface="Times New Roman" pitchFamily="34" charset="-120"/>
+              </a:rPr>
+              <a:t>Vegetation: </a:t>
+            </a:r>
+            <a:pPr algn="l" indent="0" marL="0">
+              <a:spcAft>
+                <a:spcPts val="800"/>
+              </a:spcAft>
+              <a:buNone/>
+            </a:pPr>
+            <a:r>
+              <a:rPr lang="en-US" sz="3200" dirty="0">
+                <a:solidFill>
+                  <a:srgbClr val="111111"/>
+                </a:solidFill>
+                <a:latin typeface="Times New Roman" pitchFamily="34" charset="0"/>
+                <a:ea typeface="Times New Roman" pitchFamily="34" charset="-122"/>
+                <a:cs typeface="Times New Roman" pitchFamily="34" charset="-120"/>
+              </a:rPr>
+              <a:t>Forests release a lot of water vapour by transpiration, which feeds the clouds and encourages convectional rain. Deforestation therefore tends to reduce local rainfall.</a:t>
+            </a:r>
+            <a:endParaRPr lang="en-US" sz="3200" dirty="0"/>
           </a:p>
         </p:txBody>
       </p:sp>
       <p:pic>
         <p:nvPicPr>
-          <p:cNvPr id="3" name="Image 0" descr="/home/claude/f4/img/minesec_sheet.png">    </p:cNvPr>
+          <p:cNvPr id="6" name="Image 0" descr="/home/claude/f4/img/v2/f2t_rainforest.jpg">    </p:cNvPr>
           <p:cNvPicPr>
             <a:picLocks noChangeAspect="1"/>
           </p:cNvPicPr>
@@ -19327,8 +20439,8 @@
         </p:blipFill>
         <p:spPr>
           <a:xfrm>
-            <a:off x="0" y="658368"/>
-            <a:ext cx="5120640" cy="5833872"/>
+            <a:off x="6537960" y="2400897"/>
+            <a:ext cx="5470855" cy="3034615"/>
           </a:xfrm>
           <a:prstGeom prst="rect">
             <a:avLst/>
@@ -19337,14 +20449,14 @@
       </p:pic>
       <p:sp>
         <p:nvSpPr>
-          <p:cNvPr id="4" name="Text 1"/>
+          <p:cNvPr id="7" name="Text 4"/>
           <p:cNvSpPr/>
           <p:nvPr/>
         </p:nvSpPr>
         <p:spPr>
           <a:xfrm>
-            <a:off x="5349240" y="1005840"/>
-            <a:ext cx="6522415" cy="731520"/>
+            <a:off x="6537960" y="6089904"/>
+            <a:ext cx="5470855" cy="347472"/>
           </a:xfrm>
           <a:prstGeom prst="rect">
             <a:avLst/>
@@ -19353,112 +20465,24 @@
           <a:ln/>
         </p:spPr>
         <p:txBody>
-          <a:bodyPr wrap="square" lIns="0" tIns="0" rIns="0" bIns="0" rtlCol="0" anchor="ctr">
-            <a:normAutofit/>
-          </a:bodyPr>
+          <a:bodyPr wrap="square" lIns="0" tIns="0" rIns="0" bIns="0" rtlCol="0" anchor="ctr"/>
           <a:lstStyle/>
           <a:p>
             <a:pPr algn="ctr" indent="0" marL="0">
               <a:buNone/>
             </a:pPr>
             <a:r>
-              <a:rPr lang="en-US" sz="3600" b="1" dirty="0">
-                <a:solidFill>
-                  <a:srgbClr val="990011"/>
+              <a:rPr lang="en-US" sz="1600" i="1" dirty="0">
+                <a:solidFill>
+                  <a:srgbClr val="555555"/>
                 </a:solidFill>
                 <a:latin typeface="Times New Roman" pitchFamily="34" charset="0"/>
                 <a:ea typeface="Times New Roman" pitchFamily="34" charset="-122"/>
                 <a:cs typeface="Times New Roman" pitchFamily="34" charset="-120"/>
               </a:rPr>
-              <a:t>Remediation</a:t>
-            </a:r>
-            <a:endParaRPr lang="en-US" sz="3600" dirty="0"/>
-          </a:p>
-        </p:txBody>
-      </p:sp>
-      <p:sp>
-        <p:nvSpPr>
-          <p:cNvPr id="5" name="Text 2"/>
-          <p:cNvSpPr/>
-          <p:nvPr/>
-        </p:nvSpPr>
-        <p:spPr>
-          <a:xfrm>
-            <a:off x="5349240" y="1783080"/>
-            <a:ext cx="6522415" cy="4663440"/>
-          </a:xfrm>
-          <a:prstGeom prst="rect">
-            <a:avLst/>
-          </a:prstGeom>
-          <a:noFill/>
-          <a:ln/>
-        </p:spPr>
-        <p:txBody>
-          <a:bodyPr wrap="square" lIns="0" tIns="0" rIns="0" bIns="0" rtlCol="0" anchor="t"/>
-          <a:lstStyle/>
-          <a:p>
-            <a:pPr algn="l" indent="0" marL="0">
-              <a:spcAft>
-                <a:spcPts val="800"/>
-              </a:spcAft>
-              <a:buNone/>
-            </a:pPr>
-            <a:r>
-              <a:rPr lang="en-US" sz="4000" b="1" dirty="0">
-                <a:solidFill>
-                  <a:srgbClr val="111111"/>
-                </a:solidFill>
-                <a:latin typeface="Times New Roman" pitchFamily="34" charset="0"/>
-                <a:ea typeface="Times New Roman" pitchFamily="34" charset="-122"/>
-                <a:cs typeface="Times New Roman" pitchFamily="34" charset="-120"/>
-              </a:rPr>
-              <a:t>Fill in the blanks:</a:t>
-            </a:r>
-            <a:endParaRPr lang="en-US" sz="4000" dirty="0"/>
-          </a:p>
-          <a:p>
-            <a:pPr algn="l" marL="342900" indent="-342900">
-              <a:spcAft>
-                <a:spcPts val="800"/>
-              </a:spcAft>
-              <a:buSzPct val="100000"/>
-              <a:buFont typeface="+mj-lt"/>
-              <a:buAutoNum type="arabicPeriod" startAt="1"/>
-            </a:pPr>
-            <a:r>
-              <a:rPr lang="en-US" sz="4000" dirty="0">
-                <a:solidFill>
-                  <a:srgbClr val="111111"/>
-                </a:solidFill>
-                <a:latin typeface="Times New Roman" pitchFamily="34" charset="0"/>
-                <a:ea typeface="Times New Roman" pitchFamily="34" charset="-122"/>
-                <a:cs typeface="Times New Roman" pitchFamily="34" charset="-120"/>
-              </a:rPr>
-              <a:t>The equatorial low-pressure zone is the ______.</a:t>
-            </a:r>
-            <a:endParaRPr lang="en-US" sz="4000" dirty="0"/>
-          </a:p>
-          <a:p>
-            <a:pPr algn="l" marL="342900" indent="-342900">
-              <a:spcAft>
-                <a:spcPts val="800"/>
-              </a:spcAft>
-              <a:buSzPct val="100000"/>
-              <a:buFont typeface="+mj-lt"/>
-              <a:buAutoNum type="arabicPeriod" startAt="1"/>
-            </a:pPr>
-            <a:r>
-              <a:rPr lang="en-US" sz="4000" dirty="0">
-                <a:solidFill>
-                  <a:srgbClr val="111111"/>
-                </a:solidFill>
-                <a:latin typeface="Times New Roman" pitchFamily="34" charset="0"/>
-                <a:ea typeface="Times New Roman" pitchFamily="34" charset="-122"/>
-                <a:cs typeface="Times New Roman" pitchFamily="34" charset="-120"/>
-              </a:rPr>
-              <a:t>Deserts lie under the subtropical ______ pressure belts.</a:t>
-            </a:r>
-            <a:endParaRPr lang="en-US" sz="4000" dirty="0"/>
+              <a:t>Illustration: a rainforest</a:t>
+            </a:r>
+            <a:endParaRPr lang="en-US" sz="1600" dirty="0"/>
           </a:p>
         </p:txBody>
       </p:sp>
@@ -19568,15 +20592,156 @@
                 <a:ea typeface="Calibri" pitchFamily="34" charset="-122"/>
                 <a:cs typeface="Calibri" pitchFamily="34" charset="-120"/>
               </a:rPr>
-              <a:t>REMEDIATION</a:t>
+              <a:t>BOARD SUMMARY</a:t>
             </a:r>
             <a:endParaRPr lang="en-US" sz="1400" dirty="0"/>
+          </a:p>
+        </p:txBody>
+      </p:sp>
+      <p:sp>
+        <p:nvSpPr>
+          <p:cNvPr id="3" name="Text 1"/>
+          <p:cNvSpPr/>
+          <p:nvPr/>
+        </p:nvSpPr>
+        <p:spPr>
+          <a:xfrm>
+            <a:off x="365760" y="1005840"/>
+            <a:ext cx="11460175" cy="731520"/>
+          </a:xfrm>
+          <a:prstGeom prst="rect">
+            <a:avLst/>
+          </a:prstGeom>
+          <a:noFill/>
+          <a:ln/>
+        </p:spPr>
+        <p:txBody>
+          <a:bodyPr wrap="square" lIns="0" tIns="0" rIns="0" bIns="0" rtlCol="0" anchor="ctr">
+            <a:normAutofit/>
+          </a:bodyPr>
+          <a:lstStyle/>
+          <a:p>
+            <a:pPr algn="ctr" indent="0" marL="0">
+              <a:buNone/>
+            </a:pPr>
+            <a:r>
+              <a:rPr lang="en-US" sz="3600" b="1" dirty="0">
+                <a:solidFill>
+                  <a:srgbClr val="990011"/>
+                </a:solidFill>
+                <a:latin typeface="Times New Roman" pitchFamily="34" charset="0"/>
+                <a:ea typeface="Times New Roman" pitchFamily="34" charset="-122"/>
+                <a:cs typeface="Times New Roman" pitchFamily="34" charset="-120"/>
+              </a:rPr>
+              <a:t>3. Secondary (Local) Factors</a:t>
+            </a:r>
+            <a:endParaRPr lang="en-US" sz="3600" dirty="0"/>
+          </a:p>
+        </p:txBody>
+      </p:sp>
+      <p:sp>
+        <p:nvSpPr>
+          <p:cNvPr id="4" name="Text 2"/>
+          <p:cNvSpPr/>
+          <p:nvPr/>
+        </p:nvSpPr>
+        <p:spPr>
+          <a:xfrm>
+            <a:off x="365760" y="1737360"/>
+            <a:ext cx="6035040" cy="457200"/>
+          </a:xfrm>
+          <a:prstGeom prst="rect">
+            <a:avLst/>
+          </a:prstGeom>
+          <a:noFill/>
+          <a:ln/>
+        </p:spPr>
+        <p:txBody>
+          <a:bodyPr wrap="square" lIns="0" tIns="0" rIns="0" bIns="0" rtlCol="0" anchor="ctr">
+            <a:normAutofit/>
+          </a:bodyPr>
+          <a:lstStyle/>
+          <a:p>
+            <a:pPr algn="l" indent="0" marL="0">
+              <a:buNone/>
+            </a:pPr>
+            <a:r>
+              <a:rPr lang="en-US" sz="3000" b="1" dirty="0">
+                <a:solidFill>
+                  <a:srgbClr val="990011"/>
+                </a:solidFill>
+                <a:latin typeface="Times New Roman" pitchFamily="34" charset="0"/>
+                <a:ea typeface="Times New Roman" pitchFamily="34" charset="-122"/>
+                <a:cs typeface="Times New Roman" pitchFamily="34" charset="-120"/>
+              </a:rPr>
+              <a:t>B) Vegetation, Water Bodies and Towns</a:t>
+            </a:r>
+            <a:endParaRPr lang="en-US" sz="3000" dirty="0"/>
+          </a:p>
+        </p:txBody>
+      </p:sp>
+      <p:sp>
+        <p:nvSpPr>
+          <p:cNvPr id="5" name="Text 3"/>
+          <p:cNvSpPr/>
+          <p:nvPr/>
+        </p:nvSpPr>
+        <p:spPr>
+          <a:xfrm>
+            <a:off x="365760" y="2240280"/>
+            <a:ext cx="6035040" cy="4160520"/>
+          </a:xfrm>
+          <a:prstGeom prst="rect">
+            <a:avLst/>
+          </a:prstGeom>
+          <a:noFill/>
+          <a:ln/>
+        </p:spPr>
+        <p:txBody>
+          <a:bodyPr wrap="square" lIns="0" tIns="0" rIns="0" bIns="0" rtlCol="0" anchor="t"/>
+          <a:lstStyle/>
+          <a:p>
+            <a:pPr algn="l" indent="0" marL="0">
+              <a:spcAft>
+                <a:spcPts val="800"/>
+              </a:spcAft>
+              <a:buNone/>
+            </a:pPr>
+            <a:r>
+              <a:rPr lang="en-US" sz="3200" b="1" dirty="0">
+                <a:solidFill>
+                  <a:srgbClr val="111111"/>
+                </a:solidFill>
+                <a:latin typeface="Times New Roman" pitchFamily="34" charset="0"/>
+                <a:ea typeface="Times New Roman" pitchFamily="34" charset="-122"/>
+                <a:cs typeface="Times New Roman" pitchFamily="34" charset="-120"/>
+              </a:rPr>
+              <a:t>Water bodies: </a:t>
+            </a:r>
+            <a:pPr algn="l" indent="0" marL="0">
+              <a:spcAft>
+                <a:spcPts val="800"/>
+              </a:spcAft>
+              <a:buNone/>
+            </a:pPr>
+            <a:r>
+              <a:rPr lang="en-US" sz="3200" dirty="0">
+                <a:solidFill>
+                  <a:srgbClr val="111111"/>
+                </a:solidFill>
+                <a:latin typeface="Times New Roman" pitchFamily="34" charset="0"/>
+                <a:ea typeface="Times New Roman" pitchFamily="34" charset="-122"/>
+                <a:cs typeface="Times New Roman" pitchFamily="34" charset="-120"/>
+              </a:rPr>
+              <a:t>Large lakes and reservoirs, such as Lake Chad and Lake Lagdo, add water vapour to the air by evaporation. They can increase rainfall on their shores, especially on the side where the winds blow.</a:t>
+            </a:r>
+            <a:endParaRPr lang="en-US" sz="3200" dirty="0"/>
           </a:p>
         </p:txBody>
       </p:sp>
       <p:pic>
         <p:nvPicPr>
-          <p:cNvPr id="3" name="Image 0" descr="/home/claude/f4/img/minesec_sheet.png">    </p:cNvPr>
+          <p:cNvPr id="6" name="Image 0" descr="/home/claude/f4/img/v2/f2t_lake_chad.jpg">    </p:cNvPr>
           <p:cNvPicPr>
             <a:picLocks noChangeAspect="1"/>
           </p:cNvPicPr>
@@ -19590,8 +20755,8 @@
         </p:blipFill>
         <p:spPr>
           <a:xfrm>
-            <a:off x="0" y="658368"/>
-            <a:ext cx="5120640" cy="5833872"/>
+            <a:off x="6537960" y="2400897"/>
+            <a:ext cx="5470855" cy="3034615"/>
           </a:xfrm>
           <a:prstGeom prst="rect">
             <a:avLst/>
@@ -19600,14 +20765,14 @@
       </p:pic>
       <p:sp>
         <p:nvSpPr>
-          <p:cNvPr id="4" name="Text 1"/>
+          <p:cNvPr id="7" name="Text 4"/>
           <p:cNvSpPr/>
           <p:nvPr/>
         </p:nvSpPr>
         <p:spPr>
           <a:xfrm>
-            <a:off x="5349240" y="1005840"/>
-            <a:ext cx="6522415" cy="731520"/>
+            <a:off x="6537960" y="6089904"/>
+            <a:ext cx="5470855" cy="347472"/>
           </a:xfrm>
           <a:prstGeom prst="rect">
             <a:avLst/>
@@ -19616,70 +20781,24 @@
           <a:ln/>
         </p:spPr>
         <p:txBody>
-          <a:bodyPr wrap="square" lIns="0" tIns="0" rIns="0" bIns="0" rtlCol="0" anchor="ctr">
-            <a:normAutofit/>
-          </a:bodyPr>
+          <a:bodyPr wrap="square" lIns="0" tIns="0" rIns="0" bIns="0" rtlCol="0" anchor="ctr"/>
           <a:lstStyle/>
           <a:p>
             <a:pPr algn="ctr" indent="0" marL="0">
               <a:buNone/>
             </a:pPr>
             <a:r>
-              <a:rPr lang="en-US" sz="3600" b="1" dirty="0">
-                <a:solidFill>
-                  <a:srgbClr val="990011"/>
+              <a:rPr lang="en-US" sz="1600" i="1" dirty="0">
+                <a:solidFill>
+                  <a:srgbClr val="555555"/>
                 </a:solidFill>
                 <a:latin typeface="Times New Roman" pitchFamily="34" charset="0"/>
                 <a:ea typeface="Times New Roman" pitchFamily="34" charset="-122"/>
                 <a:cs typeface="Times New Roman" pitchFamily="34" charset="-120"/>
               </a:rPr>
-              <a:t>Remediation (continued)</a:t>
-            </a:r>
-            <a:endParaRPr lang="en-US" sz="3600" dirty="0"/>
-          </a:p>
-        </p:txBody>
-      </p:sp>
-      <p:sp>
-        <p:nvSpPr>
-          <p:cNvPr id="5" name="Text 2"/>
-          <p:cNvSpPr/>
-          <p:nvPr/>
-        </p:nvSpPr>
-        <p:spPr>
-          <a:xfrm>
-            <a:off x="5349240" y="1783080"/>
-            <a:ext cx="6522415" cy="4663440"/>
-          </a:xfrm>
-          <a:prstGeom prst="rect">
-            <a:avLst/>
-          </a:prstGeom>
-          <a:noFill/>
-          <a:ln/>
-        </p:spPr>
-        <p:txBody>
-          <a:bodyPr wrap="square" lIns="0" tIns="0" rIns="0" bIns="0" rtlCol="0" anchor="t"/>
-          <a:lstStyle/>
-          <a:p>
-            <a:pPr algn="l" marL="342900" indent="-342900">
-              <a:spcAft>
-                <a:spcPts val="800"/>
-              </a:spcAft>
-              <a:buSzPct val="100000"/>
-              <a:buFont typeface="+mj-lt"/>
-              <a:buAutoNum type="arabicPeriod" startAt="1"/>
-            </a:pPr>
-            <a:r>
-              <a:rPr lang="en-US" sz="4000" dirty="0">
-                <a:solidFill>
-                  <a:srgbClr val="111111"/>
-                </a:solidFill>
-                <a:latin typeface="Times New Roman" pitchFamily="34" charset="0"/>
-                <a:ea typeface="Times New Roman" pitchFamily="34" charset="-122"/>
-                <a:cs typeface="Times New Roman" pitchFamily="34" charset="-120"/>
-              </a:rPr>
-              <a:t>The dry side of a mountain is the rain ______.</a:t>
-            </a:r>
-            <a:endParaRPr lang="en-US" sz="4000" dirty="0"/>
+              <a:t>Illustration: Lake Chad</a:t>
+            </a:r>
+            <a:endParaRPr lang="en-US" sz="1600" dirty="0"/>
           </a:p>
         </p:txBody>
       </p:sp>
@@ -19789,7 +20908,7 @@
                 <a:ea typeface="Calibri" pitchFamily="34" charset="-122"/>
                 <a:cs typeface="Calibri" pitchFamily="34" charset="-120"/>
               </a:rPr>
-              <a:t>HOMEWORK</a:t>
+              <a:t>BOARD SUMMARY</a:t>
             </a:r>
             <a:endParaRPr lang="en-US" sz="1400" dirty="0"/>
           </a:p>
@@ -19812,7 +20931,7 @@
         <p:spPr>
           <a:xfrm>
             <a:off x="0" y="658368"/>
-            <a:ext cx="5120640" cy="5833872"/>
+            <a:ext cx="2468880" cy="5833872"/>
           </a:xfrm>
           <a:prstGeom prst="rect">
             <a:avLst/>
@@ -19827,8 +20946,8 @@
         </p:nvSpPr>
         <p:spPr>
           <a:xfrm>
-            <a:off x="5349240" y="1005840"/>
-            <a:ext cx="6522415" cy="731520"/>
+            <a:off x="2697480" y="1005840"/>
+            <a:ext cx="9174175" cy="731520"/>
           </a:xfrm>
           <a:prstGeom prst="rect">
             <a:avLst/>
@@ -19854,7 +20973,7 @@
                 <a:ea typeface="Times New Roman" pitchFamily="34" charset="-122"/>
                 <a:cs typeface="Times New Roman" pitchFamily="34" charset="-120"/>
               </a:rPr>
-              <a:t>Homework</a:t>
+              <a:t>3. Secondary (Local) Factors</a:t>
             </a:r>
             <a:endParaRPr lang="en-US" sz="3600" dirty="0"/>
           </a:p>
@@ -19868,8 +20987,47 @@
         </p:nvSpPr>
         <p:spPr>
           <a:xfrm>
-            <a:off x="5349240" y="1783080"/>
-            <a:ext cx="6522415" cy="4663440"/>
+            <a:off x="2697480" y="1737360"/>
+            <a:ext cx="9174175" cy="457200"/>
+          </a:xfrm>
+          <a:prstGeom prst="rect">
+            <a:avLst/>
+          </a:prstGeom>
+          <a:noFill/>
+          <a:ln/>
+        </p:spPr>
+        <p:txBody>
+          <a:bodyPr wrap="square" lIns="0" tIns="0" rIns="0" bIns="0" rtlCol="0" anchor="ctr"/>
+          <a:lstStyle/>
+          <a:p>
+            <a:pPr algn="l" indent="0" marL="0">
+              <a:buNone/>
+            </a:pPr>
+            <a:r>
+              <a:rPr lang="en-US" sz="3200" b="1" dirty="0">
+                <a:solidFill>
+                  <a:srgbClr val="990011"/>
+                </a:solidFill>
+                <a:latin typeface="Times New Roman" pitchFamily="34" charset="0"/>
+                <a:ea typeface="Times New Roman" pitchFamily="34" charset="-122"/>
+                <a:cs typeface="Times New Roman" pitchFamily="34" charset="-120"/>
+              </a:rPr>
+              <a:t>B) Vegetation, Water Bodies and Towns</a:t>
+            </a:r>
+            <a:endParaRPr lang="en-US" sz="3200" dirty="0"/>
+          </a:p>
+        </p:txBody>
+      </p:sp>
+      <p:sp>
+        <p:nvSpPr>
+          <p:cNvPr id="6" name="Text 3"/>
+          <p:cNvSpPr/>
+          <p:nvPr/>
+        </p:nvSpPr>
+        <p:spPr>
+          <a:xfrm>
+            <a:off x="2697480" y="2240280"/>
+            <a:ext cx="9174175" cy="4206240"/>
           </a:xfrm>
           <a:prstGeom prst="rect">
             <a:avLst/>
@@ -19888,7 +21046,7 @@
               <a:buNone/>
             </a:pPr>
             <a:r>
-              <a:rPr lang="en-US" sz="4000" dirty="0">
+              <a:rPr lang="en-US" sz="4000" b="1" dirty="0">
                 <a:solidFill>
                   <a:srgbClr val="111111"/>
                 </a:solidFill>
@@ -19896,7 +21054,24 @@
                 <a:ea typeface="Times New Roman" pitchFamily="34" charset="-122"/>
                 <a:cs typeface="Times New Roman" pitchFamily="34" charset="-120"/>
               </a:rPr>
-              <a:t>Define atmospheric pressure.</a:t>
+              <a:t>Urban effects: </a:t>
+            </a:r>
+            <a:pPr algn="l" indent="0" marL="0">
+              <a:spcAft>
+                <a:spcPts val="800"/>
+              </a:spcAft>
+              <a:buNone/>
+            </a:pPr>
+            <a:r>
+              <a:rPr lang="en-US" sz="4000" dirty="0">
+                <a:solidFill>
+                  <a:srgbClr val="111111"/>
+                </a:solidFill>
+                <a:latin typeface="Times New Roman" pitchFamily="34" charset="0"/>
+                <a:ea typeface="Times New Roman" pitchFamily="34" charset="-122"/>
+                <a:cs typeface="Times New Roman" pitchFamily="34" charset="-120"/>
+              </a:rPr>
+              <a:t>Towns are warmer than the countryside and their air contains many dust particles. The rising warm air and these condensation nuclei can increase storms and rainfall over and downwind of big cities.</a:t>
             </a:r>
             <a:endParaRPr lang="en-US" sz="4000" dirty="0"/>
           </a:p>
@@ -20008,7 +21183,7 @@
                 <a:ea typeface="Calibri" pitchFamily="34" charset="-122"/>
                 <a:cs typeface="Calibri" pitchFamily="34" charset="-120"/>
               </a:rPr>
-              <a:t>NEXT LESSON</a:t>
+              <a:t>FORMATIVE EVALUATION</a:t>
             </a:r>
             <a:endParaRPr lang="en-US" sz="1400" dirty="0"/>
           </a:p>
@@ -20073,7 +21248,7 @@
                 <a:ea typeface="Times New Roman" pitchFamily="34" charset="-122"/>
                 <a:cs typeface="Times New Roman" pitchFamily="34" charset="-120"/>
               </a:rPr>
-              <a:t>Next Lesson</a:t>
+              <a:t>Evaluation 1</a:t>
             </a:r>
             <a:endParaRPr lang="en-US" sz="3600" dirty="0"/>
           </a:p>
@@ -20097,17 +21272,17 @@
           <a:ln/>
         </p:spPr>
         <p:txBody>
-          <a:bodyPr wrap="square" lIns="0" tIns="0" rIns="0" bIns="0" rtlCol="0" anchor="ctr"/>
-          <a:lstStyle/>
-          <a:p>
-            <a:pPr algn="ctr" indent="0" marL="0">
+          <a:bodyPr wrap="square" lIns="0" tIns="0" rIns="0" bIns="0" rtlCol="0" anchor="t"/>
+          <a:lstStyle/>
+          <a:p>
+            <a:pPr algn="l" indent="0" marL="0">
               <a:spcAft>
                 <a:spcPts val="800"/>
               </a:spcAft>
               <a:buNone/>
             </a:pPr>
             <a:r>
-              <a:rPr lang="en-US" sz="4000" b="1" dirty="0">
+              <a:rPr lang="en-US" sz="4000" dirty="0">
                 <a:solidFill>
                   <a:srgbClr val="111111"/>
                 </a:solidFill>
@@ -20115,27 +21290,7 @@
                 <a:ea typeface="Times New Roman" pitchFamily="34" charset="-122"/>
                 <a:cs typeface="Times New Roman" pitchFamily="34" charset="-120"/>
               </a:rPr>
-              <a:t>Our next lesson will be on:</a:t>
-            </a:r>
-            <a:endParaRPr lang="en-US" sz="4000" dirty="0"/>
-          </a:p>
-          <a:p>
-            <a:pPr algn="ctr" indent="0" marL="0">
-              <a:spcAft>
-                <a:spcPts val="800"/>
-              </a:spcAft>
-              <a:buNone/>
-            </a:pPr>
-            <a:r>
-              <a:rPr lang="en-US" sz="4000" b="1" dirty="0">
-                <a:solidFill>
-                  <a:srgbClr val="990011"/>
-                </a:solidFill>
-                <a:latin typeface="Times New Roman" pitchFamily="34" charset="0"/>
-                <a:ea typeface="Times New Roman" pitchFamily="34" charset="-122"/>
-                <a:cs typeface="Times New Roman" pitchFamily="34" charset="-120"/>
-              </a:rPr>
-              <a:t>Lesson 13: Pressure Systems</a:t>
+              <a:t>Why does the Equator receive heavy rain all year while 30° N is very dry?</a:t>
             </a:r>
             <a:endParaRPr lang="en-US" sz="4000" dirty="0"/>
           </a:p>
@@ -20247,22 +21402,46 @@
                 <a:ea typeface="Calibri" pitchFamily="34" charset="-122"/>
                 <a:cs typeface="Calibri" pitchFamily="34" charset="-120"/>
               </a:rPr>
-              <a:t>BILINGUAL GAME</a:t>
+              <a:t>FORMATIVE EVALUATION</a:t>
             </a:r>
             <a:endParaRPr lang="en-US" sz="1400" dirty="0"/>
           </a:p>
         </p:txBody>
       </p:sp>
-      <p:sp>
-        <p:nvSpPr>
-          <p:cNvPr id="3" name="Text 1"/>
+      <p:pic>
+        <p:nvPicPr>
+          <p:cNvPr id="3" name="Image 0" descr="/home/claude/f4/img/minesec_sheet.png">    </p:cNvPr>
+          <p:cNvPicPr>
+            <a:picLocks noChangeAspect="1"/>
+          </p:cNvPicPr>
+          <p:nvPr/>
+        </p:nvPicPr>
+        <p:blipFill>
+          <a:blip r:embed="rId1"/>
+          <a:stretch>
+            <a:fillRect/>
+          </a:stretch>
+        </p:blipFill>
+        <p:spPr>
+          <a:xfrm>
+            <a:off x="0" y="658368"/>
+            <a:ext cx="5120640" cy="5833872"/>
+          </a:xfrm>
+          <a:prstGeom prst="rect">
+            <a:avLst/>
+          </a:prstGeom>
+        </p:spPr>
+      </p:pic>
+      <p:sp>
+        <p:nvSpPr>
+          <p:cNvPr id="4" name="Text 1"/>
           <p:cNvSpPr/>
           <p:nvPr/>
         </p:nvSpPr>
         <p:spPr>
           <a:xfrm>
-            <a:off x="457200" y="1005840"/>
-            <a:ext cx="11277295" cy="731520"/>
+            <a:off x="5349240" y="1005840"/>
+            <a:ext cx="6522415" cy="731520"/>
           </a:xfrm>
           <a:prstGeom prst="rect">
             <a:avLst/>
@@ -20271,7 +21450,9 @@
           <a:ln/>
         </p:spPr>
         <p:txBody>
-          <a:bodyPr wrap="square" lIns="0" tIns="0" rIns="0" bIns="0" rtlCol="0" anchor="ctr"/>
+          <a:bodyPr wrap="square" lIns="0" tIns="0" rIns="0" bIns="0" rtlCol="0" anchor="ctr">
+            <a:normAutofit/>
+          </a:bodyPr>
           <a:lstStyle/>
           <a:p>
             <a:pPr algn="ctr" indent="0" marL="0">
@@ -20286,6 +21467,1910 @@
                 <a:ea typeface="Times New Roman" pitchFamily="34" charset="-122"/>
                 <a:cs typeface="Times New Roman" pitchFamily="34" charset="-120"/>
               </a:rPr>
+              <a:t>Expected Answer</a:t>
+            </a:r>
+            <a:endParaRPr lang="en-US" sz="3600" dirty="0"/>
+          </a:p>
+        </p:txBody>
+      </p:sp>
+      <p:sp>
+        <p:nvSpPr>
+          <p:cNvPr id="5" name="Text 2"/>
+          <p:cNvSpPr/>
+          <p:nvPr/>
+        </p:nvSpPr>
+        <p:spPr>
+          <a:xfrm>
+            <a:off x="5349240" y="1783080"/>
+            <a:ext cx="6522415" cy="4663440"/>
+          </a:xfrm>
+          <a:prstGeom prst="rect">
+            <a:avLst/>
+          </a:prstGeom>
+          <a:noFill/>
+          <a:ln/>
+        </p:spPr>
+        <p:txBody>
+          <a:bodyPr wrap="square" lIns="0" tIns="0" rIns="0" bIns="0" rtlCol="0" anchor="t"/>
+          <a:lstStyle/>
+          <a:p>
+            <a:pPr algn="l" indent="0" marL="0">
+              <a:spcAft>
+                <a:spcPts val="800"/>
+              </a:spcAft>
+              <a:buNone/>
+            </a:pPr>
+            <a:r>
+              <a:rPr lang="en-US" sz="4000" dirty="0">
+                <a:solidFill>
+                  <a:srgbClr val="111111"/>
+                </a:solidFill>
+                <a:latin typeface="Times New Roman" pitchFamily="34" charset="0"/>
+                <a:ea typeface="Times New Roman" pitchFamily="34" charset="-122"/>
+                <a:cs typeface="Times New Roman" pitchFamily="34" charset="-120"/>
+              </a:rPr>
+              <a:t>At the Equator, low pressure makes air rise and form rain clouds; at 30° N, high pressure makes air sink and warm, so no clouds form.</a:t>
+            </a:r>
+            <a:endParaRPr lang="en-US" sz="4000" dirty="0"/>
+          </a:p>
+        </p:txBody>
+      </p:sp>
+      <p:sp>
+        <p:nvSpPr>
+          <p:cNvPr id="25" name="Slide Number Placeholder 0"/>
+          <p:cNvSpPr>
+            <a:spLocks noGrp="1"/>
+          </p:cNvSpPr>
+          <p:nvPr>
+            <p:ph type="sldNum" sz="quarter" idx="4294967295"/>
+          </p:nvPr>
+        </p:nvSpPr>
+        <p:spPr>
+          <a:xfrm>
+            <a:off x="27432" y="91440"/>
+            <a:ext cx="585216" cy="475488"/>
+          </a:xfrm>
+          <a:prstGeom prst="rect">
+            <a:avLst/>
+          </a:prstGeom>
+          <a:extLst>
+            <a:ext uri="{C572A759-6A51-4108-AA02-DFA0A04FC94B}">
+              <ma14:wrappingTextBoxFlag xmlns:ma14="http://schemas.microsoft.com/office/mac/drawingml/2011/main" val="0"/>
+            </a:ext>
+          </a:extLst>
+        </p:spPr>
+        <p:txBody>
+          <a:bodyPr/>
+          <a:lstStyle>
+            <a:lvl1pPr>
+              <a:defRPr sz="2000">
+                <a:solidFill>
+                  <a:srgbClr val="FFFFFF"/>
+                </a:solidFill>
+                <a:latin typeface="Calibri"/>
+                <a:ea typeface="Calibri"/>
+                <a:cs typeface="Calibri"/>
+              </a:defRPr>
+            </a:lvl1pPr>
+          </a:lstStyle>
+          <a:p>
+            <a:pPr algn="ctr"/>
+            <a:fld id="{F7021451-1387-4CA6-816F-3879F97B5CBC}" type="slidenum">
+              <a:rPr b="1" lang="en-US"/>
+              <a:t>56</a:t>
+            </a:fld>
+            <a:endParaRPr lang="en-US"/>
+          </a:p>
+        </p:txBody>
+      </p:sp>
+    </p:spTree>
+  </p:cSld>
+  <p:clrMapOvr>
+    <a:masterClrMapping/>
+  </p:clrMapOvr>
+</p:sld>
+</file>
+
+<file path=ppt/slides/slide57.xml><?xml version="1.0" encoding="utf-8"?>
+<p:sld xmlns:a="http://schemas.openxmlformats.org/drawingml/2006/main" xmlns:r="http://schemas.openxmlformats.org/officeDocument/2006/relationships" xmlns:p="http://schemas.openxmlformats.org/presentationml/2006/main">
+  <p:cSld name="Slide 57">
+    <p:spTree>
+      <p:nvGrpSpPr>
+        <p:cNvPr id="1" name=""/>
+        <p:cNvGrpSpPr/>
+        <p:nvPr/>
+      </p:nvGrpSpPr>
+      <p:grpSpPr>
+        <a:xfrm>
+          <a:off x="0" y="0"/>
+          <a:ext cx="0" cy="0"/>
+          <a:chOff x="0" y="0"/>
+          <a:chExt cx="0" cy="0"/>
+        </a:xfrm>
+      </p:grpSpPr>
+      <p:sp>
+        <p:nvSpPr>
+          <p:cNvPr id="2" name="Text 0"/>
+          <p:cNvSpPr/>
+          <p:nvPr/>
+        </p:nvSpPr>
+        <p:spPr>
+          <a:xfrm>
+            <a:off x="457200" y="713232"/>
+            <a:ext cx="11368735" cy="274320"/>
+          </a:xfrm>
+          <a:prstGeom prst="rect">
+            <a:avLst/>
+          </a:prstGeom>
+          <a:noFill/>
+          <a:ln/>
+        </p:spPr>
+        <p:txBody>
+          <a:bodyPr wrap="square" lIns="0" tIns="0" rIns="0" bIns="0" rtlCol="0" anchor="ctr"/>
+          <a:lstStyle/>
+          <a:p>
+            <a:pPr algn="r" indent="0" marL="0">
+              <a:buNone/>
+            </a:pPr>
+            <a:r>
+              <a:rPr lang="en-US" sz="1400" b="1" dirty="0">
+                <a:solidFill>
+                  <a:srgbClr val="1C3F6E"/>
+                </a:solidFill>
+                <a:latin typeface="Calibri" pitchFamily="34" charset="0"/>
+                <a:ea typeface="Calibri" pitchFamily="34" charset="-122"/>
+                <a:cs typeface="Calibri" pitchFamily="34" charset="-120"/>
+              </a:rPr>
+              <a:t>FORMATIVE EVALUATION</a:t>
+            </a:r>
+            <a:endParaRPr lang="en-US" sz="1400" dirty="0"/>
+          </a:p>
+        </p:txBody>
+      </p:sp>
+      <p:pic>
+        <p:nvPicPr>
+          <p:cNvPr id="3" name="Image 0" descr="/home/claude/f4/img/minesec_sheet.png">    </p:cNvPr>
+          <p:cNvPicPr>
+            <a:picLocks noChangeAspect="1"/>
+          </p:cNvPicPr>
+          <p:nvPr/>
+        </p:nvPicPr>
+        <p:blipFill>
+          <a:blip r:embed="rId1"/>
+          <a:stretch>
+            <a:fillRect/>
+          </a:stretch>
+        </p:blipFill>
+        <p:spPr>
+          <a:xfrm>
+            <a:off x="0" y="658368"/>
+            <a:ext cx="5120640" cy="5833872"/>
+          </a:xfrm>
+          <a:prstGeom prst="rect">
+            <a:avLst/>
+          </a:prstGeom>
+        </p:spPr>
+      </p:pic>
+      <p:sp>
+        <p:nvSpPr>
+          <p:cNvPr id="4" name="Text 1"/>
+          <p:cNvSpPr/>
+          <p:nvPr/>
+        </p:nvSpPr>
+        <p:spPr>
+          <a:xfrm>
+            <a:off x="5349240" y="1005840"/>
+            <a:ext cx="6522415" cy="731520"/>
+          </a:xfrm>
+          <a:prstGeom prst="rect">
+            <a:avLst/>
+          </a:prstGeom>
+          <a:noFill/>
+          <a:ln/>
+        </p:spPr>
+        <p:txBody>
+          <a:bodyPr wrap="square" lIns="0" tIns="0" rIns="0" bIns="0" rtlCol="0" anchor="ctr">
+            <a:normAutofit/>
+          </a:bodyPr>
+          <a:lstStyle/>
+          <a:p>
+            <a:pPr algn="ctr" indent="0" marL="0">
+              <a:buNone/>
+            </a:pPr>
+            <a:r>
+              <a:rPr lang="en-US" sz="3600" b="1" dirty="0">
+                <a:solidFill>
+                  <a:srgbClr val="990011"/>
+                </a:solidFill>
+                <a:latin typeface="Times New Roman" pitchFamily="34" charset="0"/>
+                <a:ea typeface="Times New Roman" pitchFamily="34" charset="-122"/>
+                <a:cs typeface="Times New Roman" pitchFamily="34" charset="-120"/>
+              </a:rPr>
+              <a:t>Evaluation 2</a:t>
+            </a:r>
+            <a:endParaRPr lang="en-US" sz="3600" dirty="0"/>
+          </a:p>
+        </p:txBody>
+      </p:sp>
+      <p:sp>
+        <p:nvSpPr>
+          <p:cNvPr id="5" name="Text 2"/>
+          <p:cNvSpPr/>
+          <p:nvPr/>
+        </p:nvSpPr>
+        <p:spPr>
+          <a:xfrm>
+            <a:off x="5349240" y="1783080"/>
+            <a:ext cx="6522415" cy="4663440"/>
+          </a:xfrm>
+          <a:prstGeom prst="rect">
+            <a:avLst/>
+          </a:prstGeom>
+          <a:noFill/>
+          <a:ln/>
+        </p:spPr>
+        <p:txBody>
+          <a:bodyPr wrap="square" lIns="0" tIns="0" rIns="0" bIns="0" rtlCol="0" anchor="t"/>
+          <a:lstStyle/>
+          <a:p>
+            <a:pPr algn="l" indent="0" marL="0">
+              <a:spcAft>
+                <a:spcPts val="800"/>
+              </a:spcAft>
+              <a:buNone/>
+            </a:pPr>
+            <a:r>
+              <a:rPr lang="en-US" sz="4000" dirty="0">
+                <a:solidFill>
+                  <a:srgbClr val="111111"/>
+                </a:solidFill>
+                <a:latin typeface="Times New Roman" pitchFamily="34" charset="0"/>
+                <a:ea typeface="Times New Roman" pitchFamily="34" charset="-122"/>
+                <a:cs typeface="Times New Roman" pitchFamily="34" charset="-120"/>
+              </a:rPr>
+              <a:t>Give two reasons why Douala is wetter than Garoua.</a:t>
+            </a:r>
+            <a:endParaRPr lang="en-US" sz="4000" dirty="0"/>
+          </a:p>
+        </p:txBody>
+      </p:sp>
+      <p:sp>
+        <p:nvSpPr>
+          <p:cNvPr id="25" name="Slide Number Placeholder 0"/>
+          <p:cNvSpPr>
+            <a:spLocks noGrp="1"/>
+          </p:cNvSpPr>
+          <p:nvPr>
+            <p:ph type="sldNum" sz="quarter" idx="4294967295"/>
+          </p:nvPr>
+        </p:nvSpPr>
+        <p:spPr>
+          <a:xfrm>
+            <a:off x="27432" y="91440"/>
+            <a:ext cx="585216" cy="475488"/>
+          </a:xfrm>
+          <a:prstGeom prst="rect">
+            <a:avLst/>
+          </a:prstGeom>
+          <a:extLst>
+            <a:ext uri="{C572A759-6A51-4108-AA02-DFA0A04FC94B}">
+              <ma14:wrappingTextBoxFlag xmlns:ma14="http://schemas.microsoft.com/office/mac/drawingml/2011/main" val="0"/>
+            </a:ext>
+          </a:extLst>
+        </p:spPr>
+        <p:txBody>
+          <a:bodyPr/>
+          <a:lstStyle>
+            <a:lvl1pPr>
+              <a:defRPr sz="2000">
+                <a:solidFill>
+                  <a:srgbClr val="FFFFFF"/>
+                </a:solidFill>
+                <a:latin typeface="Calibri"/>
+                <a:ea typeface="Calibri"/>
+                <a:cs typeface="Calibri"/>
+              </a:defRPr>
+            </a:lvl1pPr>
+          </a:lstStyle>
+          <a:p>
+            <a:pPr algn="ctr"/>
+            <a:fld id="{F7021451-1387-4CA6-816F-3879F97B5CBC}" type="slidenum">
+              <a:rPr b="1" lang="en-US"/>
+              <a:t>57</a:t>
+            </a:fld>
+            <a:endParaRPr lang="en-US"/>
+          </a:p>
+        </p:txBody>
+      </p:sp>
+    </p:spTree>
+  </p:cSld>
+  <p:clrMapOvr>
+    <a:masterClrMapping/>
+  </p:clrMapOvr>
+</p:sld>
+</file>
+
+<file path=ppt/slides/slide58.xml><?xml version="1.0" encoding="utf-8"?>
+<p:sld xmlns:a="http://schemas.openxmlformats.org/drawingml/2006/main" xmlns:r="http://schemas.openxmlformats.org/officeDocument/2006/relationships" xmlns:p="http://schemas.openxmlformats.org/presentationml/2006/main">
+  <p:cSld name="Slide 58">
+    <p:spTree>
+      <p:nvGrpSpPr>
+        <p:cNvPr id="1" name=""/>
+        <p:cNvGrpSpPr/>
+        <p:nvPr/>
+      </p:nvGrpSpPr>
+      <p:grpSpPr>
+        <a:xfrm>
+          <a:off x="0" y="0"/>
+          <a:ext cx="0" cy="0"/>
+          <a:chOff x="0" y="0"/>
+          <a:chExt cx="0" cy="0"/>
+        </a:xfrm>
+      </p:grpSpPr>
+      <p:sp>
+        <p:nvSpPr>
+          <p:cNvPr id="2" name="Text 0"/>
+          <p:cNvSpPr/>
+          <p:nvPr/>
+        </p:nvSpPr>
+        <p:spPr>
+          <a:xfrm>
+            <a:off x="457200" y="713232"/>
+            <a:ext cx="11368735" cy="274320"/>
+          </a:xfrm>
+          <a:prstGeom prst="rect">
+            <a:avLst/>
+          </a:prstGeom>
+          <a:noFill/>
+          <a:ln/>
+        </p:spPr>
+        <p:txBody>
+          <a:bodyPr wrap="square" lIns="0" tIns="0" rIns="0" bIns="0" rtlCol="0" anchor="ctr"/>
+          <a:lstStyle/>
+          <a:p>
+            <a:pPr algn="r" indent="0" marL="0">
+              <a:buNone/>
+            </a:pPr>
+            <a:r>
+              <a:rPr lang="en-US" sz="1400" b="1" dirty="0">
+                <a:solidFill>
+                  <a:srgbClr val="1C3F6E"/>
+                </a:solidFill>
+                <a:latin typeface="Calibri" pitchFamily="34" charset="0"/>
+                <a:ea typeface="Calibri" pitchFamily="34" charset="-122"/>
+                <a:cs typeface="Calibri" pitchFamily="34" charset="-120"/>
+              </a:rPr>
+              <a:t>FORMATIVE EVALUATION</a:t>
+            </a:r>
+            <a:endParaRPr lang="en-US" sz="1400" dirty="0"/>
+          </a:p>
+        </p:txBody>
+      </p:sp>
+      <p:pic>
+        <p:nvPicPr>
+          <p:cNvPr id="3" name="Image 0" descr="/home/claude/f4/img/minesec_sheet.png">    </p:cNvPr>
+          <p:cNvPicPr>
+            <a:picLocks noChangeAspect="1"/>
+          </p:cNvPicPr>
+          <p:nvPr/>
+        </p:nvPicPr>
+        <p:blipFill>
+          <a:blip r:embed="rId1"/>
+          <a:stretch>
+            <a:fillRect/>
+          </a:stretch>
+        </p:blipFill>
+        <p:spPr>
+          <a:xfrm>
+            <a:off x="0" y="658368"/>
+            <a:ext cx="5120640" cy="5833872"/>
+          </a:xfrm>
+          <a:prstGeom prst="rect">
+            <a:avLst/>
+          </a:prstGeom>
+        </p:spPr>
+      </p:pic>
+      <p:sp>
+        <p:nvSpPr>
+          <p:cNvPr id="4" name="Text 1"/>
+          <p:cNvSpPr/>
+          <p:nvPr/>
+        </p:nvSpPr>
+        <p:spPr>
+          <a:xfrm>
+            <a:off x="5349240" y="1005840"/>
+            <a:ext cx="6522415" cy="731520"/>
+          </a:xfrm>
+          <a:prstGeom prst="rect">
+            <a:avLst/>
+          </a:prstGeom>
+          <a:noFill/>
+          <a:ln/>
+        </p:spPr>
+        <p:txBody>
+          <a:bodyPr wrap="square" lIns="0" tIns="0" rIns="0" bIns="0" rtlCol="0" anchor="ctr">
+            <a:normAutofit/>
+          </a:bodyPr>
+          <a:lstStyle/>
+          <a:p>
+            <a:pPr algn="ctr" indent="0" marL="0">
+              <a:buNone/>
+            </a:pPr>
+            <a:r>
+              <a:rPr lang="en-US" sz="3600" b="1" dirty="0">
+                <a:solidFill>
+                  <a:srgbClr val="990011"/>
+                </a:solidFill>
+                <a:latin typeface="Times New Roman" pitchFamily="34" charset="0"/>
+                <a:ea typeface="Times New Roman" pitchFamily="34" charset="-122"/>
+                <a:cs typeface="Times New Roman" pitchFamily="34" charset="-120"/>
+              </a:rPr>
+              <a:t>Expected Answer</a:t>
+            </a:r>
+            <a:endParaRPr lang="en-US" sz="3600" dirty="0"/>
+          </a:p>
+        </p:txBody>
+      </p:sp>
+      <p:sp>
+        <p:nvSpPr>
+          <p:cNvPr id="5" name="Text 2"/>
+          <p:cNvSpPr/>
+          <p:nvPr/>
+        </p:nvSpPr>
+        <p:spPr>
+          <a:xfrm>
+            <a:off x="5349240" y="1783080"/>
+            <a:ext cx="6522415" cy="4663440"/>
+          </a:xfrm>
+          <a:prstGeom prst="rect">
+            <a:avLst/>
+          </a:prstGeom>
+          <a:noFill/>
+          <a:ln/>
+        </p:spPr>
+        <p:txBody>
+          <a:bodyPr wrap="square" lIns="0" tIns="0" rIns="0" bIns="0" rtlCol="0" anchor="t"/>
+          <a:lstStyle/>
+          <a:p>
+            <a:pPr algn="l" indent="0" marL="0">
+              <a:spcAft>
+                <a:spcPts val="800"/>
+              </a:spcAft>
+              <a:buNone/>
+            </a:pPr>
+            <a:r>
+              <a:rPr lang="en-US" sz="4000" dirty="0">
+                <a:solidFill>
+                  <a:srgbClr val="111111"/>
+                </a:solidFill>
+                <a:latin typeface="Times New Roman" pitchFamily="34" charset="0"/>
+                <a:ea typeface="Times New Roman" pitchFamily="34" charset="-122"/>
+                <a:cs typeface="Times New Roman" pitchFamily="34" charset="-120"/>
+              </a:rPr>
+              <a:t>It is on the coast near moist monsoon air; Mount Cameroon forces the air to rise (relief rain).</a:t>
+            </a:r>
+            <a:endParaRPr lang="en-US" sz="4000" dirty="0"/>
+          </a:p>
+        </p:txBody>
+      </p:sp>
+      <p:sp>
+        <p:nvSpPr>
+          <p:cNvPr id="25" name="Slide Number Placeholder 0"/>
+          <p:cNvSpPr>
+            <a:spLocks noGrp="1"/>
+          </p:cNvSpPr>
+          <p:nvPr>
+            <p:ph type="sldNum" sz="quarter" idx="4294967295"/>
+          </p:nvPr>
+        </p:nvSpPr>
+        <p:spPr>
+          <a:xfrm>
+            <a:off x="27432" y="91440"/>
+            <a:ext cx="585216" cy="475488"/>
+          </a:xfrm>
+          <a:prstGeom prst="rect">
+            <a:avLst/>
+          </a:prstGeom>
+          <a:extLst>
+            <a:ext uri="{C572A759-6A51-4108-AA02-DFA0A04FC94B}">
+              <ma14:wrappingTextBoxFlag xmlns:ma14="http://schemas.microsoft.com/office/mac/drawingml/2011/main" val="0"/>
+            </a:ext>
+          </a:extLst>
+        </p:spPr>
+        <p:txBody>
+          <a:bodyPr/>
+          <a:lstStyle>
+            <a:lvl1pPr>
+              <a:defRPr sz="2000">
+                <a:solidFill>
+                  <a:srgbClr val="FFFFFF"/>
+                </a:solidFill>
+                <a:latin typeface="Calibri"/>
+                <a:ea typeface="Calibri"/>
+                <a:cs typeface="Calibri"/>
+              </a:defRPr>
+            </a:lvl1pPr>
+          </a:lstStyle>
+          <a:p>
+            <a:pPr algn="ctr"/>
+            <a:fld id="{F7021451-1387-4CA6-816F-3879F97B5CBC}" type="slidenum">
+              <a:rPr b="1" lang="en-US"/>
+              <a:t>58</a:t>
+            </a:fld>
+            <a:endParaRPr lang="en-US"/>
+          </a:p>
+        </p:txBody>
+      </p:sp>
+    </p:spTree>
+  </p:cSld>
+  <p:clrMapOvr>
+    <a:masterClrMapping/>
+  </p:clrMapOvr>
+</p:sld>
+</file>
+
+<file path=ppt/slides/slide59.xml><?xml version="1.0" encoding="utf-8"?>
+<p:sld xmlns:a="http://schemas.openxmlformats.org/drawingml/2006/main" xmlns:r="http://schemas.openxmlformats.org/officeDocument/2006/relationships" xmlns:p="http://schemas.openxmlformats.org/presentationml/2006/main">
+  <p:cSld name="Slide 59">
+    <p:spTree>
+      <p:nvGrpSpPr>
+        <p:cNvPr id="1" name=""/>
+        <p:cNvGrpSpPr/>
+        <p:nvPr/>
+      </p:nvGrpSpPr>
+      <p:grpSpPr>
+        <a:xfrm>
+          <a:off x="0" y="0"/>
+          <a:ext cx="0" cy="0"/>
+          <a:chOff x="0" y="0"/>
+          <a:chExt cx="0" cy="0"/>
+        </a:xfrm>
+      </p:grpSpPr>
+      <p:sp>
+        <p:nvSpPr>
+          <p:cNvPr id="2" name="Text 0"/>
+          <p:cNvSpPr/>
+          <p:nvPr/>
+        </p:nvSpPr>
+        <p:spPr>
+          <a:xfrm>
+            <a:off x="457200" y="713232"/>
+            <a:ext cx="11368735" cy="274320"/>
+          </a:xfrm>
+          <a:prstGeom prst="rect">
+            <a:avLst/>
+          </a:prstGeom>
+          <a:noFill/>
+          <a:ln/>
+        </p:spPr>
+        <p:txBody>
+          <a:bodyPr wrap="square" lIns="0" tIns="0" rIns="0" bIns="0" rtlCol="0" anchor="ctr"/>
+          <a:lstStyle/>
+          <a:p>
+            <a:pPr algn="r" indent="0" marL="0">
+              <a:buNone/>
+            </a:pPr>
+            <a:r>
+              <a:rPr lang="en-US" sz="1400" b="1" dirty="0">
+                <a:solidFill>
+                  <a:srgbClr val="1C3F6E"/>
+                </a:solidFill>
+                <a:latin typeface="Calibri" pitchFamily="34" charset="0"/>
+                <a:ea typeface="Calibri" pitchFamily="34" charset="-122"/>
+                <a:cs typeface="Calibri" pitchFamily="34" charset="-120"/>
+              </a:rPr>
+              <a:t>REMEDIATION</a:t>
+            </a:r>
+            <a:endParaRPr lang="en-US" sz="1400" dirty="0"/>
+          </a:p>
+        </p:txBody>
+      </p:sp>
+      <p:pic>
+        <p:nvPicPr>
+          <p:cNvPr id="3" name="Image 0" descr="/home/claude/f4/img/minesec_sheet.png">    </p:cNvPr>
+          <p:cNvPicPr>
+            <a:picLocks noChangeAspect="1"/>
+          </p:cNvPicPr>
+          <p:nvPr/>
+        </p:nvPicPr>
+        <p:blipFill>
+          <a:blip r:embed="rId1"/>
+          <a:stretch>
+            <a:fillRect/>
+          </a:stretch>
+        </p:blipFill>
+        <p:spPr>
+          <a:xfrm>
+            <a:off x="0" y="658368"/>
+            <a:ext cx="5120640" cy="5833872"/>
+          </a:xfrm>
+          <a:prstGeom prst="rect">
+            <a:avLst/>
+          </a:prstGeom>
+        </p:spPr>
+      </p:pic>
+      <p:sp>
+        <p:nvSpPr>
+          <p:cNvPr id="4" name="Text 1"/>
+          <p:cNvSpPr/>
+          <p:nvPr/>
+        </p:nvSpPr>
+        <p:spPr>
+          <a:xfrm>
+            <a:off x="5349240" y="1005840"/>
+            <a:ext cx="6522415" cy="731520"/>
+          </a:xfrm>
+          <a:prstGeom prst="rect">
+            <a:avLst/>
+          </a:prstGeom>
+          <a:noFill/>
+          <a:ln/>
+        </p:spPr>
+        <p:txBody>
+          <a:bodyPr wrap="square" lIns="0" tIns="0" rIns="0" bIns="0" rtlCol="0" anchor="ctr">
+            <a:normAutofit/>
+          </a:bodyPr>
+          <a:lstStyle/>
+          <a:p>
+            <a:pPr algn="ctr" indent="0" marL="0">
+              <a:buNone/>
+            </a:pPr>
+            <a:r>
+              <a:rPr lang="en-US" sz="3600" b="1" dirty="0">
+                <a:solidFill>
+                  <a:srgbClr val="990011"/>
+                </a:solidFill>
+                <a:latin typeface="Times New Roman" pitchFamily="34" charset="0"/>
+                <a:ea typeface="Times New Roman" pitchFamily="34" charset="-122"/>
+                <a:cs typeface="Times New Roman" pitchFamily="34" charset="-120"/>
+              </a:rPr>
+              <a:t>Remediation</a:t>
+            </a:r>
+            <a:endParaRPr lang="en-US" sz="3600" dirty="0"/>
+          </a:p>
+        </p:txBody>
+      </p:sp>
+      <p:sp>
+        <p:nvSpPr>
+          <p:cNvPr id="5" name="Text 2"/>
+          <p:cNvSpPr/>
+          <p:nvPr/>
+        </p:nvSpPr>
+        <p:spPr>
+          <a:xfrm>
+            <a:off x="5349240" y="1783080"/>
+            <a:ext cx="6522415" cy="4663440"/>
+          </a:xfrm>
+          <a:prstGeom prst="rect">
+            <a:avLst/>
+          </a:prstGeom>
+          <a:noFill/>
+          <a:ln/>
+        </p:spPr>
+        <p:txBody>
+          <a:bodyPr wrap="square" lIns="0" tIns="0" rIns="0" bIns="0" rtlCol="0" anchor="t"/>
+          <a:lstStyle/>
+          <a:p>
+            <a:pPr algn="l" indent="0" marL="0">
+              <a:spcAft>
+                <a:spcPts val="800"/>
+              </a:spcAft>
+              <a:buNone/>
+            </a:pPr>
+            <a:r>
+              <a:rPr lang="en-US" sz="4000" b="1" dirty="0">
+                <a:solidFill>
+                  <a:srgbClr val="111111"/>
+                </a:solidFill>
+                <a:latin typeface="Times New Roman" pitchFamily="34" charset="0"/>
+                <a:ea typeface="Times New Roman" pitchFamily="34" charset="-122"/>
+                <a:cs typeface="Times New Roman" pitchFamily="34" charset="-120"/>
+              </a:rPr>
+              <a:t>Fill in the blanks:</a:t>
+            </a:r>
+            <a:endParaRPr lang="en-US" sz="4000" dirty="0"/>
+          </a:p>
+          <a:p>
+            <a:pPr algn="l" marL="342900" indent="-342900">
+              <a:spcAft>
+                <a:spcPts val="800"/>
+              </a:spcAft>
+              <a:buSzPct val="100000"/>
+              <a:buFont typeface="+mj-lt"/>
+              <a:buAutoNum type="arabicPeriod" startAt="1"/>
+            </a:pPr>
+            <a:r>
+              <a:rPr lang="en-US" sz="4000" dirty="0">
+                <a:solidFill>
+                  <a:srgbClr val="111111"/>
+                </a:solidFill>
+                <a:latin typeface="Times New Roman" pitchFamily="34" charset="0"/>
+                <a:ea typeface="Times New Roman" pitchFamily="34" charset="-122"/>
+                <a:cs typeface="Times New Roman" pitchFamily="34" charset="-120"/>
+              </a:rPr>
+              <a:t>The equatorial low-pressure zone is the ______.</a:t>
+            </a:r>
+            <a:endParaRPr lang="en-US" sz="4000" dirty="0"/>
+          </a:p>
+          <a:p>
+            <a:pPr algn="l" marL="342900" indent="-342900">
+              <a:spcAft>
+                <a:spcPts val="800"/>
+              </a:spcAft>
+              <a:buSzPct val="100000"/>
+              <a:buFont typeface="+mj-lt"/>
+              <a:buAutoNum type="arabicPeriod" startAt="1"/>
+            </a:pPr>
+            <a:r>
+              <a:rPr lang="en-US" sz="4000" dirty="0">
+                <a:solidFill>
+                  <a:srgbClr val="111111"/>
+                </a:solidFill>
+                <a:latin typeface="Times New Roman" pitchFamily="34" charset="0"/>
+                <a:ea typeface="Times New Roman" pitchFamily="34" charset="-122"/>
+                <a:cs typeface="Times New Roman" pitchFamily="34" charset="-120"/>
+              </a:rPr>
+              <a:t>Deserts lie under the subtropical ______ pressure belts.</a:t>
+            </a:r>
+            <a:endParaRPr lang="en-US" sz="4000" dirty="0"/>
+          </a:p>
+        </p:txBody>
+      </p:sp>
+      <p:sp>
+        <p:nvSpPr>
+          <p:cNvPr id="25" name="Slide Number Placeholder 0"/>
+          <p:cNvSpPr>
+            <a:spLocks noGrp="1"/>
+          </p:cNvSpPr>
+          <p:nvPr>
+            <p:ph type="sldNum" sz="quarter" idx="4294967295"/>
+          </p:nvPr>
+        </p:nvSpPr>
+        <p:spPr>
+          <a:xfrm>
+            <a:off x="27432" y="91440"/>
+            <a:ext cx="585216" cy="475488"/>
+          </a:xfrm>
+          <a:prstGeom prst="rect">
+            <a:avLst/>
+          </a:prstGeom>
+          <a:extLst>
+            <a:ext uri="{C572A759-6A51-4108-AA02-DFA0A04FC94B}">
+              <ma14:wrappingTextBoxFlag xmlns:ma14="http://schemas.microsoft.com/office/mac/drawingml/2011/main" val="0"/>
+            </a:ext>
+          </a:extLst>
+        </p:spPr>
+        <p:txBody>
+          <a:bodyPr/>
+          <a:lstStyle>
+            <a:lvl1pPr>
+              <a:defRPr sz="2000">
+                <a:solidFill>
+                  <a:srgbClr val="FFFFFF"/>
+                </a:solidFill>
+                <a:latin typeface="Calibri"/>
+                <a:ea typeface="Calibri"/>
+                <a:cs typeface="Calibri"/>
+              </a:defRPr>
+            </a:lvl1pPr>
+          </a:lstStyle>
+          <a:p>
+            <a:pPr algn="ctr"/>
+            <a:fld id="{F7021451-1387-4CA6-816F-3879F97B5CBC}" type="slidenum">
+              <a:rPr b="1" lang="en-US"/>
+              <a:t>59</a:t>
+            </a:fld>
+            <a:endParaRPr lang="en-US"/>
+          </a:p>
+        </p:txBody>
+      </p:sp>
+    </p:spTree>
+  </p:cSld>
+  <p:clrMapOvr>
+    <a:masterClrMapping/>
+  </p:clrMapOvr>
+</p:sld>
+</file>
+
+<file path=ppt/slides/slide6.xml><?xml version="1.0" encoding="utf-8"?>
+<p:sld xmlns:a="http://schemas.openxmlformats.org/drawingml/2006/main" xmlns:r="http://schemas.openxmlformats.org/officeDocument/2006/relationships" xmlns:p="http://schemas.openxmlformats.org/presentationml/2006/main">
+  <p:cSld name="Slide 6">
+    <p:spTree>
+      <p:nvGrpSpPr>
+        <p:cNvPr id="1" name=""/>
+        <p:cNvGrpSpPr/>
+        <p:nvPr/>
+      </p:nvGrpSpPr>
+      <p:grpSpPr>
+        <a:xfrm>
+          <a:off x="0" y="0"/>
+          <a:ext cx="0" cy="0"/>
+          <a:chOff x="0" y="0"/>
+          <a:chExt cx="0" cy="0"/>
+        </a:xfrm>
+      </p:grpSpPr>
+      <p:sp>
+        <p:nvSpPr>
+          <p:cNvPr id="2" name="Text 0"/>
+          <p:cNvSpPr/>
+          <p:nvPr/>
+        </p:nvSpPr>
+        <p:spPr>
+          <a:xfrm>
+            <a:off x="457200" y="713232"/>
+            <a:ext cx="11368735" cy="274320"/>
+          </a:xfrm>
+          <a:prstGeom prst="rect">
+            <a:avLst/>
+          </a:prstGeom>
+          <a:noFill/>
+          <a:ln/>
+        </p:spPr>
+        <p:txBody>
+          <a:bodyPr wrap="square" lIns="0" tIns="0" rIns="0" bIns="0" rtlCol="0" anchor="ctr"/>
+          <a:lstStyle/>
+          <a:p>
+            <a:pPr algn="r" indent="0" marL="0">
+              <a:buNone/>
+            </a:pPr>
+            <a:r>
+              <a:rPr lang="en-US" sz="1400" b="1" dirty="0">
+                <a:solidFill>
+                  <a:srgbClr val="1C3F6E"/>
+                </a:solidFill>
+                <a:latin typeface="Calibri" pitchFamily="34" charset="0"/>
+                <a:ea typeface="Calibri" pitchFamily="34" charset="-122"/>
+                <a:cs typeface="Calibri" pitchFamily="34" charset="-120"/>
+              </a:rPr>
+              <a:t>LESSON PLAN</a:t>
+            </a:r>
+            <a:endParaRPr lang="en-US" sz="1400" dirty="0"/>
+          </a:p>
+        </p:txBody>
+      </p:sp>
+      <p:pic>
+        <p:nvPicPr>
+          <p:cNvPr id="3" name="Image 0" descr="/home/claude/f4/img/minesec_sheet.png">    </p:cNvPr>
+          <p:cNvPicPr>
+            <a:picLocks noChangeAspect="1"/>
+          </p:cNvPicPr>
+          <p:nvPr/>
+        </p:nvPicPr>
+        <p:blipFill>
+          <a:blip r:embed="rId1"/>
+          <a:stretch>
+            <a:fillRect/>
+          </a:stretch>
+        </p:blipFill>
+        <p:spPr>
+          <a:xfrm>
+            <a:off x="0" y="658368"/>
+            <a:ext cx="2468880" cy="5833872"/>
+          </a:xfrm>
+          <a:prstGeom prst="rect">
+            <a:avLst/>
+          </a:prstGeom>
+        </p:spPr>
+      </p:pic>
+      <p:sp>
+        <p:nvSpPr>
+          <p:cNvPr id="4" name="Text 1"/>
+          <p:cNvSpPr/>
+          <p:nvPr/>
+        </p:nvSpPr>
+        <p:spPr>
+          <a:xfrm>
+            <a:off x="2697480" y="1005840"/>
+            <a:ext cx="9174175" cy="731520"/>
+          </a:xfrm>
+          <a:prstGeom prst="rect">
+            <a:avLst/>
+          </a:prstGeom>
+          <a:noFill/>
+          <a:ln/>
+        </p:spPr>
+        <p:txBody>
+          <a:bodyPr wrap="square" lIns="0" tIns="0" rIns="0" bIns="0" rtlCol="0" anchor="ctr">
+            <a:normAutofit/>
+          </a:bodyPr>
+          <a:lstStyle/>
+          <a:p>
+            <a:pPr algn="ctr" indent="0" marL="0">
+              <a:buNone/>
+            </a:pPr>
+            <a:r>
+              <a:rPr lang="en-US" sz="3600" b="1" dirty="0">
+                <a:solidFill>
+                  <a:srgbClr val="990011"/>
+                </a:solidFill>
+                <a:latin typeface="Times New Roman" pitchFamily="34" charset="0"/>
+                <a:ea typeface="Times New Roman" pitchFamily="34" charset="-122"/>
+                <a:cs typeface="Times New Roman" pitchFamily="34" charset="-120"/>
+              </a:rPr>
+              <a:t>Lesson Plan</a:t>
+            </a:r>
+            <a:endParaRPr lang="en-US" sz="3600" dirty="0"/>
+          </a:p>
+        </p:txBody>
+      </p:sp>
+      <p:sp>
+        <p:nvSpPr>
+          <p:cNvPr id="5" name="Text 2"/>
+          <p:cNvSpPr/>
+          <p:nvPr/>
+        </p:nvSpPr>
+        <p:spPr>
+          <a:xfrm>
+            <a:off x="2697480" y="1783080"/>
+            <a:ext cx="9174175" cy="4663440"/>
+          </a:xfrm>
+          <a:prstGeom prst="rect">
+            <a:avLst/>
+          </a:prstGeom>
+          <a:noFill/>
+          <a:ln/>
+        </p:spPr>
+        <p:txBody>
+          <a:bodyPr wrap="square" lIns="0" tIns="0" rIns="0" bIns="0" rtlCol="0" anchor="t"/>
+          <a:lstStyle/>
+          <a:p>
+            <a:pPr algn="l" marL="342900" indent="-342900">
+              <a:spcAft>
+                <a:spcPts val="800"/>
+              </a:spcAft>
+              <a:buSzPct val="100000"/>
+              <a:buFont typeface="+mj-lt"/>
+              <a:buAutoNum type="arabicPeriod" startAt="1"/>
+            </a:pPr>
+            <a:r>
+              <a:rPr lang="en-US" sz="4000" dirty="0">
+                <a:solidFill>
+                  <a:srgbClr val="111111"/>
+                </a:solidFill>
+                <a:latin typeface="Times New Roman" pitchFamily="34" charset="0"/>
+                <a:ea typeface="Times New Roman" pitchFamily="34" charset="-122"/>
+                <a:cs typeface="Times New Roman" pitchFamily="34" charset="-120"/>
+              </a:rPr>
+              <a:t>Correction of the homework</a:t>
+            </a:r>
+            <a:endParaRPr lang="en-US" sz="4000" dirty="0"/>
+          </a:p>
+          <a:p>
+            <a:pPr algn="l" marL="342900" indent="-342900">
+              <a:spcAft>
+                <a:spcPts val="800"/>
+              </a:spcAft>
+              <a:buSzPct val="100000"/>
+              <a:buFont typeface="+mj-lt"/>
+              <a:buAutoNum type="arabicPeriod" startAt="1"/>
+            </a:pPr>
+            <a:r>
+              <a:rPr lang="en-US" sz="4000" dirty="0">
+                <a:solidFill>
+                  <a:srgbClr val="111111"/>
+                </a:solidFill>
+                <a:latin typeface="Times New Roman" pitchFamily="34" charset="0"/>
+                <a:ea typeface="Times New Roman" pitchFamily="34" charset="-122"/>
+                <a:cs typeface="Times New Roman" pitchFamily="34" charset="-120"/>
+              </a:rPr>
+              <a:t>Objectives and recall</a:t>
+            </a:r>
+            <a:endParaRPr lang="en-US" sz="4000" dirty="0"/>
+          </a:p>
+          <a:p>
+            <a:pPr algn="l" marL="342900" indent="-342900">
+              <a:spcAft>
+                <a:spcPts val="800"/>
+              </a:spcAft>
+              <a:buSzPct val="100000"/>
+              <a:buFont typeface="+mj-lt"/>
+              <a:buAutoNum type="arabicPeriod" startAt="1"/>
+            </a:pPr>
+            <a:r>
+              <a:rPr lang="en-US" sz="4000" dirty="0">
+                <a:solidFill>
+                  <a:srgbClr val="111111"/>
+                </a:solidFill>
+                <a:latin typeface="Times New Roman" pitchFamily="34" charset="0"/>
+                <a:ea typeface="Times New Roman" pitchFamily="34" charset="-122"/>
+                <a:cs typeface="Times New Roman" pitchFamily="34" charset="-120"/>
+              </a:rPr>
+              <a:t>Real-life situation and action to take</a:t>
+            </a:r>
+            <a:endParaRPr lang="en-US" sz="4000" dirty="0"/>
+          </a:p>
+          <a:p>
+            <a:pPr algn="l" marL="342900" indent="-342900">
+              <a:spcAft>
+                <a:spcPts val="800"/>
+              </a:spcAft>
+              <a:buSzPct val="100000"/>
+              <a:buFont typeface="+mj-lt"/>
+              <a:buAutoNum type="arabicPeriod" startAt="1"/>
+            </a:pPr>
+            <a:r>
+              <a:rPr lang="en-US" sz="4000" dirty="0">
+                <a:solidFill>
+                  <a:srgbClr val="111111"/>
+                </a:solidFill>
+                <a:latin typeface="Times New Roman" pitchFamily="34" charset="0"/>
+                <a:ea typeface="Times New Roman" pitchFamily="34" charset="-122"/>
+                <a:cs typeface="Times New Roman" pitchFamily="34" charset="-120"/>
+              </a:rPr>
+              <a:t>Learning activities</a:t>
+            </a:r>
+            <a:endParaRPr lang="en-US" sz="4000" dirty="0"/>
+          </a:p>
+          <a:p>
+            <a:pPr algn="l" marL="342900" indent="-342900">
+              <a:spcAft>
+                <a:spcPts val="800"/>
+              </a:spcAft>
+              <a:buSzPct val="100000"/>
+              <a:buFont typeface="+mj-lt"/>
+              <a:buAutoNum type="arabicPeriod" startAt="1"/>
+            </a:pPr>
+            <a:r>
+              <a:rPr lang="en-US" sz="4000" dirty="0">
+                <a:solidFill>
+                  <a:srgbClr val="111111"/>
+                </a:solidFill>
+                <a:latin typeface="Times New Roman" pitchFamily="34" charset="0"/>
+                <a:ea typeface="Times New Roman" pitchFamily="34" charset="-122"/>
+                <a:cs typeface="Times New Roman" pitchFamily="34" charset="-120"/>
+              </a:rPr>
+              <a:t>Board summary</a:t>
+            </a:r>
+            <a:endParaRPr lang="en-US" sz="4000" dirty="0"/>
+          </a:p>
+          <a:p>
+            <a:pPr algn="l" marL="342900" indent="-342900">
+              <a:spcAft>
+                <a:spcPts val="800"/>
+              </a:spcAft>
+              <a:buSzPct val="100000"/>
+              <a:buFont typeface="+mj-lt"/>
+              <a:buAutoNum type="arabicPeriod" startAt="1"/>
+            </a:pPr>
+            <a:r>
+              <a:rPr lang="en-US" sz="4000" dirty="0">
+                <a:solidFill>
+                  <a:srgbClr val="111111"/>
+                </a:solidFill>
+                <a:latin typeface="Times New Roman" pitchFamily="34" charset="0"/>
+                <a:ea typeface="Times New Roman" pitchFamily="34" charset="-122"/>
+                <a:cs typeface="Times New Roman" pitchFamily="34" charset="-120"/>
+              </a:rPr>
+              <a:t>Evaluation, remediation and homework</a:t>
+            </a:r>
+            <a:endParaRPr lang="en-US" sz="4000" dirty="0"/>
+          </a:p>
+        </p:txBody>
+      </p:sp>
+      <p:sp>
+        <p:nvSpPr>
+          <p:cNvPr id="25" name="Slide Number Placeholder 0"/>
+          <p:cNvSpPr>
+            <a:spLocks noGrp="1"/>
+          </p:cNvSpPr>
+          <p:nvPr>
+            <p:ph type="sldNum" sz="quarter" idx="4294967295"/>
+          </p:nvPr>
+        </p:nvSpPr>
+        <p:spPr>
+          <a:xfrm>
+            <a:off x="27432" y="91440"/>
+            <a:ext cx="585216" cy="475488"/>
+          </a:xfrm>
+          <a:prstGeom prst="rect">
+            <a:avLst/>
+          </a:prstGeom>
+          <a:extLst>
+            <a:ext uri="{C572A759-6A51-4108-AA02-DFA0A04FC94B}">
+              <ma14:wrappingTextBoxFlag xmlns:ma14="http://schemas.microsoft.com/office/mac/drawingml/2011/main" val="0"/>
+            </a:ext>
+          </a:extLst>
+        </p:spPr>
+        <p:txBody>
+          <a:bodyPr/>
+          <a:lstStyle>
+            <a:lvl1pPr>
+              <a:defRPr sz="2000">
+                <a:solidFill>
+                  <a:srgbClr val="FFFFFF"/>
+                </a:solidFill>
+                <a:latin typeface="Calibri"/>
+                <a:ea typeface="Calibri"/>
+                <a:cs typeface="Calibri"/>
+              </a:defRPr>
+            </a:lvl1pPr>
+          </a:lstStyle>
+          <a:p>
+            <a:pPr algn="ctr"/>
+            <a:fld id="{F7021451-1387-4CA6-816F-3879F97B5CBC}" type="slidenum">
+              <a:rPr b="1" lang="en-US"/>
+              <a:t>6</a:t>
+            </a:fld>
+            <a:endParaRPr lang="en-US"/>
+          </a:p>
+        </p:txBody>
+      </p:sp>
+    </p:spTree>
+  </p:cSld>
+  <p:clrMapOvr>
+    <a:masterClrMapping/>
+  </p:clrMapOvr>
+</p:sld>
+</file>
+
+<file path=ppt/slides/slide60.xml><?xml version="1.0" encoding="utf-8"?>
+<p:sld xmlns:a="http://schemas.openxmlformats.org/drawingml/2006/main" xmlns:r="http://schemas.openxmlformats.org/officeDocument/2006/relationships" xmlns:p="http://schemas.openxmlformats.org/presentationml/2006/main">
+  <p:cSld name="Slide 60">
+    <p:spTree>
+      <p:nvGrpSpPr>
+        <p:cNvPr id="1" name=""/>
+        <p:cNvGrpSpPr/>
+        <p:nvPr/>
+      </p:nvGrpSpPr>
+      <p:grpSpPr>
+        <a:xfrm>
+          <a:off x="0" y="0"/>
+          <a:ext cx="0" cy="0"/>
+          <a:chOff x="0" y="0"/>
+          <a:chExt cx="0" cy="0"/>
+        </a:xfrm>
+      </p:grpSpPr>
+      <p:sp>
+        <p:nvSpPr>
+          <p:cNvPr id="2" name="Text 0"/>
+          <p:cNvSpPr/>
+          <p:nvPr/>
+        </p:nvSpPr>
+        <p:spPr>
+          <a:xfrm>
+            <a:off x="457200" y="713232"/>
+            <a:ext cx="11368735" cy="274320"/>
+          </a:xfrm>
+          <a:prstGeom prst="rect">
+            <a:avLst/>
+          </a:prstGeom>
+          <a:noFill/>
+          <a:ln/>
+        </p:spPr>
+        <p:txBody>
+          <a:bodyPr wrap="square" lIns="0" tIns="0" rIns="0" bIns="0" rtlCol="0" anchor="ctr"/>
+          <a:lstStyle/>
+          <a:p>
+            <a:pPr algn="r" indent="0" marL="0">
+              <a:buNone/>
+            </a:pPr>
+            <a:r>
+              <a:rPr lang="en-US" sz="1400" b="1" dirty="0">
+                <a:solidFill>
+                  <a:srgbClr val="1C3F6E"/>
+                </a:solidFill>
+                <a:latin typeface="Calibri" pitchFamily="34" charset="0"/>
+                <a:ea typeface="Calibri" pitchFamily="34" charset="-122"/>
+                <a:cs typeface="Calibri" pitchFamily="34" charset="-120"/>
+              </a:rPr>
+              <a:t>REMEDIATION</a:t>
+            </a:r>
+            <a:endParaRPr lang="en-US" sz="1400" dirty="0"/>
+          </a:p>
+        </p:txBody>
+      </p:sp>
+      <p:pic>
+        <p:nvPicPr>
+          <p:cNvPr id="3" name="Image 0" descr="/home/claude/f4/img/minesec_sheet.png">    </p:cNvPr>
+          <p:cNvPicPr>
+            <a:picLocks noChangeAspect="1"/>
+          </p:cNvPicPr>
+          <p:nvPr/>
+        </p:nvPicPr>
+        <p:blipFill>
+          <a:blip r:embed="rId1"/>
+          <a:stretch>
+            <a:fillRect/>
+          </a:stretch>
+        </p:blipFill>
+        <p:spPr>
+          <a:xfrm>
+            <a:off x="0" y="658368"/>
+            <a:ext cx="5120640" cy="5833872"/>
+          </a:xfrm>
+          <a:prstGeom prst="rect">
+            <a:avLst/>
+          </a:prstGeom>
+        </p:spPr>
+      </p:pic>
+      <p:sp>
+        <p:nvSpPr>
+          <p:cNvPr id="4" name="Text 1"/>
+          <p:cNvSpPr/>
+          <p:nvPr/>
+        </p:nvSpPr>
+        <p:spPr>
+          <a:xfrm>
+            <a:off x="5349240" y="1005840"/>
+            <a:ext cx="6522415" cy="731520"/>
+          </a:xfrm>
+          <a:prstGeom prst="rect">
+            <a:avLst/>
+          </a:prstGeom>
+          <a:noFill/>
+          <a:ln/>
+        </p:spPr>
+        <p:txBody>
+          <a:bodyPr wrap="square" lIns="0" tIns="0" rIns="0" bIns="0" rtlCol="0" anchor="ctr">
+            <a:normAutofit/>
+          </a:bodyPr>
+          <a:lstStyle/>
+          <a:p>
+            <a:pPr algn="ctr" indent="0" marL="0">
+              <a:buNone/>
+            </a:pPr>
+            <a:r>
+              <a:rPr lang="en-US" sz="3600" b="1" dirty="0">
+                <a:solidFill>
+                  <a:srgbClr val="990011"/>
+                </a:solidFill>
+                <a:latin typeface="Times New Roman" pitchFamily="34" charset="0"/>
+                <a:ea typeface="Times New Roman" pitchFamily="34" charset="-122"/>
+                <a:cs typeface="Times New Roman" pitchFamily="34" charset="-120"/>
+              </a:rPr>
+              <a:t>Remediation (continued)</a:t>
+            </a:r>
+            <a:endParaRPr lang="en-US" sz="3600" dirty="0"/>
+          </a:p>
+        </p:txBody>
+      </p:sp>
+      <p:sp>
+        <p:nvSpPr>
+          <p:cNvPr id="5" name="Text 2"/>
+          <p:cNvSpPr/>
+          <p:nvPr/>
+        </p:nvSpPr>
+        <p:spPr>
+          <a:xfrm>
+            <a:off x="5349240" y="1783080"/>
+            <a:ext cx="6522415" cy="4663440"/>
+          </a:xfrm>
+          <a:prstGeom prst="rect">
+            <a:avLst/>
+          </a:prstGeom>
+          <a:noFill/>
+          <a:ln/>
+        </p:spPr>
+        <p:txBody>
+          <a:bodyPr wrap="square" lIns="0" tIns="0" rIns="0" bIns="0" rtlCol="0" anchor="t"/>
+          <a:lstStyle/>
+          <a:p>
+            <a:pPr algn="l" marL="342900" indent="-342900">
+              <a:spcAft>
+                <a:spcPts val="800"/>
+              </a:spcAft>
+              <a:buSzPct val="100000"/>
+              <a:buFont typeface="+mj-lt"/>
+              <a:buAutoNum type="arabicPeriod" startAt="1"/>
+            </a:pPr>
+            <a:r>
+              <a:rPr lang="en-US" sz="4000" dirty="0">
+                <a:solidFill>
+                  <a:srgbClr val="111111"/>
+                </a:solidFill>
+                <a:latin typeface="Times New Roman" pitchFamily="34" charset="0"/>
+                <a:ea typeface="Times New Roman" pitchFamily="34" charset="-122"/>
+                <a:cs typeface="Times New Roman" pitchFamily="34" charset="-120"/>
+              </a:rPr>
+              <a:t>The dry side of a mountain is the rain ______.</a:t>
+            </a:r>
+            <a:endParaRPr lang="en-US" sz="4000" dirty="0"/>
+          </a:p>
+        </p:txBody>
+      </p:sp>
+      <p:sp>
+        <p:nvSpPr>
+          <p:cNvPr id="25" name="Slide Number Placeholder 0"/>
+          <p:cNvSpPr>
+            <a:spLocks noGrp="1"/>
+          </p:cNvSpPr>
+          <p:nvPr>
+            <p:ph type="sldNum" sz="quarter" idx="4294967295"/>
+          </p:nvPr>
+        </p:nvSpPr>
+        <p:spPr>
+          <a:xfrm>
+            <a:off x="27432" y="91440"/>
+            <a:ext cx="585216" cy="475488"/>
+          </a:xfrm>
+          <a:prstGeom prst="rect">
+            <a:avLst/>
+          </a:prstGeom>
+          <a:extLst>
+            <a:ext uri="{C572A759-6A51-4108-AA02-DFA0A04FC94B}">
+              <ma14:wrappingTextBoxFlag xmlns:ma14="http://schemas.microsoft.com/office/mac/drawingml/2011/main" val="0"/>
+            </a:ext>
+          </a:extLst>
+        </p:spPr>
+        <p:txBody>
+          <a:bodyPr/>
+          <a:lstStyle>
+            <a:lvl1pPr>
+              <a:defRPr sz="2000">
+                <a:solidFill>
+                  <a:srgbClr val="FFFFFF"/>
+                </a:solidFill>
+                <a:latin typeface="Calibri"/>
+                <a:ea typeface="Calibri"/>
+                <a:cs typeface="Calibri"/>
+              </a:defRPr>
+            </a:lvl1pPr>
+          </a:lstStyle>
+          <a:p>
+            <a:pPr algn="ctr"/>
+            <a:fld id="{F7021451-1387-4CA6-816F-3879F97B5CBC}" type="slidenum">
+              <a:rPr b="1" lang="en-US"/>
+              <a:t>60</a:t>
+            </a:fld>
+            <a:endParaRPr lang="en-US"/>
+          </a:p>
+        </p:txBody>
+      </p:sp>
+    </p:spTree>
+  </p:cSld>
+  <p:clrMapOvr>
+    <a:masterClrMapping/>
+  </p:clrMapOvr>
+</p:sld>
+</file>
+
+<file path=ppt/slides/slide61.xml><?xml version="1.0" encoding="utf-8"?>
+<p:sld xmlns:a="http://schemas.openxmlformats.org/drawingml/2006/main" xmlns:r="http://schemas.openxmlformats.org/officeDocument/2006/relationships" xmlns:p="http://schemas.openxmlformats.org/presentationml/2006/main">
+  <p:cSld name="Slide 61">
+    <p:spTree>
+      <p:nvGrpSpPr>
+        <p:cNvPr id="1" name=""/>
+        <p:cNvGrpSpPr/>
+        <p:nvPr/>
+      </p:nvGrpSpPr>
+      <p:grpSpPr>
+        <a:xfrm>
+          <a:off x="0" y="0"/>
+          <a:ext cx="0" cy="0"/>
+          <a:chOff x="0" y="0"/>
+          <a:chExt cx="0" cy="0"/>
+        </a:xfrm>
+      </p:grpSpPr>
+      <p:sp>
+        <p:nvSpPr>
+          <p:cNvPr id="2" name="Text 0"/>
+          <p:cNvSpPr/>
+          <p:nvPr/>
+        </p:nvSpPr>
+        <p:spPr>
+          <a:xfrm>
+            <a:off x="457200" y="713232"/>
+            <a:ext cx="11368735" cy="274320"/>
+          </a:xfrm>
+          <a:prstGeom prst="rect">
+            <a:avLst/>
+          </a:prstGeom>
+          <a:noFill/>
+          <a:ln/>
+        </p:spPr>
+        <p:txBody>
+          <a:bodyPr wrap="square" lIns="0" tIns="0" rIns="0" bIns="0" rtlCol="0" anchor="ctr"/>
+          <a:lstStyle/>
+          <a:p>
+            <a:pPr algn="r" indent="0" marL="0">
+              <a:buNone/>
+            </a:pPr>
+            <a:r>
+              <a:rPr lang="en-US" sz="1400" b="1" dirty="0">
+                <a:solidFill>
+                  <a:srgbClr val="1C3F6E"/>
+                </a:solidFill>
+                <a:latin typeface="Calibri" pitchFamily="34" charset="0"/>
+                <a:ea typeface="Calibri" pitchFamily="34" charset="-122"/>
+                <a:cs typeface="Calibri" pitchFamily="34" charset="-120"/>
+              </a:rPr>
+              <a:t>HOMEWORK</a:t>
+            </a:r>
+            <a:endParaRPr lang="en-US" sz="1400" dirty="0"/>
+          </a:p>
+        </p:txBody>
+      </p:sp>
+      <p:pic>
+        <p:nvPicPr>
+          <p:cNvPr id="3" name="Image 0" descr="/home/claude/f4/img/minesec_sheet.png">    </p:cNvPr>
+          <p:cNvPicPr>
+            <a:picLocks noChangeAspect="1"/>
+          </p:cNvPicPr>
+          <p:nvPr/>
+        </p:nvPicPr>
+        <p:blipFill>
+          <a:blip r:embed="rId1"/>
+          <a:stretch>
+            <a:fillRect/>
+          </a:stretch>
+        </p:blipFill>
+        <p:spPr>
+          <a:xfrm>
+            <a:off x="0" y="658368"/>
+            <a:ext cx="5120640" cy="5833872"/>
+          </a:xfrm>
+          <a:prstGeom prst="rect">
+            <a:avLst/>
+          </a:prstGeom>
+        </p:spPr>
+      </p:pic>
+      <p:sp>
+        <p:nvSpPr>
+          <p:cNvPr id="4" name="Text 1"/>
+          <p:cNvSpPr/>
+          <p:nvPr/>
+        </p:nvSpPr>
+        <p:spPr>
+          <a:xfrm>
+            <a:off x="5349240" y="1005840"/>
+            <a:ext cx="6522415" cy="731520"/>
+          </a:xfrm>
+          <a:prstGeom prst="rect">
+            <a:avLst/>
+          </a:prstGeom>
+          <a:noFill/>
+          <a:ln/>
+        </p:spPr>
+        <p:txBody>
+          <a:bodyPr wrap="square" lIns="0" tIns="0" rIns="0" bIns="0" rtlCol="0" anchor="ctr">
+            <a:normAutofit/>
+          </a:bodyPr>
+          <a:lstStyle/>
+          <a:p>
+            <a:pPr algn="ctr" indent="0" marL="0">
+              <a:buNone/>
+            </a:pPr>
+            <a:r>
+              <a:rPr lang="en-US" sz="3600" b="1" dirty="0">
+                <a:solidFill>
+                  <a:srgbClr val="990011"/>
+                </a:solidFill>
+                <a:latin typeface="Times New Roman" pitchFamily="34" charset="0"/>
+                <a:ea typeface="Times New Roman" pitchFamily="34" charset="-122"/>
+                <a:cs typeface="Times New Roman" pitchFamily="34" charset="-120"/>
+              </a:rPr>
+              <a:t>Homework</a:t>
+            </a:r>
+            <a:endParaRPr lang="en-US" sz="3600" dirty="0"/>
+          </a:p>
+        </p:txBody>
+      </p:sp>
+      <p:sp>
+        <p:nvSpPr>
+          <p:cNvPr id="5" name="Text 2"/>
+          <p:cNvSpPr/>
+          <p:nvPr/>
+        </p:nvSpPr>
+        <p:spPr>
+          <a:xfrm>
+            <a:off x="5349240" y="1783080"/>
+            <a:ext cx="6522415" cy="4663440"/>
+          </a:xfrm>
+          <a:prstGeom prst="rect">
+            <a:avLst/>
+          </a:prstGeom>
+          <a:noFill/>
+          <a:ln/>
+        </p:spPr>
+        <p:txBody>
+          <a:bodyPr wrap="square" lIns="0" tIns="0" rIns="0" bIns="0" rtlCol="0" anchor="t"/>
+          <a:lstStyle/>
+          <a:p>
+            <a:pPr algn="l" indent="0" marL="0">
+              <a:spcAft>
+                <a:spcPts val="800"/>
+              </a:spcAft>
+              <a:buNone/>
+            </a:pPr>
+            <a:r>
+              <a:rPr lang="en-US" sz="4000" dirty="0">
+                <a:solidFill>
+                  <a:srgbClr val="111111"/>
+                </a:solidFill>
+                <a:latin typeface="Times New Roman" pitchFamily="34" charset="0"/>
+                <a:ea typeface="Times New Roman" pitchFamily="34" charset="-122"/>
+                <a:cs typeface="Times New Roman" pitchFamily="34" charset="-120"/>
+              </a:rPr>
+              <a:t>Define atmospheric pressure.</a:t>
+            </a:r>
+            <a:endParaRPr lang="en-US" sz="4000" dirty="0"/>
+          </a:p>
+        </p:txBody>
+      </p:sp>
+      <p:sp>
+        <p:nvSpPr>
+          <p:cNvPr id="25" name="Slide Number Placeholder 0"/>
+          <p:cNvSpPr>
+            <a:spLocks noGrp="1"/>
+          </p:cNvSpPr>
+          <p:nvPr>
+            <p:ph type="sldNum" sz="quarter" idx="4294967295"/>
+          </p:nvPr>
+        </p:nvSpPr>
+        <p:spPr>
+          <a:xfrm>
+            <a:off x="27432" y="91440"/>
+            <a:ext cx="585216" cy="475488"/>
+          </a:xfrm>
+          <a:prstGeom prst="rect">
+            <a:avLst/>
+          </a:prstGeom>
+          <a:extLst>
+            <a:ext uri="{C572A759-6A51-4108-AA02-DFA0A04FC94B}">
+              <ma14:wrappingTextBoxFlag xmlns:ma14="http://schemas.microsoft.com/office/mac/drawingml/2011/main" val="0"/>
+            </a:ext>
+          </a:extLst>
+        </p:spPr>
+        <p:txBody>
+          <a:bodyPr/>
+          <a:lstStyle>
+            <a:lvl1pPr>
+              <a:defRPr sz="2000">
+                <a:solidFill>
+                  <a:srgbClr val="FFFFFF"/>
+                </a:solidFill>
+                <a:latin typeface="Calibri"/>
+                <a:ea typeface="Calibri"/>
+                <a:cs typeface="Calibri"/>
+              </a:defRPr>
+            </a:lvl1pPr>
+          </a:lstStyle>
+          <a:p>
+            <a:pPr algn="ctr"/>
+            <a:fld id="{F7021451-1387-4CA6-816F-3879F97B5CBC}" type="slidenum">
+              <a:rPr b="1" lang="en-US"/>
+              <a:t>61</a:t>
+            </a:fld>
+            <a:endParaRPr lang="en-US"/>
+          </a:p>
+        </p:txBody>
+      </p:sp>
+    </p:spTree>
+  </p:cSld>
+  <p:clrMapOvr>
+    <a:masterClrMapping/>
+  </p:clrMapOvr>
+</p:sld>
+</file>
+
+<file path=ppt/slides/slide62.xml><?xml version="1.0" encoding="utf-8"?>
+<p:sld xmlns:a="http://schemas.openxmlformats.org/drawingml/2006/main" xmlns:r="http://schemas.openxmlformats.org/officeDocument/2006/relationships" xmlns:p="http://schemas.openxmlformats.org/presentationml/2006/main">
+  <p:cSld name="Slide 62">
+    <p:spTree>
+      <p:nvGrpSpPr>
+        <p:cNvPr id="1" name=""/>
+        <p:cNvGrpSpPr/>
+        <p:nvPr/>
+      </p:nvGrpSpPr>
+      <p:grpSpPr>
+        <a:xfrm>
+          <a:off x="0" y="0"/>
+          <a:ext cx="0" cy="0"/>
+          <a:chOff x="0" y="0"/>
+          <a:chExt cx="0" cy="0"/>
+        </a:xfrm>
+      </p:grpSpPr>
+      <p:sp>
+        <p:nvSpPr>
+          <p:cNvPr id="2" name="Text 0"/>
+          <p:cNvSpPr/>
+          <p:nvPr/>
+        </p:nvSpPr>
+        <p:spPr>
+          <a:xfrm>
+            <a:off x="457200" y="713232"/>
+            <a:ext cx="11368735" cy="274320"/>
+          </a:xfrm>
+          <a:prstGeom prst="rect">
+            <a:avLst/>
+          </a:prstGeom>
+          <a:noFill/>
+          <a:ln/>
+        </p:spPr>
+        <p:txBody>
+          <a:bodyPr wrap="square" lIns="0" tIns="0" rIns="0" bIns="0" rtlCol="0" anchor="ctr"/>
+          <a:lstStyle/>
+          <a:p>
+            <a:pPr algn="r" indent="0" marL="0">
+              <a:buNone/>
+            </a:pPr>
+            <a:r>
+              <a:rPr lang="en-US" sz="1400" b="1" dirty="0">
+                <a:solidFill>
+                  <a:srgbClr val="1C3F6E"/>
+                </a:solidFill>
+                <a:latin typeface="Calibri" pitchFamily="34" charset="0"/>
+                <a:ea typeface="Calibri" pitchFamily="34" charset="-122"/>
+                <a:cs typeface="Calibri" pitchFamily="34" charset="-120"/>
+              </a:rPr>
+              <a:t>NEXT LESSON</a:t>
+            </a:r>
+            <a:endParaRPr lang="en-US" sz="1400" dirty="0"/>
+          </a:p>
+        </p:txBody>
+      </p:sp>
+      <p:pic>
+        <p:nvPicPr>
+          <p:cNvPr id="3" name="Image 0" descr="/home/claude/f4/img/minesec_sheet.png">    </p:cNvPr>
+          <p:cNvPicPr>
+            <a:picLocks noChangeAspect="1"/>
+          </p:cNvPicPr>
+          <p:nvPr/>
+        </p:nvPicPr>
+        <p:blipFill>
+          <a:blip r:embed="rId1"/>
+          <a:stretch>
+            <a:fillRect/>
+          </a:stretch>
+        </p:blipFill>
+        <p:spPr>
+          <a:xfrm>
+            <a:off x="0" y="658368"/>
+            <a:ext cx="5120640" cy="5833872"/>
+          </a:xfrm>
+          <a:prstGeom prst="rect">
+            <a:avLst/>
+          </a:prstGeom>
+        </p:spPr>
+      </p:pic>
+      <p:sp>
+        <p:nvSpPr>
+          <p:cNvPr id="4" name="Text 1"/>
+          <p:cNvSpPr/>
+          <p:nvPr/>
+        </p:nvSpPr>
+        <p:spPr>
+          <a:xfrm>
+            <a:off x="5349240" y="1005840"/>
+            <a:ext cx="6522415" cy="731520"/>
+          </a:xfrm>
+          <a:prstGeom prst="rect">
+            <a:avLst/>
+          </a:prstGeom>
+          <a:noFill/>
+          <a:ln/>
+        </p:spPr>
+        <p:txBody>
+          <a:bodyPr wrap="square" lIns="0" tIns="0" rIns="0" bIns="0" rtlCol="0" anchor="ctr">
+            <a:normAutofit/>
+          </a:bodyPr>
+          <a:lstStyle/>
+          <a:p>
+            <a:pPr algn="ctr" indent="0" marL="0">
+              <a:buNone/>
+            </a:pPr>
+            <a:r>
+              <a:rPr lang="en-US" sz="3600" b="1" dirty="0">
+                <a:solidFill>
+                  <a:srgbClr val="990011"/>
+                </a:solidFill>
+                <a:latin typeface="Times New Roman" pitchFamily="34" charset="0"/>
+                <a:ea typeface="Times New Roman" pitchFamily="34" charset="-122"/>
+                <a:cs typeface="Times New Roman" pitchFamily="34" charset="-120"/>
+              </a:rPr>
+              <a:t>Next Lesson</a:t>
+            </a:r>
+            <a:endParaRPr lang="en-US" sz="3600" dirty="0"/>
+          </a:p>
+        </p:txBody>
+      </p:sp>
+      <p:sp>
+        <p:nvSpPr>
+          <p:cNvPr id="5" name="Text 2"/>
+          <p:cNvSpPr/>
+          <p:nvPr/>
+        </p:nvSpPr>
+        <p:spPr>
+          <a:xfrm>
+            <a:off x="5349240" y="1783080"/>
+            <a:ext cx="6522415" cy="4663440"/>
+          </a:xfrm>
+          <a:prstGeom prst="rect">
+            <a:avLst/>
+          </a:prstGeom>
+          <a:noFill/>
+          <a:ln/>
+        </p:spPr>
+        <p:txBody>
+          <a:bodyPr wrap="square" lIns="0" tIns="0" rIns="0" bIns="0" rtlCol="0" anchor="ctr"/>
+          <a:lstStyle/>
+          <a:p>
+            <a:pPr algn="ctr" indent="0" marL="0">
+              <a:spcAft>
+                <a:spcPts val="800"/>
+              </a:spcAft>
+              <a:buNone/>
+            </a:pPr>
+            <a:r>
+              <a:rPr lang="en-US" sz="4000" b="1" dirty="0">
+                <a:solidFill>
+                  <a:srgbClr val="111111"/>
+                </a:solidFill>
+                <a:latin typeface="Times New Roman" pitchFamily="34" charset="0"/>
+                <a:ea typeface="Times New Roman" pitchFamily="34" charset="-122"/>
+                <a:cs typeface="Times New Roman" pitchFamily="34" charset="-120"/>
+              </a:rPr>
+              <a:t>Our next lesson will be on:</a:t>
+            </a:r>
+            <a:endParaRPr lang="en-US" sz="4000" dirty="0"/>
+          </a:p>
+          <a:p>
+            <a:pPr algn="ctr" indent="0" marL="0">
+              <a:spcAft>
+                <a:spcPts val="800"/>
+              </a:spcAft>
+              <a:buNone/>
+            </a:pPr>
+            <a:r>
+              <a:rPr lang="en-US" sz="4000" b="1" dirty="0">
+                <a:solidFill>
+                  <a:srgbClr val="990011"/>
+                </a:solidFill>
+                <a:latin typeface="Times New Roman" pitchFamily="34" charset="0"/>
+                <a:ea typeface="Times New Roman" pitchFamily="34" charset="-122"/>
+                <a:cs typeface="Times New Roman" pitchFamily="34" charset="-120"/>
+              </a:rPr>
+              <a:t>Lesson 13: Pressure Systems</a:t>
+            </a:r>
+            <a:endParaRPr lang="en-US" sz="4000" dirty="0"/>
+          </a:p>
+        </p:txBody>
+      </p:sp>
+      <p:sp>
+        <p:nvSpPr>
+          <p:cNvPr id="25" name="Slide Number Placeholder 0"/>
+          <p:cNvSpPr>
+            <a:spLocks noGrp="1"/>
+          </p:cNvSpPr>
+          <p:nvPr>
+            <p:ph type="sldNum" sz="quarter" idx="4294967295"/>
+          </p:nvPr>
+        </p:nvSpPr>
+        <p:spPr>
+          <a:xfrm>
+            <a:off x="27432" y="91440"/>
+            <a:ext cx="585216" cy="475488"/>
+          </a:xfrm>
+          <a:prstGeom prst="rect">
+            <a:avLst/>
+          </a:prstGeom>
+          <a:extLst>
+            <a:ext uri="{C572A759-6A51-4108-AA02-DFA0A04FC94B}">
+              <ma14:wrappingTextBoxFlag xmlns:ma14="http://schemas.microsoft.com/office/mac/drawingml/2011/main" val="0"/>
+            </a:ext>
+          </a:extLst>
+        </p:spPr>
+        <p:txBody>
+          <a:bodyPr/>
+          <a:lstStyle>
+            <a:lvl1pPr>
+              <a:defRPr sz="2000">
+                <a:solidFill>
+                  <a:srgbClr val="FFFFFF"/>
+                </a:solidFill>
+                <a:latin typeface="Calibri"/>
+                <a:ea typeface="Calibri"/>
+                <a:cs typeface="Calibri"/>
+              </a:defRPr>
+            </a:lvl1pPr>
+          </a:lstStyle>
+          <a:p>
+            <a:pPr algn="ctr"/>
+            <a:fld id="{F7021451-1387-4CA6-816F-3879F97B5CBC}" type="slidenum">
+              <a:rPr b="1" lang="en-US"/>
+              <a:t>62</a:t>
+            </a:fld>
+            <a:endParaRPr lang="en-US"/>
+          </a:p>
+        </p:txBody>
+      </p:sp>
+    </p:spTree>
+  </p:cSld>
+  <p:clrMapOvr>
+    <a:masterClrMapping/>
+  </p:clrMapOvr>
+</p:sld>
+</file>
+
+<file path=ppt/slides/slide63.xml><?xml version="1.0" encoding="utf-8"?>
+<p:sld xmlns:a="http://schemas.openxmlformats.org/drawingml/2006/main" xmlns:r="http://schemas.openxmlformats.org/officeDocument/2006/relationships" xmlns:p="http://schemas.openxmlformats.org/presentationml/2006/main">
+  <p:cSld name="Slide 63">
+    <p:spTree>
+      <p:nvGrpSpPr>
+        <p:cNvPr id="1" name=""/>
+        <p:cNvGrpSpPr/>
+        <p:nvPr/>
+      </p:nvGrpSpPr>
+      <p:grpSpPr>
+        <a:xfrm>
+          <a:off x="0" y="0"/>
+          <a:ext cx="0" cy="0"/>
+          <a:chOff x="0" y="0"/>
+          <a:chExt cx="0" cy="0"/>
+        </a:xfrm>
+      </p:grpSpPr>
+      <p:sp>
+        <p:nvSpPr>
+          <p:cNvPr id="2" name="Text 0"/>
+          <p:cNvSpPr/>
+          <p:nvPr/>
+        </p:nvSpPr>
+        <p:spPr>
+          <a:xfrm>
+            <a:off x="457200" y="713232"/>
+            <a:ext cx="11368735" cy="274320"/>
+          </a:xfrm>
+          <a:prstGeom prst="rect">
+            <a:avLst/>
+          </a:prstGeom>
+          <a:noFill/>
+          <a:ln/>
+        </p:spPr>
+        <p:txBody>
+          <a:bodyPr wrap="square" lIns="0" tIns="0" rIns="0" bIns="0" rtlCol="0" anchor="ctr"/>
+          <a:lstStyle/>
+          <a:p>
+            <a:pPr algn="r" indent="0" marL="0">
+              <a:buNone/>
+            </a:pPr>
+            <a:r>
+              <a:rPr lang="en-US" sz="1400" b="1" dirty="0">
+                <a:solidFill>
+                  <a:srgbClr val="1C3F6E"/>
+                </a:solidFill>
+                <a:latin typeface="Calibri" pitchFamily="34" charset="0"/>
+                <a:ea typeface="Calibri" pitchFamily="34" charset="-122"/>
+                <a:cs typeface="Calibri" pitchFamily="34" charset="-120"/>
+              </a:rPr>
+              <a:t>BILINGUAL GAME</a:t>
+            </a:r>
+            <a:endParaRPr lang="en-US" sz="1400" dirty="0"/>
+          </a:p>
+        </p:txBody>
+      </p:sp>
+      <p:sp>
+        <p:nvSpPr>
+          <p:cNvPr id="3" name="Text 1"/>
+          <p:cNvSpPr/>
+          <p:nvPr/>
+        </p:nvSpPr>
+        <p:spPr>
+          <a:xfrm>
+            <a:off x="457200" y="1005840"/>
+            <a:ext cx="11277295" cy="731520"/>
+          </a:xfrm>
+          <a:prstGeom prst="rect">
+            <a:avLst/>
+          </a:prstGeom>
+          <a:noFill/>
+          <a:ln/>
+        </p:spPr>
+        <p:txBody>
+          <a:bodyPr wrap="square" lIns="0" tIns="0" rIns="0" bIns="0" rtlCol="0" anchor="ctr"/>
+          <a:lstStyle/>
+          <a:p>
+            <a:pPr algn="ctr" indent="0" marL="0">
+              <a:buNone/>
+            </a:pPr>
+            <a:r>
+              <a:rPr lang="en-US" sz="3600" b="1" dirty="0">
+                <a:solidFill>
+                  <a:srgbClr val="990011"/>
+                </a:solidFill>
+                <a:latin typeface="Times New Roman" pitchFamily="34" charset="0"/>
+                <a:ea typeface="Times New Roman" pitchFamily="34" charset="-122"/>
+                <a:cs typeface="Times New Roman" pitchFamily="34" charset="-120"/>
+              </a:rPr>
               <a:t>Bilingual Game (Jeu Bilingue)</a:t>
             </a:r>
             <a:endParaRPr lang="en-US" sz="3600" dirty="0"/>
@@ -20294,7 +23379,7 @@
       </p:sp>
       <p:graphicFrame>
         <p:nvGraphicFramePr>
-          <p:cNvPr id="57" name="Table 0"/>
+          <p:cNvPr id="64" name="Table 0"/>
           <p:cNvGraphicFramePr>
             <a:graphicFrameLocks noGrp="1"/>
           </p:cNvGraphicFramePr>
@@ -21330,7 +24415,7 @@
             <a:pPr algn="ctr"/>
             <a:fld id="{F7021451-1387-4CA6-816F-3879F97B5CBC}" type="slidenum">
               <a:rPr b="1" lang="en-US"/>
-              <a:t>56</a:t>
+              <a:t>63</a:t>
             </a:fld>
             <a:endParaRPr lang="en-US"/>
           </a:p>
@@ -21344,9 +24429,9 @@
 </p:sld>
 </file>
 
-<file path=ppt/slides/slide57.xml><?xml version="1.0" encoding="utf-8"?>
+<file path=ppt/slides/slide64.xml><?xml version="1.0" encoding="utf-8"?>
 <p:sld xmlns:a="http://schemas.openxmlformats.org/drawingml/2006/main" xmlns:r="http://schemas.openxmlformats.org/officeDocument/2006/relationships" xmlns:p="http://schemas.openxmlformats.org/presentationml/2006/main">
-  <p:cSld name="Slide 57">
+  <p:cSld name="Slide 64">
     <p:spTree>
       <p:nvGrpSpPr>
         <p:cNvPr id="1" name=""/>
@@ -21441,7 +24526,7 @@
       </p:sp>
       <p:graphicFrame>
         <p:nvGraphicFramePr>
-          <p:cNvPr id="58" name="Table 0"/>
+          <p:cNvPr id="65" name="Table 0"/>
           <p:cNvGraphicFramePr>
             <a:graphicFrameLocks noGrp="1"/>
           </p:cNvGraphicFramePr>
@@ -22063,7 +25148,7 @@
             <a:pPr algn="ctr"/>
             <a:fld id="{F7021451-1387-4CA6-816F-3879F97B5CBC}" type="slidenum">
               <a:rPr b="1" lang="en-US"/>
-              <a:t>57</a:t>
+              <a:t>64</a:t>
             </a:fld>
             <a:endParaRPr lang="en-US"/>
           </a:p>
@@ -22077,9 +25162,9 @@
 </p:sld>
 </file>
 
-<file path=ppt/slides/slide58.xml><?xml version="1.0" encoding="utf-8"?>
+<file path=ppt/slides/slide65.xml><?xml version="1.0" encoding="utf-8"?>
 <p:sld xmlns:a="http://schemas.openxmlformats.org/drawingml/2006/main" xmlns:r="http://schemas.openxmlformats.org/officeDocument/2006/relationships" xmlns:p="http://schemas.openxmlformats.org/presentationml/2006/main">
-  <p:cSld name="Slide 58">
+  <p:cSld name="Slide 65">
     <p:spTree>
       <p:nvGrpSpPr>
         <p:cNvPr id="1" name=""/>
@@ -22174,7 +25259,7 @@
       </p:sp>
       <p:graphicFrame>
         <p:nvGraphicFramePr>
-          <p:cNvPr id="59" name="Table 0"/>
+          <p:cNvPr id="66" name="Table 0"/>
           <p:cNvGraphicFramePr>
             <a:graphicFrameLocks noGrp="1"/>
           </p:cNvGraphicFramePr>
@@ -22284,7 +25369,7 @@
                           <a:ea typeface="Calibri" pitchFamily="34" charset="-122"/>
                           <a:cs typeface="Calibri" pitchFamily="34" charset="-120"/>
                         </a:rPr>
-                        <a:t>DEFINITIONS; Pressure Belts; Air Masses; Secondary (Local) Factors.</a:t>
+                        <a:t>DEFINITIONS; Spatial Pattern of Distribution by Latitude; Pressure Belts; Air Masses; Relief, the Sea and Ocean Currents; Vegetation, Water Bodies and Towns.</a:t>
                       </a:r>
                       <a:endParaRPr lang="en-US" sz="1600" dirty="0">
                         <a:latin typeface="Calibri" charset="0"/>
@@ -22934,7 +26019,7 @@
             <a:pPr algn="ctr"/>
             <a:fld id="{F7021451-1387-4CA6-816F-3879F97B5CBC}" type="slidenum">
               <a:rPr b="1" lang="en-US"/>
-              <a:t>58</a:t>
+              <a:t>65</a:t>
             </a:fld>
             <a:endParaRPr lang="en-US"/>
           </a:p>
@@ -22948,9 +26033,9 @@
 </p:sld>
 </file>
 
-<file path=ppt/slides/slide59.xml><?xml version="1.0" encoding="utf-8"?>
+<file path=ppt/slides/slide66.xml><?xml version="1.0" encoding="utf-8"?>
 <p:sld xmlns:a="http://schemas.openxmlformats.org/drawingml/2006/main" xmlns:r="http://schemas.openxmlformats.org/officeDocument/2006/relationships" xmlns:p="http://schemas.openxmlformats.org/presentationml/2006/main">
-  <p:cSld name="Slide 59">
+  <p:cSld name="Slide 66">
     <p:spTree>
       <p:nvGrpSpPr>
         <p:cNvPr id="1" name=""/>
@@ -23259,7 +26344,7 @@
             <a:pPr algn="ctr"/>
             <a:fld id="{F7021451-1387-4CA6-816F-3879F97B5CBC}" type="slidenum">
               <a:rPr b="1" lang="en-US"/>
-              <a:t>59</a:t>
+              <a:t>66</a:t>
             </a:fld>
             <a:endParaRPr lang="en-US"/>
           </a:p>
@@ -23273,9 +26358,9 @@
 </p:sld>
 </file>
 
-<file path=ppt/slides/slide6.xml><?xml version="1.0" encoding="utf-8"?>
+<file path=ppt/slides/slide67.xml><?xml version="1.0" encoding="utf-8"?>
 <p:sld xmlns:a="http://schemas.openxmlformats.org/drawingml/2006/main" xmlns:r="http://schemas.openxmlformats.org/officeDocument/2006/relationships" xmlns:p="http://schemas.openxmlformats.org/presentationml/2006/main">
-  <p:cSld name="Slide 6">
+  <p:cSld name="Slide 67">
     <p:spTree>
       <p:nvGrpSpPr>
         <p:cNvPr id="1" name=""/>
@@ -23323,7 +26408,7 @@
                 <a:ea typeface="Calibri" pitchFamily="34" charset="-122"/>
                 <a:cs typeface="Calibri" pitchFamily="34" charset="-120"/>
               </a:rPr>
-              <a:t>LESSON PLAN</a:t>
+              <a:t>REFERENCES</a:t>
             </a:r>
             <a:endParaRPr lang="en-US" sz="1400" dirty="0"/>
           </a:p>
@@ -23346,7 +26431,7 @@
         <p:spPr>
           <a:xfrm>
             <a:off x="0" y="658368"/>
-            <a:ext cx="2468880" cy="5833872"/>
+            <a:ext cx="1463040" cy="5833872"/>
           </a:xfrm>
           <a:prstGeom prst="rect">
             <a:avLst/>
@@ -23361,8 +26446,8 @@
         </p:nvSpPr>
         <p:spPr>
           <a:xfrm>
-            <a:off x="2697480" y="1005840"/>
-            <a:ext cx="9174175" cy="731520"/>
+            <a:off x="1691640" y="1005840"/>
+            <a:ext cx="10180015" cy="731520"/>
           </a:xfrm>
           <a:prstGeom prst="rect">
             <a:avLst/>
@@ -23388,7 +26473,7 @@
                 <a:ea typeface="Times New Roman" pitchFamily="34" charset="-122"/>
                 <a:cs typeface="Times New Roman" pitchFamily="34" charset="-120"/>
               </a:rPr>
-              <a:t>Lesson Plan</a:t>
+              <a:t>References</a:t>
             </a:r>
             <a:endParaRPr lang="en-US" sz="3600" dirty="0"/>
           </a:p>
@@ -23402,8 +26487,8 @@
         </p:nvSpPr>
         <p:spPr>
           <a:xfrm>
-            <a:off x="2697480" y="1783080"/>
-            <a:ext cx="9174175" cy="4663440"/>
+            <a:off x="1691640" y="1783080"/>
+            <a:ext cx="10180015" cy="4663440"/>
           </a:xfrm>
           <a:prstGeom prst="rect">
             <a:avLst/>
@@ -23420,21 +26505,20 @@
                 <a:spcPts val="800"/>
               </a:spcAft>
               <a:buSzPct val="100000"/>
-              <a:buFont typeface="+mj-lt"/>
-              <a:buAutoNum type="arabicPeriod" startAt="1"/>
-            </a:pPr>
-            <a:r>
-              <a:rPr lang="en-US" sz="4000" dirty="0">
+              <a:buChar char="•"/>
+            </a:pPr>
+            <a:r>
+              <a:rPr lang="en-US" sz="1800" dirty="0">
                 <a:solidFill>
                   <a:srgbClr val="111111"/>
                 </a:solidFill>
-                <a:latin typeface="Times New Roman" pitchFamily="34" charset="0"/>
-                <a:ea typeface="Times New Roman" pitchFamily="34" charset="-122"/>
-                <a:cs typeface="Times New Roman" pitchFamily="34" charset="-120"/>
-              </a:rPr>
-              <a:t>Correction of the homework</a:t>
-            </a:r>
-            <a:endParaRPr lang="en-US" sz="4000" dirty="0"/>
+                <a:latin typeface="Calibri" pitchFamily="34" charset="0"/>
+                <a:ea typeface="Calibri" pitchFamily="34" charset="-122"/>
+                <a:cs typeface="Calibri" pitchFamily="34" charset="-120"/>
+              </a:rPr>
+              <a:t>Geography Syllabus for Sixth Forms (Lower and Upper Sixth), MINESEC, 2019 — Module 1 (Meteorology, Climatology &amp; Hydrology).</a:t>
+            </a:r>
+            <a:endParaRPr lang="en-US" sz="1800" dirty="0"/>
           </a:p>
           <a:p>
             <a:pPr algn="l" marL="342900" indent="-342900">
@@ -23442,21 +26526,20 @@
                 <a:spcPts val="800"/>
               </a:spcAft>
               <a:buSzPct val="100000"/>
-              <a:buFont typeface="+mj-lt"/>
-              <a:buAutoNum type="arabicPeriod" startAt="1"/>
-            </a:pPr>
-            <a:r>
-              <a:rPr lang="en-US" sz="4000" dirty="0">
+              <a:buChar char="•"/>
+            </a:pPr>
+            <a:r>
+              <a:rPr lang="en-US" sz="1800" dirty="0">
                 <a:solidFill>
                   <a:srgbClr val="111111"/>
                 </a:solidFill>
-                <a:latin typeface="Times New Roman" pitchFamily="34" charset="0"/>
-                <a:ea typeface="Times New Roman" pitchFamily="34" charset="-122"/>
-                <a:cs typeface="Times New Roman" pitchFamily="34" charset="-120"/>
-              </a:rPr>
-              <a:t>Objectives and recall</a:t>
-            </a:r>
-            <a:endParaRPr lang="en-US" sz="4000" dirty="0"/>
+                <a:latin typeface="Calibri" pitchFamily="34" charset="0"/>
+                <a:ea typeface="Calibri" pitchFamily="34" charset="-122"/>
+                <a:cs typeface="Calibri" pitchFamily="34" charset="-120"/>
+              </a:rPr>
+              <a:t>Teacher's course notes: Mr KAMDEM E., Meteorology (LSA), GBHS Garoua, 2026.</a:t>
+            </a:r>
+            <a:endParaRPr lang="en-US" sz="1800" dirty="0"/>
           </a:p>
           <a:p>
             <a:pPr algn="l" marL="342900" indent="-342900">
@@ -23464,21 +26547,20 @@
                 <a:spcPts val="800"/>
               </a:spcAft>
               <a:buSzPct val="100000"/>
-              <a:buFont typeface="+mj-lt"/>
-              <a:buAutoNum type="arabicPeriod" startAt="1"/>
-            </a:pPr>
-            <a:r>
-              <a:rPr lang="en-US" sz="4000" dirty="0">
+              <a:buChar char="•"/>
+            </a:pPr>
+            <a:r>
+              <a:rPr lang="en-US" sz="1800" dirty="0">
                 <a:solidFill>
                   <a:srgbClr val="111111"/>
                 </a:solidFill>
-                <a:latin typeface="Times New Roman" pitchFamily="34" charset="0"/>
-                <a:ea typeface="Times New Roman" pitchFamily="34" charset="-122"/>
-                <a:cs typeface="Times New Roman" pitchFamily="34" charset="-120"/>
-              </a:rPr>
-              <a:t>Real-life situation and action to take</a:t>
-            </a:r>
-            <a:endParaRPr lang="en-US" sz="4000" dirty="0"/>
+                <a:latin typeface="Calibri" pitchFamily="34" charset="0"/>
+                <a:ea typeface="Calibri" pitchFamily="34" charset="-122"/>
+                <a:cs typeface="Calibri" pitchFamily="34" charset="-120"/>
+              </a:rPr>
+              <a:t>Photo, Activity 3: “Desert trekking in Merzouga” by Antonio Cinotti , CC BY-NC-ND 2.0, via Flickr (https://www.flickr.com/photos/46378751@N02/15331399979)</a:t>
+            </a:r>
+            <a:endParaRPr lang="en-US" sz="1800" dirty="0"/>
           </a:p>
           <a:p>
             <a:pPr algn="l" marL="342900" indent="-342900">
@@ -23486,21 +26568,20 @@
                 <a:spcPts val="800"/>
               </a:spcAft>
               <a:buSzPct val="100000"/>
-              <a:buFont typeface="+mj-lt"/>
-              <a:buAutoNum type="arabicPeriod" startAt="1"/>
-            </a:pPr>
-            <a:r>
-              <a:rPr lang="en-US" sz="4000" dirty="0">
+              <a:buChar char="•"/>
+            </a:pPr>
+            <a:r>
+              <a:rPr lang="en-US" sz="1800" dirty="0">
                 <a:solidFill>
                   <a:srgbClr val="111111"/>
                 </a:solidFill>
-                <a:latin typeface="Times New Roman" pitchFamily="34" charset="0"/>
-                <a:ea typeface="Times New Roman" pitchFamily="34" charset="-122"/>
-                <a:cs typeface="Times New Roman" pitchFamily="34" charset="-120"/>
-              </a:rPr>
-              <a:t>Learning activities</a:t>
-            </a:r>
-            <a:endParaRPr lang="en-US" sz="4000" dirty="0"/>
+                <a:latin typeface="Calibri" pitchFamily="34" charset="0"/>
+                <a:ea typeface="Calibri" pitchFamily="34" charset="-122"/>
+                <a:cs typeface="Calibri" pitchFamily="34" charset="-120"/>
+              </a:rPr>
+              <a:t>Photo, board summary (Polar zones (above 60°)): “The Art of Retreat” by subarcticmike, CC BY 2.0, via Flickr (https://www.flickr.com/photos/31856336@N03/7048837663)</a:t>
+            </a:r>
+            <a:endParaRPr lang="en-US" sz="1800" dirty="0"/>
           </a:p>
           <a:p>
             <a:pPr algn="l" marL="342900" indent="-342900">
@@ -23508,21 +26589,20 @@
                 <a:spcPts val="800"/>
               </a:spcAft>
               <a:buSzPct val="100000"/>
-              <a:buFont typeface="+mj-lt"/>
-              <a:buAutoNum type="arabicPeriod" startAt="1"/>
-            </a:pPr>
-            <a:r>
-              <a:rPr lang="en-US" sz="4000" dirty="0">
+              <a:buChar char="•"/>
+            </a:pPr>
+            <a:r>
+              <a:rPr lang="en-US" sz="1800" dirty="0">
                 <a:solidFill>
                   <a:srgbClr val="111111"/>
                 </a:solidFill>
-                <a:latin typeface="Times New Roman" pitchFamily="34" charset="0"/>
-                <a:ea typeface="Times New Roman" pitchFamily="34" charset="-122"/>
-                <a:cs typeface="Times New Roman" pitchFamily="34" charset="-120"/>
-              </a:rPr>
-              <a:t>Board summary</a:t>
-            </a:r>
-            <a:endParaRPr lang="en-US" sz="4000" dirty="0"/>
+                <a:latin typeface="Calibri" pitchFamily="34" charset="0"/>
+                <a:ea typeface="Calibri" pitchFamily="34" charset="-122"/>
+                <a:cs typeface="Calibri" pitchFamily="34" charset="-120"/>
+              </a:rPr>
+              <a:t>Photo, board summary (Continental air masses): “Bamenda sob a poeira do Harmattan” by carlosoliveirareis, CC BY-NC-SA 2.0, via Flickr (https://www.flickr.com/photos/54218923@N00/387054136)</a:t>
+            </a:r>
+            <a:endParaRPr lang="en-US" sz="1800" dirty="0"/>
           </a:p>
           <a:p>
             <a:pPr algn="l" marL="342900" indent="-342900">
@@ -23530,21 +26610,41 @@
                 <a:spcPts val="800"/>
               </a:spcAft>
               <a:buSzPct val="100000"/>
-              <a:buFont typeface="+mj-lt"/>
-              <a:buAutoNum type="arabicPeriod" startAt="1"/>
-            </a:pPr>
-            <a:r>
-              <a:rPr lang="en-US" sz="4000" dirty="0">
+              <a:buChar char="•"/>
+            </a:pPr>
+            <a:r>
+              <a:rPr lang="en-US" sz="1800" dirty="0">
                 <a:solidFill>
                   <a:srgbClr val="111111"/>
                 </a:solidFill>
-                <a:latin typeface="Times New Roman" pitchFamily="34" charset="0"/>
-                <a:ea typeface="Times New Roman" pitchFamily="34" charset="-122"/>
-                <a:cs typeface="Times New Roman" pitchFamily="34" charset="-120"/>
-              </a:rPr>
-              <a:t>Evaluation, remediation and homework</a:t>
-            </a:r>
-            <a:endParaRPr lang="en-US" sz="4000" dirty="0"/>
+                <a:latin typeface="Calibri" pitchFamily="34" charset="0"/>
+                <a:ea typeface="Calibri" pitchFamily="34" charset="-122"/>
+                <a:cs typeface="Calibri" pitchFamily="34" charset="-120"/>
+              </a:rPr>
+              <a:t>Photo, board summary (Vegetation): “Amazon 11” by CIAT International Center for Tropical Agriculture, CC BY-SA 2.0, via Flickr (https://www.flickr.com/photos/38476503@N08/5641587148)</a:t>
+            </a:r>
+            <a:endParaRPr lang="en-US" sz="1800" dirty="0"/>
+          </a:p>
+          <a:p>
+            <a:pPr algn="l" marL="342900" indent="-342900">
+              <a:spcAft>
+                <a:spcPts val="800"/>
+              </a:spcAft>
+              <a:buSzPct val="100000"/>
+              <a:buChar char="•"/>
+            </a:pPr>
+            <a:r>
+              <a:rPr lang="en-US" sz="1800" dirty="0">
+                <a:solidFill>
+                  <a:srgbClr val="111111"/>
+                </a:solidFill>
+                <a:latin typeface="Calibri" pitchFamily="34" charset="0"/>
+                <a:ea typeface="Calibri" pitchFamily="34" charset="-122"/>
+                <a:cs typeface="Calibri" pitchFamily="34" charset="-120"/>
+              </a:rPr>
+              <a:t>Photo, board summary (Water bodies): “Lake Chad: almost gone” by GRIDArendal, CC BY-NC-SA 2.0, via Flickr (https://www.flickr.com/photos/148768555@N05/32323646926)</a:t>
+            </a:r>
+            <a:endParaRPr lang="en-US" sz="1800" dirty="0"/>
           </a:p>
         </p:txBody>
       </p:sp>
@@ -23590,7 +26690,7 @@
             <a:pPr algn="ctr"/>
             <a:fld id="{F7021451-1387-4CA6-816F-3879F97B5CBC}" type="slidenum">
               <a:rPr b="1" lang="en-US"/>
-              <a:t>6</a:t>
+              <a:t>67</a:t>
             </a:fld>
             <a:endParaRPr lang="en-US"/>
           </a:p>
@@ -23604,9 +26704,9 @@
 </p:sld>
 </file>
 
-<file path=ppt/slides/slide60.xml><?xml version="1.0" encoding="utf-8"?>
+<file path=ppt/slides/slide68.xml><?xml version="1.0" encoding="utf-8"?>
 <p:sld xmlns:a="http://schemas.openxmlformats.org/drawingml/2006/main" xmlns:r="http://schemas.openxmlformats.org/officeDocument/2006/relationships" xmlns:p="http://schemas.openxmlformats.org/presentationml/2006/main">
-  <p:cSld name="Slide 60">
+  <p:cSld name="Slide 68">
     <p:spTree>
       <p:nvGrpSpPr>
         <p:cNvPr id="1" name=""/>
@@ -23719,7 +26819,7 @@
                 <a:ea typeface="Times New Roman" pitchFamily="34" charset="-122"/>
                 <a:cs typeface="Times New Roman" pitchFamily="34" charset="-120"/>
               </a:rPr>
-              <a:t>References</a:t>
+              <a:t>References (continued)</a:t>
             </a:r>
             <a:endParaRPr lang="en-US" sz="3600" dirty="0"/>
           </a:p>
@@ -23762,90 +26862,6 @@
                 <a:ea typeface="Calibri" pitchFamily="34" charset="-122"/>
                 <a:cs typeface="Calibri" pitchFamily="34" charset="-120"/>
               </a:rPr>
-              <a:t>Geography Syllabus for Sixth Forms (Lower and Upper Sixth), MINESEC, 2019 — Module 1 (Meteorology, Climatology &amp; Hydrology).</a:t>
-            </a:r>
-            <a:endParaRPr lang="en-US" sz="1800" dirty="0"/>
-          </a:p>
-          <a:p>
-            <a:pPr algn="l" marL="342900" indent="-342900">
-              <a:spcAft>
-                <a:spcPts val="800"/>
-              </a:spcAft>
-              <a:buSzPct val="100000"/>
-              <a:buChar char="•"/>
-            </a:pPr>
-            <a:r>
-              <a:rPr lang="en-US" sz="1800" dirty="0">
-                <a:solidFill>
-                  <a:srgbClr val="111111"/>
-                </a:solidFill>
-                <a:latin typeface="Calibri" pitchFamily="34" charset="0"/>
-                <a:ea typeface="Calibri" pitchFamily="34" charset="-122"/>
-                <a:cs typeface="Calibri" pitchFamily="34" charset="-120"/>
-              </a:rPr>
-              <a:t>Teacher's course notes: Mr KAMDEM E., Meteorology (LSA), GBHS Garoua, 2026.</a:t>
-            </a:r>
-            <a:endParaRPr lang="en-US" sz="1800" dirty="0"/>
-          </a:p>
-          <a:p>
-            <a:pPr algn="l" marL="342900" indent="-342900">
-              <a:spcAft>
-                <a:spcPts val="800"/>
-              </a:spcAft>
-              <a:buSzPct val="100000"/>
-              <a:buChar char="•"/>
-            </a:pPr>
-            <a:r>
-              <a:rPr lang="en-US" sz="1800" dirty="0">
-                <a:solidFill>
-                  <a:srgbClr val="111111"/>
-                </a:solidFill>
-                <a:latin typeface="Calibri" pitchFamily="34" charset="0"/>
-                <a:ea typeface="Calibri" pitchFamily="34" charset="-122"/>
-                <a:cs typeface="Calibri" pitchFamily="34" charset="-120"/>
-              </a:rPr>
-              <a:t>Photo, Activity 3: “Desert trekking in Merzouga” by Antonio Cinotti , CC BY-NC-ND 2.0, via Flickr (https://www.flickr.com/photos/46378751@N02/15331399979)</a:t>
-            </a:r>
-            <a:endParaRPr lang="en-US" sz="1800" dirty="0"/>
-          </a:p>
-          <a:p>
-            <a:pPr algn="l" marL="342900" indent="-342900">
-              <a:spcAft>
-                <a:spcPts val="800"/>
-              </a:spcAft>
-              <a:buSzPct val="100000"/>
-              <a:buChar char="•"/>
-            </a:pPr>
-            <a:r>
-              <a:rPr lang="en-US" sz="1800" dirty="0">
-                <a:solidFill>
-                  <a:srgbClr val="111111"/>
-                </a:solidFill>
-                <a:latin typeface="Calibri" pitchFamily="34" charset="0"/>
-                <a:ea typeface="Calibri" pitchFamily="34" charset="-122"/>
-                <a:cs typeface="Calibri" pitchFamily="34" charset="-120"/>
-              </a:rPr>
-              <a:t>Photo, board summary (Continental air masses): “Bamenda sob a poeira do Harmattan” by carlosoliveirareis, CC BY-NC-SA 2.0, via Flickr (https://www.flickr.com/photos/54218923@N00/387054136)</a:t>
-            </a:r>
-            <a:endParaRPr lang="en-US" sz="1800" dirty="0"/>
-          </a:p>
-          <a:p>
-            <a:pPr algn="l" marL="342900" indent="-342900">
-              <a:spcAft>
-                <a:spcPts val="800"/>
-              </a:spcAft>
-              <a:buSzPct val="100000"/>
-              <a:buChar char="•"/>
-            </a:pPr>
-            <a:r>
-              <a:rPr lang="en-US" sz="1800" dirty="0">
-                <a:solidFill>
-                  <a:srgbClr val="111111"/>
-                </a:solidFill>
-                <a:latin typeface="Calibri" pitchFamily="34" charset="0"/>
-                <a:ea typeface="Calibri" pitchFamily="34" charset="-122"/>
-                <a:cs typeface="Calibri" pitchFamily="34" charset="-120"/>
-              </a:rPr>
               <a:t>Diagrams and animations: drawn for this lesson (Geography Department).</a:t>
             </a:r>
             <a:endParaRPr lang="en-US" sz="1800" dirty="0"/>
@@ -23894,7 +26910,7 @@
             <a:pPr algn="ctr"/>
             <a:fld id="{F7021451-1387-4CA6-816F-3879F97B5CBC}" type="slidenum">
               <a:rPr b="1" lang="en-US"/>
-              <a:t>60</a:t>
+              <a:t>68</a:t>
             </a:fld>
             <a:endParaRPr lang="en-US"/>
           </a:p>
